--- a/lecons/LSA/Meteorology/02_LSA_MET_L02_Structure_of_the_Atmosphere.pptx
+++ b/lecons/LSA/Meteorology/02_LSA_MET_L02_Structure_of_the_Atmosphere.pptx
@@ -67,9 +67,12 @@
     <p:sldId id="315" r:id="rId61"/>
     <p:sldId id="316" r:id="rId62"/>
     <p:sldId id="317" r:id="rId63"/>
+    <p:sldId id="318" r:id="rId64"/>
+    <p:sldId id="319" r:id="rId65"/>
+    <p:sldId id="320" r:id="rId66"/>
   </p:sldIdLst>
   <p:notesMasterIdLst>
-    <p:notesMasterId r:id="rId64"/>
+    <p:notesMasterId r:id="rId67"/>
   </p:notesMasterIdLst>
   <p:sldSz cx="12192000" cy="6858000"/>
   <p:notesSz cx="6858000" cy="12192000"/>
@@ -3203,7 +3206,7 @@
           <a:p>
             <a:r>
               <a:rPr lang="en-US" dirty="0"/>
-              <a:t>We continue with the definitions. On this slide we have Tropopause and Ozone layer. Write each point on a new line, with the key term first, and explain it in your own words when we revise.</a:t>
+              <a:t>We continue with the definitions. On this slide we have Isothermal layer and Ozone layer. Write each point on a new line, with the key term first, and explain it in your own words when we revise.</a:t>
             </a:r>
             <a:endParaRPr lang="en-US" dirty="0"/>
           </a:p>
@@ -3291,7 +3294,7 @@
           <a:p>
             <a:r>
               <a:rPr lang="en-US" dirty="0"/>
-              <a:t>Let us copy Structure by Chemical Composition. By composition, the atmosphere is divided as follows. Copy the point on Homosphere (0 – about 80 km) on the left, then draw the diagram on the right: homosphere and heterosphere. Give it a title and label it clearly.</a:t>
+              <a:t>Let us copy Chemical Characteristics: Homosphere and Heterosphere. By its chemical composition, the atmosphere is divided into the following two layers. Copy the point on Homosphere (0 to about 80 km) on the left, then draw the diagram on the right: homosphere and heterosphere. Give it a title and label it clearly.</a:t>
             </a:r>
             <a:endParaRPr lang="en-US" dirty="0"/>
           </a:p>
@@ -3379,7 +3382,7 @@
           <a:p>
             <a:r>
               <a:rPr lang="en-US" dirty="0"/>
-              <a:t>We continue with Structure by Chemical Composition. On this slide we have Heterosphere (above 80 km). Write each point on a new line, with the key term first, and explain it in your own words when we revise.</a:t>
+              <a:t>We continue with Chemical Characteristics: Homosphere and Heterosphere. Copy the point on Heterosphere (above 80 km): write the key term first, then its explanation.</a:t>
             </a:r>
             <a:endParaRPr lang="en-US" dirty="0"/>
           </a:p>
@@ -3555,7 +3558,7 @@
           <a:p>
             <a:r>
               <a:rPr lang="en-US" dirty="0"/>
-              <a:t>Let us copy Structure by Temperature. By temperature, the atmosphere has the following layers. Copy the point on Troposphere on the left, then draw the diagram on the right: the layers of the atmosphere. Give it a title and label it clearly.</a:t>
+              <a:t>Let us copy The Four Layers. By temperature, the atmosphere has the following four layers. Copy the point on Troposphere on the left, then draw the diagram on the right: the layers of the atmosphere. Give it a title and label it clearly.</a:t>
             </a:r>
             <a:endParaRPr lang="en-US" dirty="0"/>
           </a:p>
@@ -3643,7 +3646,7 @@
           <a:p>
             <a:r>
               <a:rPr lang="en-US" dirty="0"/>
-              <a:t>We continue with Structure by Temperature. On this slide we have Role of the troposphere. Write each point on a new line, with the key term first, and explain it in your own words when we revise.</a:t>
+              <a:t>Copy the point on Stratosphere (to about 50 km) on the left, then draw the diagram on the right: temperature and height. Give it a title and label it clearly.</a:t>
             </a:r>
             <a:endParaRPr lang="en-US" dirty="0"/>
           </a:p>
@@ -3731,7 +3734,7 @@
           <a:p>
             <a:r>
               <a:rPr lang="en-US" dirty="0"/>
-              <a:t>Copy the point on Stratosphere (to about 50 km) on the left, then draw the diagram on the right: temperature and height. Give it a title and label it clearly.</a:t>
+              <a:t>We continue with The Four Layers. Copy the point on Mesosphere (50 to 80 km): write the key term first, then its explanation.</a:t>
             </a:r>
             <a:endParaRPr lang="en-US" dirty="0"/>
           </a:p>
@@ -3819,7 +3822,7 @@
           <a:p>
             <a:r>
               <a:rPr lang="en-US" dirty="0"/>
-              <a:t>We continue with Structure by Temperature. On this slide we have Mesosphere (50–80 km). Write each point on a new line, with the key term first, and explain it in your own words when we revise.</a:t>
+              <a:t>Copy the point on Thermosphere (above 80 km) on the left, then draw the diagram on the right: an aurora. Give it a title and label it clearly.</a:t>
             </a:r>
             <a:endParaRPr lang="en-US" dirty="0"/>
           </a:p>
@@ -3907,7 +3910,7 @@
           <a:p>
             <a:r>
               <a:rPr lang="en-US" dirty="0"/>
-              <a:t>Copy the point on Thermosphere (above 80 km) on the left, then draw the diagram on the right: an aurora. Give it a title and label it clearly.</a:t>
+              <a:t>Let us copy The Isothermal Layers. The isothermal layers of the atmosphere are the following. Copy the point on Tropopause and lower stratosphere: write the key term first, then its explanation.</a:t>
             </a:r>
             <a:endParaRPr lang="en-US" dirty="0"/>
           </a:p>
@@ -3995,7 +3998,7 @@
           <a:p>
             <a:r>
               <a:rPr lang="en-US" dirty="0"/>
-              <a:t>We continue with Structure by Temperature. On this slide we have Pauses. Write each point on a new line, with the key term first, and explain it in your own words when we revise.</a:t>
+              <a:t>We continue with The Isothermal Layers. Copy the point on Stratopause and mesopause: write the key term first, then its explanation.</a:t>
             </a:r>
             <a:endParaRPr lang="en-US" dirty="0"/>
           </a:p>
@@ -4083,7 +4086,7 @@
           <a:p>
             <a:r>
               <a:rPr lang="en-US" dirty="0"/>
-              <a:t>Let us copy The Ozone Layer. The ozone layer is presented as follows. On this slide we have Function. Write each point on a new line, with the key term first, and explain it in your own words when we revise.</a:t>
+              <a:t>Let us copy Function. The ozone layer has the following functions. Copy the point on Absorption of ultraviolet rays on the left, then draw the diagram on the right: the ozone layer. Give it a title and label it clearly.</a:t>
             </a:r>
             <a:endParaRPr lang="en-US" dirty="0"/>
           </a:p>
@@ -4171,7 +4174,7 @@
           <a:p>
             <a:r>
               <a:rPr lang="en-US" dirty="0"/>
-              <a:t>Copy the point on Depletion on the left, then draw the diagram on the right: the ozone hole. Give it a title and label it clearly.</a:t>
+              <a:t>We continue with Function. Copy the point on Heating of the stratosphere: write the key term first, then its explanation.</a:t>
             </a:r>
             <a:endParaRPr lang="en-US" dirty="0"/>
           </a:p>
@@ -4259,7 +4262,7 @@
           <a:p>
             <a:r>
               <a:rPr lang="en-US" dirty="0"/>
-              <a:t>We continue with The Ozone Layer. On this slide we have Protection. Write each point on a new line, with the key term first, and explain it in your own words when we revise. When you finish, we go to the next slide.</a:t>
+              <a:t>Let us copy Depletion. The ozone layer is depleted in the following ways. Copy the point on Chlorofluorocarbons (CFCs): write the key term first, then its explanation.</a:t>
             </a:r>
             <a:endParaRPr lang="en-US" dirty="0"/>
           </a:p>
@@ -4347,7 +4350,7 @@
           <a:p>
             <a:r>
               <a:rPr lang="en-US" dirty="0"/>
-              <a:t>We continue with The Ozone Layer. Copy this carefully.</a:t>
+              <a:t>We continue with Depletion. Copy the point on Other ozone-destroying gases: write the key term first, then its explanation.</a:t>
             </a:r>
             <a:endParaRPr lang="en-US" dirty="0"/>
           </a:p>
@@ -4523,7 +4526,7 @@
           <a:p>
             <a:r>
               <a:rPr lang="en-US" dirty="0"/>
-              <a:t>Copy the point on Sun protection on the left, then draw the diagram on the right: protecting the ozone layer. Give it a title and label it clearly.</a:t>
+              <a:t>Copy the point on The ozone hole on the left, then draw the diagram on the right: the ozone hole. Give it a title and label it clearly.</a:t>
             </a:r>
             <a:endParaRPr lang="en-US" dirty="0"/>
           </a:p>
@@ -4611,7 +4614,7 @@
           <a:p>
             <a:r>
               <a:rPr lang="en-US" dirty="0"/>
-              <a:t>Now let us check what you have understood. Question 1: Why does temperature fall in the troposphere but rise in the stratosphere? Answer in your exercise book.</a:t>
+              <a:t>Let us copy Measures. The ozone layer is protected by the following measures. Copy the point on The Montreal Protocol (1987): write the key term first, then its explanation.</a:t>
             </a:r>
             <a:endParaRPr lang="en-US" dirty="0"/>
           </a:p>
@@ -4699,7 +4702,7 @@
           <a:p>
             <a:r>
               <a:rPr lang="en-US" dirty="0"/>
-              <a:t>The expected answer is: the troposphere is heated from the ground below; the stratosphere is heated by ozone absorbing ultraviolet rays. If you got it right, well done.</a:t>
+              <a:t>We continue with Measures. Copy the point on Collection of old equipment: write the key term first, then its explanation.</a:t>
             </a:r>
             <a:endParaRPr lang="en-US" dirty="0"/>
           </a:p>
@@ -4787,7 +4790,7 @@
           <a:p>
             <a:r>
               <a:rPr lang="en-US" dirty="0"/>
-              <a:t>Now let us check what you have understood. Question 2: Give two measures to protect the ozone layer. Answer in your exercise book.</a:t>
+              <a:t>We continue with Measures. Copy the point on Education and sun protection: write the key term first, then its explanation.</a:t>
             </a:r>
             <a:endParaRPr lang="en-US" dirty="0"/>
           </a:p>
@@ -4875,7 +4878,7 @@
           <a:p>
             <a:r>
               <a:rPr lang="en-US" dirty="0"/>
-              <a:t>The expected answer is: apply the Montreal Protocol, stop using CFCs, recycle old fridges, educate people (any two). If you got it right, well done.</a:t>
+              <a:t>Now let us check what you have understood. Question 1: Why does temperature fall in the troposphere but rise in the stratosphere? Answer in your exercise book.</a:t>
             </a:r>
             <a:endParaRPr lang="en-US" dirty="0"/>
           </a:p>
@@ -4963,7 +4966,7 @@
           <a:p>
             <a:r>
               <a:rPr lang="en-US" dirty="0"/>
-              <a:t>For those who need more practice, fill in the blanks in your exercise book. The answers are: number 1, troposphere; number 2, stratosphere; number 3, mesosphere.</a:t>
+              <a:t>The expected answer is: the troposphere is heated from the ground below; the stratosphere is heated by ozone absorbing ultraviolet rays. If you got it right, well done.</a:t>
             </a:r>
             <a:endParaRPr lang="en-US" dirty="0"/>
           </a:p>
@@ -5051,7 +5054,7 @@
           <a:p>
             <a:r>
               <a:rPr lang="en-US" dirty="0"/>
-              <a:t>For your homework: Define insolation. We shall correct it at the beginning of our next lesson.</a:t>
+              <a:t>Now let us check what you have understood. Question 2: Give two measures to protect the ozone layer. Answer in your exercise book.</a:t>
             </a:r>
             <a:endParaRPr lang="en-US" dirty="0"/>
           </a:p>
@@ -5139,7 +5142,7 @@
           <a:p>
             <a:r>
               <a:rPr lang="en-US" dirty="0"/>
-              <a:t>Our next lesson will be on Lesson 3: Solar Radiation. Thank you for your attention, and see you next time.</a:t>
+              <a:t>The expected answer is: apply the Montreal Protocol, stop using CFCs, recycle old fridges, educate people (any two). If you got it right, well done.</a:t>
             </a:r>
             <a:endParaRPr lang="en-US" dirty="0"/>
           </a:p>
@@ -5227,7 +5230,7 @@
           <a:p>
             <a:r>
               <a:rPr lang="en-US" dirty="0"/>
-              <a:t>Let us play the bilingual game. I say a word in English, and you give me the French word. Then we do the reverse.</a:t>
+              <a:t>For those who need more practice, fill in the blanks in your exercise book. The answers are: number 1, troposphere; number 2, stratosphere; number 3, mesosphere.</a:t>
             </a:r>
             <a:endParaRPr lang="en-US" dirty="0"/>
           </a:p>
@@ -5315,7 +5318,7 @@
           <a:p>
             <a:r>
               <a:rPr lang="en-US" dirty="0"/>
-              <a:t>I record this information in the official logbook of the class after the lesson.</a:t>
+              <a:t>For your homework: Define insolation. We shall correct it at the beginning of our next lesson.</a:t>
             </a:r>
             <a:endParaRPr lang="en-US" dirty="0"/>
           </a:p>
@@ -5491,7 +5494,7 @@
           <a:p>
             <a:r>
               <a:rPr lang="en-US" dirty="0"/>
-              <a:t>I complete the second page of the logbook: the matter taught, the evaluation, the homework and the attendance.</a:t>
+              <a:t>Our next lesson will be on Lesson 3: Solar Radiation. Thank you for your attention, and see you next time.</a:t>
             </a:r>
             <a:endParaRPr lang="en-US" dirty="0"/>
           </a:p>
@@ -5579,7 +5582,7 @@
           <a:p>
             <a:r>
               <a:rPr lang="en-US" dirty="0"/>
-              <a:t>This slide is for me, the teacher: it gives the timing of the lesson and what to do if the projector is not available.</a:t>
+              <a:t>Let us play the bilingual game. I say a word in English, and you give me the French word. Then we do the reverse.</a:t>
             </a:r>
             <a:endParaRPr lang="en-US" dirty="0"/>
           </a:p>
@@ -5667,7 +5670,7 @@
           <a:p>
             <a:r>
               <a:rPr lang="en-US" dirty="0"/>
-              <a:t>These are the references and picture credits used to prepare this lesson.</a:t>
+              <a:t>I record this information in the official logbook of the class after the lesson.</a:t>
             </a:r>
             <a:endParaRPr lang="en-US" dirty="0"/>
           </a:p>
@@ -5691,6 +5694,270 @@
             <a:fld id="{F7021451-1387-4CA6-816F-3879F97B5CBC}" type="slidenum">
               <a:rPr lang="en-US"/>
               <a:t>62</a:t>
+            </a:fld>
+            <a:endParaRPr lang="en-US"/>
+          </a:p>
+        </p:txBody>
+      </p:sp>
+    </p:spTree>
+    <p:extLst>
+      <p:ext uri="{BB962C8B-B14F-4D97-AF65-F5344CB8AC3E}">
+        <p14:creationId xmlns:p14="http://schemas.microsoft.com/office/powerpoint/2010/main" val="1024086991"/>
+      </p:ext>
+    </p:extLst>
+  </p:cSld>
+  <p:clrMapOvr>
+    <a:masterClrMapping/>
+  </p:clrMapOvr>
+</p:notes>
+</file>
+
+<file path=ppt/notesSlides/notesSlide63.xml><?xml version="1.0" encoding="utf-8"?>
+<p:notes xmlns:a="http://schemas.openxmlformats.org/drawingml/2006/main" xmlns:r="http://schemas.openxmlformats.org/officeDocument/2006/relationships" xmlns:p="http://schemas.openxmlformats.org/presentationml/2006/main">
+  <p:cSld>
+    <p:spTree>
+      <p:nvGrpSpPr>
+        <p:cNvPr id="1" name=""/>
+        <p:cNvGrpSpPr/>
+        <p:nvPr/>
+      </p:nvGrpSpPr>
+      <p:grpSpPr>
+        <a:xfrm>
+          <a:off x="0" y="0"/>
+          <a:ext cx="0" cy="0"/>
+          <a:chOff x="0" y="0"/>
+          <a:chExt cx="0" cy="0"/>
+        </a:xfrm>
+      </p:grpSpPr>
+      <p:sp>
+        <p:nvSpPr>
+          <p:cNvPr id="2" name="Slide Image Placeholder 1"/>
+          <p:cNvSpPr>
+            <a:spLocks noGrp="1" noRot="1" noChangeAspect="1"/>
+          </p:cNvSpPr>
+          <p:nvPr>
+            <p:ph type="sldImg"/>
+          </p:nvPr>
+        </p:nvSpPr>
+        <p:spPr/>
+      </p:sp>
+      <p:sp>
+        <p:nvSpPr>
+          <p:cNvPr id="3" name="Notes Placeholder 2"/>
+          <p:cNvSpPr>
+            <a:spLocks noGrp="1"/>
+          </p:cNvSpPr>
+          <p:nvPr>
+            <p:ph type="body" idx="1"/>
+          </p:nvPr>
+        </p:nvSpPr>
+        <p:spPr/>
+        <p:txBody>
+          <a:bodyPr/>
+          <a:lstStyle/>
+          <a:p>
+            <a:r>
+              <a:rPr lang="en-US" dirty="0"/>
+              <a:t>I complete the second page of the logbook: the matter taught, the evaluation, the homework and the attendance.</a:t>
+            </a:r>
+            <a:endParaRPr lang="en-US" dirty="0"/>
+          </a:p>
+        </p:txBody>
+      </p:sp>
+      <p:sp>
+        <p:nvSpPr>
+          <p:cNvPr id="4" name="Slide Number Placeholder 3"/>
+          <p:cNvSpPr>
+            <a:spLocks noGrp="1"/>
+          </p:cNvSpPr>
+          <p:nvPr>
+            <p:ph type="sldNum" sz="quarter" idx="10"/>
+          </p:nvPr>
+        </p:nvSpPr>
+        <p:spPr/>
+        <p:txBody>
+          <a:bodyPr/>
+          <a:lstStyle/>
+          <a:p>
+            <a:fld id="{F7021451-1387-4CA6-816F-3879F97B5CBC}" type="slidenum">
+              <a:rPr lang="en-US"/>
+              <a:t>63</a:t>
+            </a:fld>
+            <a:endParaRPr lang="en-US"/>
+          </a:p>
+        </p:txBody>
+      </p:sp>
+    </p:spTree>
+    <p:extLst>
+      <p:ext uri="{BB962C8B-B14F-4D97-AF65-F5344CB8AC3E}">
+        <p14:creationId xmlns:p14="http://schemas.microsoft.com/office/powerpoint/2010/main" val="1024086991"/>
+      </p:ext>
+    </p:extLst>
+  </p:cSld>
+  <p:clrMapOvr>
+    <a:masterClrMapping/>
+  </p:clrMapOvr>
+</p:notes>
+</file>
+
+<file path=ppt/notesSlides/notesSlide64.xml><?xml version="1.0" encoding="utf-8"?>
+<p:notes xmlns:a="http://schemas.openxmlformats.org/drawingml/2006/main" xmlns:r="http://schemas.openxmlformats.org/officeDocument/2006/relationships" xmlns:p="http://schemas.openxmlformats.org/presentationml/2006/main">
+  <p:cSld>
+    <p:spTree>
+      <p:nvGrpSpPr>
+        <p:cNvPr id="1" name=""/>
+        <p:cNvGrpSpPr/>
+        <p:nvPr/>
+      </p:nvGrpSpPr>
+      <p:grpSpPr>
+        <a:xfrm>
+          <a:off x="0" y="0"/>
+          <a:ext cx="0" cy="0"/>
+          <a:chOff x="0" y="0"/>
+          <a:chExt cx="0" cy="0"/>
+        </a:xfrm>
+      </p:grpSpPr>
+      <p:sp>
+        <p:nvSpPr>
+          <p:cNvPr id="2" name="Slide Image Placeholder 1"/>
+          <p:cNvSpPr>
+            <a:spLocks noGrp="1" noRot="1" noChangeAspect="1"/>
+          </p:cNvSpPr>
+          <p:nvPr>
+            <p:ph type="sldImg"/>
+          </p:nvPr>
+        </p:nvSpPr>
+        <p:spPr/>
+      </p:sp>
+      <p:sp>
+        <p:nvSpPr>
+          <p:cNvPr id="3" name="Notes Placeholder 2"/>
+          <p:cNvSpPr>
+            <a:spLocks noGrp="1"/>
+          </p:cNvSpPr>
+          <p:nvPr>
+            <p:ph type="body" idx="1"/>
+          </p:nvPr>
+        </p:nvSpPr>
+        <p:spPr/>
+        <p:txBody>
+          <a:bodyPr/>
+          <a:lstStyle/>
+          <a:p>
+            <a:r>
+              <a:rPr lang="en-US" dirty="0"/>
+              <a:t>This slide is for me, the teacher: it gives the timing of the lesson and what to do if the projector is not available.</a:t>
+            </a:r>
+            <a:endParaRPr lang="en-US" dirty="0"/>
+          </a:p>
+        </p:txBody>
+      </p:sp>
+      <p:sp>
+        <p:nvSpPr>
+          <p:cNvPr id="4" name="Slide Number Placeholder 3"/>
+          <p:cNvSpPr>
+            <a:spLocks noGrp="1"/>
+          </p:cNvSpPr>
+          <p:nvPr>
+            <p:ph type="sldNum" sz="quarter" idx="10"/>
+          </p:nvPr>
+        </p:nvSpPr>
+        <p:spPr/>
+        <p:txBody>
+          <a:bodyPr/>
+          <a:lstStyle/>
+          <a:p>
+            <a:fld id="{F7021451-1387-4CA6-816F-3879F97B5CBC}" type="slidenum">
+              <a:rPr lang="en-US"/>
+              <a:t>64</a:t>
+            </a:fld>
+            <a:endParaRPr lang="en-US"/>
+          </a:p>
+        </p:txBody>
+      </p:sp>
+    </p:spTree>
+    <p:extLst>
+      <p:ext uri="{BB962C8B-B14F-4D97-AF65-F5344CB8AC3E}">
+        <p14:creationId xmlns:p14="http://schemas.microsoft.com/office/powerpoint/2010/main" val="1024086991"/>
+      </p:ext>
+    </p:extLst>
+  </p:cSld>
+  <p:clrMapOvr>
+    <a:masterClrMapping/>
+  </p:clrMapOvr>
+</p:notes>
+</file>
+
+<file path=ppt/notesSlides/notesSlide65.xml><?xml version="1.0" encoding="utf-8"?>
+<p:notes xmlns:a="http://schemas.openxmlformats.org/drawingml/2006/main" xmlns:r="http://schemas.openxmlformats.org/officeDocument/2006/relationships" xmlns:p="http://schemas.openxmlformats.org/presentationml/2006/main">
+  <p:cSld>
+    <p:spTree>
+      <p:nvGrpSpPr>
+        <p:cNvPr id="1" name=""/>
+        <p:cNvGrpSpPr/>
+        <p:nvPr/>
+      </p:nvGrpSpPr>
+      <p:grpSpPr>
+        <a:xfrm>
+          <a:off x="0" y="0"/>
+          <a:ext cx="0" cy="0"/>
+          <a:chOff x="0" y="0"/>
+          <a:chExt cx="0" cy="0"/>
+        </a:xfrm>
+      </p:grpSpPr>
+      <p:sp>
+        <p:nvSpPr>
+          <p:cNvPr id="2" name="Slide Image Placeholder 1"/>
+          <p:cNvSpPr>
+            <a:spLocks noGrp="1" noRot="1" noChangeAspect="1"/>
+          </p:cNvSpPr>
+          <p:nvPr>
+            <p:ph type="sldImg"/>
+          </p:nvPr>
+        </p:nvSpPr>
+        <p:spPr/>
+      </p:sp>
+      <p:sp>
+        <p:nvSpPr>
+          <p:cNvPr id="3" name="Notes Placeholder 2"/>
+          <p:cNvSpPr>
+            <a:spLocks noGrp="1"/>
+          </p:cNvSpPr>
+          <p:nvPr>
+            <p:ph type="body" idx="1"/>
+          </p:nvPr>
+        </p:nvSpPr>
+        <p:spPr/>
+        <p:txBody>
+          <a:bodyPr/>
+          <a:lstStyle/>
+          <a:p>
+            <a:r>
+              <a:rPr lang="en-US" dirty="0"/>
+              <a:t>These are the references and picture credits used to prepare this lesson.</a:t>
+            </a:r>
+            <a:endParaRPr lang="en-US" dirty="0"/>
+          </a:p>
+        </p:txBody>
+      </p:sp>
+      <p:sp>
+        <p:nvSpPr>
+          <p:cNvPr id="4" name="Slide Number Placeholder 3"/>
+          <p:cNvSpPr>
+            <a:spLocks noGrp="1"/>
+          </p:cNvSpPr>
+          <p:nvPr>
+            <p:ph type="sldNum" sz="quarter" idx="10"/>
+          </p:nvPr>
+        </p:nvSpPr>
+        <p:spPr/>
+        <p:txBody>
+          <a:bodyPr/>
+          <a:lstStyle/>
+          <a:p>
+            <a:fld id="{F7021451-1387-4CA6-816F-3879F97B5CBC}" type="slidenum">
+              <a:rPr lang="en-US"/>
+              <a:t>65</a:t>
             </a:fld>
             <a:endParaRPr lang="en-US"/>
           </a:p>
@@ -15061,7 +15328,7 @@
                 <a:ea typeface="Times New Roman" pitchFamily="34" charset="-122"/>
                 <a:cs typeface="Times New Roman" pitchFamily="34" charset="-120"/>
               </a:rPr>
-              <a:t>Tropopause: </a:t>
+              <a:t>Isothermal layer: </a:t>
             </a:r>
             <a:pPr algn="l" indent="0" marL="0">
               <a:spcAft>
@@ -15078,7 +15345,7 @@
                 <a:ea typeface="Times New Roman" pitchFamily="34" charset="-122"/>
                 <a:cs typeface="Times New Roman" pitchFamily="34" charset="-120"/>
               </a:rPr>
-              <a:t>It is the boundary between the troposphere and the stratosphere.</a:t>
+              <a:t>It is a layer of the atmosphere in which the temperature does not change with height.</a:t>
             </a:r>
             <a:endParaRPr lang="en-US" sz="4000" dirty="0"/>
           </a:p>
@@ -15268,7 +15535,7 @@
                 <a:ea typeface="Times New Roman" pitchFamily="34" charset="-122"/>
                 <a:cs typeface="Times New Roman" pitchFamily="34" charset="-120"/>
               </a:rPr>
-              <a:t>1. Structure by Chemical Composition</a:t>
+              <a:t>1. Chemical Characteristics: Homosphere and Heterosphere</a:t>
             </a:r>
             <a:endParaRPr lang="en-US" sz="3600" dirty="0"/>
           </a:p>
@@ -15283,7 +15550,7 @@
         <p:spPr>
           <a:xfrm>
             <a:off x="365760" y="1783080"/>
-            <a:ext cx="4846320" cy="4617720"/>
+            <a:ext cx="6035040" cy="4617720"/>
           </a:xfrm>
           <a:prstGeom prst="rect">
             <a:avLst/>
@@ -15302,7 +15569,7 @@
               <a:buNone/>
             </a:pPr>
             <a:r>
-              <a:rPr lang="en-US" sz="3600" i="1" dirty="0">
+              <a:rPr lang="en-US" sz="2800" i="1" dirty="0">
                 <a:solidFill>
                   <a:srgbClr val="111111"/>
                 </a:solidFill>
@@ -15310,9 +15577,9 @@
                 <a:ea typeface="Times New Roman" pitchFamily="34" charset="-122"/>
                 <a:cs typeface="Times New Roman" pitchFamily="34" charset="-120"/>
               </a:rPr>
-              <a:t>By composition, the atmosphere is divided as follows:</a:t>
-            </a:r>
-            <a:endParaRPr lang="en-US" sz="3600" dirty="0"/>
+              <a:t>By its chemical composition, the atmosphere is divided into the following two layers:</a:t>
+            </a:r>
+            <a:endParaRPr lang="en-US" sz="2800" dirty="0"/>
           </a:p>
           <a:p>
             <a:pPr algn="l" indent="0" marL="0">
@@ -15322,7 +15589,7 @@
               <a:buNone/>
             </a:pPr>
             <a:r>
-              <a:rPr lang="en-US" sz="3600" b="1" dirty="0">
+              <a:rPr lang="en-US" sz="2800" b="1" dirty="0">
                 <a:solidFill>
                   <a:srgbClr val="111111"/>
                 </a:solidFill>
@@ -15330,7 +15597,7 @@
                 <a:ea typeface="Times New Roman" pitchFamily="34" charset="-122"/>
                 <a:cs typeface="Times New Roman" pitchFamily="34" charset="-120"/>
               </a:rPr>
-              <a:t>Homosphere (0 – about 80 km): </a:t>
+              <a:t>Homosphere (0 to about 80 km): </a:t>
             </a:r>
             <a:pPr algn="l" indent="0" marL="0">
               <a:spcAft>
@@ -15339,7 +15606,7 @@
               <a:buNone/>
             </a:pPr>
             <a:r>
-              <a:rPr lang="en-US" sz="3600" dirty="0">
+              <a:rPr lang="en-US" sz="2800" dirty="0">
                 <a:solidFill>
                   <a:srgbClr val="111111"/>
                 </a:solidFill>
@@ -15347,9 +15614,9 @@
                 <a:ea typeface="Times New Roman" pitchFamily="34" charset="-122"/>
                 <a:cs typeface="Times New Roman" pitchFamily="34" charset="-120"/>
               </a:rPr>
-              <a:t>The gases are uniformly mixed (78 % nitrogen, 21 % oxygen); we live in it.</a:t>
-            </a:r>
-            <a:endParaRPr lang="en-US" sz="3600" dirty="0"/>
+              <a:t>In the homosphere, winds and turbulence mix the gases so well that their proportions stay the same, with about 78 % nitrogen and 21 % oxygen. It contains almost all the mass of the air and all living things.</a:t>
+            </a:r>
+            <a:endParaRPr lang="en-US" sz="2800" dirty="0"/>
           </a:p>
         </p:txBody>
       </p:sp>
@@ -15369,8 +15636,8 @@
         </p:blipFill>
         <p:spPr>
           <a:xfrm>
-            <a:off x="5349240" y="2617506"/>
-            <a:ext cx="6659575" cy="2601397"/>
+            <a:off x="6537960" y="2849678"/>
+            <a:ext cx="5470855" cy="2137053"/>
           </a:xfrm>
           <a:prstGeom prst="rect">
             <a:avLst/>
@@ -15385,8 +15652,8 @@
         </p:nvSpPr>
         <p:spPr>
           <a:xfrm>
-            <a:off x="5349240" y="6089904"/>
-            <a:ext cx="6659575" cy="347472"/>
+            <a:off x="6537960" y="6089904"/>
+            <a:ext cx="5470855" cy="347472"/>
           </a:xfrm>
           <a:prstGeom prst="rect">
             <a:avLst/>
@@ -15545,7 +15812,7 @@
         <p:spPr>
           <a:xfrm>
             <a:off x="0" y="658368"/>
-            <a:ext cx="5120640" cy="5833872"/>
+            <a:ext cx="2468880" cy="5833872"/>
           </a:xfrm>
           <a:prstGeom prst="rect">
             <a:avLst/>
@@ -15560,8 +15827,8 @@
         </p:nvSpPr>
         <p:spPr>
           <a:xfrm>
-            <a:off x="5349240" y="1005840"/>
-            <a:ext cx="6522415" cy="731520"/>
+            <a:off x="2697480" y="1005840"/>
+            <a:ext cx="9174175" cy="731520"/>
           </a:xfrm>
           <a:prstGeom prst="rect">
             <a:avLst/>
@@ -15587,7 +15854,7 @@
                 <a:ea typeface="Times New Roman" pitchFamily="34" charset="-122"/>
                 <a:cs typeface="Times New Roman" pitchFamily="34" charset="-120"/>
               </a:rPr>
-              <a:t>1. Structure by Chemical Composition</a:t>
+              <a:t>1. Chemical Characteristics: Homosphere and Heterosphere</a:t>
             </a:r>
             <a:endParaRPr lang="en-US" sz="3600" dirty="0"/>
           </a:p>
@@ -15601,8 +15868,8 @@
         </p:nvSpPr>
         <p:spPr>
           <a:xfrm>
-            <a:off x="5349240" y="1783080"/>
-            <a:ext cx="6522415" cy="4663440"/>
+            <a:off x="2697480" y="1783080"/>
+            <a:ext cx="9174175" cy="4663440"/>
           </a:xfrm>
           <a:prstGeom prst="rect">
             <a:avLst/>
@@ -15646,7 +15913,7 @@
                 <a:ea typeface="Times New Roman" pitchFamily="34" charset="-122"/>
                 <a:cs typeface="Times New Roman" pitchFamily="34" charset="-120"/>
               </a:rPr>
-              <a:t>The air is very thin and gases form layers by weight, with hydrogen at the top.</a:t>
+              <a:t>In the heterosphere, the air is so thin that the gases are no longer mixed and separate according to their weight. Heavy nitrogen is found lowest, followed by oxygen, then helium, and light hydrogen at the top.</a:t>
             </a:r>
             <a:endParaRPr lang="en-US" sz="4000" dirty="0"/>
           </a:p>
@@ -16038,7 +16305,7 @@
                 <a:ea typeface="Times New Roman" pitchFamily="34" charset="-122"/>
                 <a:cs typeface="Times New Roman" pitchFamily="34" charset="-120"/>
               </a:rPr>
-              <a:t>2. Structure by Temperature</a:t>
+              <a:t>2. Thermal Characteristics</a:t>
             </a:r>
             <a:endParaRPr lang="en-US" sz="3600" dirty="0"/>
           </a:p>
@@ -16052,8 +16319,49 @@
         </p:nvSpPr>
         <p:spPr>
           <a:xfrm>
-            <a:off x="365760" y="1783080"/>
-            <a:ext cx="4846320" cy="4617720"/>
+            <a:off x="365760" y="1737360"/>
+            <a:ext cx="6035040" cy="457200"/>
+          </a:xfrm>
+          <a:prstGeom prst="rect">
+            <a:avLst/>
+          </a:prstGeom>
+          <a:noFill/>
+          <a:ln/>
+        </p:spPr>
+        <p:txBody>
+          <a:bodyPr wrap="square" lIns="0" tIns="0" rIns="0" bIns="0" rtlCol="0" anchor="ctr">
+            <a:normAutofit/>
+          </a:bodyPr>
+          <a:lstStyle/>
+          <a:p>
+            <a:pPr algn="l" indent="0" marL="0">
+              <a:buNone/>
+            </a:pPr>
+            <a:r>
+              <a:rPr lang="en-US" sz="3000" b="1" dirty="0">
+                <a:solidFill>
+                  <a:srgbClr val="990011"/>
+                </a:solidFill>
+                <a:latin typeface="Times New Roman" pitchFamily="34" charset="0"/>
+                <a:ea typeface="Times New Roman" pitchFamily="34" charset="-122"/>
+                <a:cs typeface="Times New Roman" pitchFamily="34" charset="-120"/>
+              </a:rPr>
+              <a:t>A) The Four Layers</a:t>
+            </a:r>
+            <a:endParaRPr lang="en-US" sz="3000" dirty="0"/>
+          </a:p>
+        </p:txBody>
+      </p:sp>
+      <p:sp>
+        <p:nvSpPr>
+          <p:cNvPr id="5" name="Text 3"/>
+          <p:cNvSpPr/>
+          <p:nvPr/>
+        </p:nvSpPr>
+        <p:spPr>
+          <a:xfrm>
+            <a:off x="365760" y="2240280"/>
+            <a:ext cx="6035040" cy="4160520"/>
           </a:xfrm>
           <a:prstGeom prst="rect">
             <a:avLst/>
@@ -16072,7 +16380,7 @@
               <a:buNone/>
             </a:pPr>
             <a:r>
-              <a:rPr lang="en-US" sz="3200" i="1" dirty="0">
+              <a:rPr lang="en-US" sz="2600" i="1" dirty="0">
                 <a:solidFill>
                   <a:srgbClr val="111111"/>
                 </a:solidFill>
@@ -16080,9 +16388,9 @@
                 <a:ea typeface="Times New Roman" pitchFamily="34" charset="-122"/>
                 <a:cs typeface="Times New Roman" pitchFamily="34" charset="-120"/>
               </a:rPr>
-              <a:t>By temperature, the atmosphere has the following layers:</a:t>
-            </a:r>
-            <a:endParaRPr lang="en-US" sz="3200" dirty="0"/>
+              <a:t>By temperature, the atmosphere has the following four layers:</a:t>
+            </a:r>
+            <a:endParaRPr lang="en-US" sz="2600" dirty="0"/>
           </a:p>
           <a:p>
             <a:pPr algn="l" indent="0" marL="0">
@@ -16092,7 +16400,7 @@
               <a:buNone/>
             </a:pPr>
             <a:r>
-              <a:rPr lang="en-US" sz="3200" b="1" dirty="0">
+              <a:rPr lang="en-US" sz="2600" b="1" dirty="0">
                 <a:solidFill>
                   <a:srgbClr val="111111"/>
                 </a:solidFill>
@@ -16109,7 +16417,7 @@
               <a:buNone/>
             </a:pPr>
             <a:r>
-              <a:rPr lang="en-US" sz="3200" dirty="0">
+              <a:rPr lang="en-US" sz="2600" dirty="0">
                 <a:solidFill>
                   <a:srgbClr val="111111"/>
                 </a:solidFill>
@@ -16117,15 +16425,15 @@
                 <a:ea typeface="Times New Roman" pitchFamily="34" charset="-122"/>
                 <a:cs typeface="Times New Roman" pitchFamily="34" charset="-120"/>
               </a:rPr>
-              <a:t>From the ground to about 8 km at the poles and 16–18 km at the Equator; temperature falls with height (about 6.5 °C per km).</a:t>
-            </a:r>
-            <a:endParaRPr lang="en-US" sz="3200" dirty="0"/>
+              <a:t>The troposphere reaches about 8 km at the poles and 16 to 18 km at the Equator, and its temperature falls with height by about 6.5 °C per km. It holds about 75 % of the air and almost all the water vapour, so all clouds and weather occur in it.</a:t>
+            </a:r>
+            <a:endParaRPr lang="en-US" sz="2600" dirty="0"/>
           </a:p>
         </p:txBody>
       </p:sp>
       <p:pic>
         <p:nvPicPr>
-          <p:cNvPr id="5" name="Image 0" descr="/home/claude/f4/img/v2/atmosphere_big.png">    </p:cNvPr>
+          <p:cNvPr id="6" name="Image 0" descr="/home/claude/f4/img/v2/atmosphere_big.png">    </p:cNvPr>
           <p:cNvPicPr>
             <a:picLocks noChangeAspect="1"/>
           </p:cNvPicPr>
@@ -16139,8 +16447,8 @@
         </p:blipFill>
         <p:spPr>
           <a:xfrm>
-            <a:off x="5349240" y="2617506"/>
-            <a:ext cx="6659575" cy="2601397"/>
+            <a:off x="6537960" y="2849678"/>
+            <a:ext cx="5470855" cy="2137053"/>
           </a:xfrm>
           <a:prstGeom prst="rect">
             <a:avLst/>
@@ -16149,14 +16457,14 @@
       </p:pic>
       <p:sp>
         <p:nvSpPr>
-          <p:cNvPr id="6" name="Text 3"/>
+          <p:cNvPr id="7" name="Text 4"/>
           <p:cNvSpPr/>
           <p:nvPr/>
         </p:nvSpPr>
         <p:spPr>
           <a:xfrm>
-            <a:off x="5349240" y="6089904"/>
-            <a:ext cx="6659575" cy="347472"/>
+            <a:off x="6537960" y="6089904"/>
+            <a:ext cx="5470855" cy="347472"/>
           </a:xfrm>
           <a:prstGeom prst="rect">
             <a:avLst/>
@@ -16298,9 +16606,150 @@
           </a:p>
         </p:txBody>
       </p:sp>
+      <p:sp>
+        <p:nvSpPr>
+          <p:cNvPr id="3" name="Text 1"/>
+          <p:cNvSpPr/>
+          <p:nvPr/>
+        </p:nvSpPr>
+        <p:spPr>
+          <a:xfrm>
+            <a:off x="365760" y="1005840"/>
+            <a:ext cx="11460175" cy="731520"/>
+          </a:xfrm>
+          <a:prstGeom prst="rect">
+            <a:avLst/>
+          </a:prstGeom>
+          <a:noFill/>
+          <a:ln/>
+        </p:spPr>
+        <p:txBody>
+          <a:bodyPr wrap="square" lIns="0" tIns="0" rIns="0" bIns="0" rtlCol="0" anchor="ctr">
+            <a:normAutofit/>
+          </a:bodyPr>
+          <a:lstStyle/>
+          <a:p>
+            <a:pPr algn="ctr" indent="0" marL="0">
+              <a:buNone/>
+            </a:pPr>
+            <a:r>
+              <a:rPr lang="en-US" sz="3600" b="1" dirty="0">
+                <a:solidFill>
+                  <a:srgbClr val="990011"/>
+                </a:solidFill>
+                <a:latin typeface="Times New Roman" pitchFamily="34" charset="0"/>
+                <a:ea typeface="Times New Roman" pitchFamily="34" charset="-122"/>
+                <a:cs typeface="Times New Roman" pitchFamily="34" charset="-120"/>
+              </a:rPr>
+              <a:t>2. Thermal Characteristics</a:t>
+            </a:r>
+            <a:endParaRPr lang="en-US" sz="3600" dirty="0"/>
+          </a:p>
+        </p:txBody>
+      </p:sp>
+      <p:sp>
+        <p:nvSpPr>
+          <p:cNvPr id="4" name="Text 2"/>
+          <p:cNvSpPr/>
+          <p:nvPr/>
+        </p:nvSpPr>
+        <p:spPr>
+          <a:xfrm>
+            <a:off x="365760" y="1737360"/>
+            <a:ext cx="6035040" cy="457200"/>
+          </a:xfrm>
+          <a:prstGeom prst="rect">
+            <a:avLst/>
+          </a:prstGeom>
+          <a:noFill/>
+          <a:ln/>
+        </p:spPr>
+        <p:txBody>
+          <a:bodyPr wrap="square" lIns="0" tIns="0" rIns="0" bIns="0" rtlCol="0" anchor="ctr">
+            <a:normAutofit/>
+          </a:bodyPr>
+          <a:lstStyle/>
+          <a:p>
+            <a:pPr algn="l" indent="0" marL="0">
+              <a:buNone/>
+            </a:pPr>
+            <a:r>
+              <a:rPr lang="en-US" sz="3000" b="1" dirty="0">
+                <a:solidFill>
+                  <a:srgbClr val="990011"/>
+                </a:solidFill>
+                <a:latin typeface="Times New Roman" pitchFamily="34" charset="0"/>
+                <a:ea typeface="Times New Roman" pitchFamily="34" charset="-122"/>
+                <a:cs typeface="Times New Roman" pitchFamily="34" charset="-120"/>
+              </a:rPr>
+              <a:t>A) The Four Layers</a:t>
+            </a:r>
+            <a:endParaRPr lang="en-US" sz="3000" dirty="0"/>
+          </a:p>
+        </p:txBody>
+      </p:sp>
+      <p:sp>
+        <p:nvSpPr>
+          <p:cNvPr id="5" name="Text 3"/>
+          <p:cNvSpPr/>
+          <p:nvPr/>
+        </p:nvSpPr>
+        <p:spPr>
+          <a:xfrm>
+            <a:off x="365760" y="2240280"/>
+            <a:ext cx="6035040" cy="4160520"/>
+          </a:xfrm>
+          <a:prstGeom prst="rect">
+            <a:avLst/>
+          </a:prstGeom>
+          <a:noFill/>
+          <a:ln/>
+        </p:spPr>
+        <p:txBody>
+          <a:bodyPr wrap="square" lIns="0" tIns="0" rIns="0" bIns="0" rtlCol="0" anchor="t"/>
+          <a:lstStyle/>
+          <a:p>
+            <a:pPr algn="l" indent="0" marL="0">
+              <a:spcAft>
+                <a:spcPts val="800"/>
+              </a:spcAft>
+              <a:buNone/>
+            </a:pPr>
+            <a:r>
+              <a:rPr lang="en-US" sz="3400" b="1" dirty="0">
+                <a:solidFill>
+                  <a:srgbClr val="111111"/>
+                </a:solidFill>
+                <a:latin typeface="Times New Roman" pitchFamily="34" charset="0"/>
+                <a:ea typeface="Times New Roman" pitchFamily="34" charset="-122"/>
+                <a:cs typeface="Times New Roman" pitchFamily="34" charset="-120"/>
+              </a:rPr>
+              <a:t>Stratosphere (to about 50 km): </a:t>
+            </a:r>
+            <a:pPr algn="l" indent="0" marL="0">
+              <a:spcAft>
+                <a:spcPts val="800"/>
+              </a:spcAft>
+              <a:buNone/>
+            </a:pPr>
+            <a:r>
+              <a:rPr lang="en-US" sz="3400" dirty="0">
+                <a:solidFill>
+                  <a:srgbClr val="111111"/>
+                </a:solidFill>
+                <a:latin typeface="Times New Roman" pitchFamily="34" charset="0"/>
+                <a:ea typeface="Times New Roman" pitchFamily="34" charset="-122"/>
+                <a:cs typeface="Times New Roman" pitchFamily="34" charset="-120"/>
+              </a:rPr>
+              <a:t>In the stratosphere, temperature rises with height because the ozone absorbs ultraviolet rays. The air is calm and dry, which is why aircraft fly in its lower part.</a:t>
+            </a:r>
+            <a:endParaRPr lang="en-US" sz="3400" dirty="0"/>
+          </a:p>
+        </p:txBody>
+      </p:sp>
       <p:pic>
         <p:nvPicPr>
-          <p:cNvPr id="3" name="Image 0" descr="/home/claude/f4/img/minesec_sheet.png">    </p:cNvPr>
+          <p:cNvPr id="6" name="Image 0" descr="/home/claude/f4/img/v2/temp_profile_big.png">    </p:cNvPr>
           <p:cNvPicPr>
             <a:picLocks noChangeAspect="1"/>
           </p:cNvPicPr>
@@ -16314,8 +16763,8 @@
         </p:blipFill>
         <p:spPr>
           <a:xfrm>
-            <a:off x="0" y="658368"/>
-            <a:ext cx="5120640" cy="5833872"/>
+            <a:off x="6537960" y="2721454"/>
+            <a:ext cx="5470855" cy="2393499"/>
           </a:xfrm>
           <a:prstGeom prst="rect">
             <a:avLst/>
@@ -16324,14 +16773,14 @@
       </p:pic>
       <p:sp>
         <p:nvSpPr>
-          <p:cNvPr id="4" name="Text 1"/>
+          <p:cNvPr id="7" name="Text 4"/>
           <p:cNvSpPr/>
           <p:nvPr/>
         </p:nvSpPr>
         <p:spPr>
           <a:xfrm>
-            <a:off x="5349240" y="1005840"/>
-            <a:ext cx="6522415" cy="731520"/>
+            <a:off x="6537960" y="6089904"/>
+            <a:ext cx="5470855" cy="347472"/>
           </a:xfrm>
           <a:prstGeom prst="rect">
             <a:avLst/>
@@ -16340,85 +16789,24 @@
           <a:ln/>
         </p:spPr>
         <p:txBody>
-          <a:bodyPr wrap="square" lIns="0" tIns="0" rIns="0" bIns="0" rtlCol="0" anchor="ctr">
-            <a:normAutofit/>
-          </a:bodyPr>
+          <a:bodyPr wrap="square" lIns="0" tIns="0" rIns="0" bIns="0" rtlCol="0" anchor="ctr"/>
           <a:lstStyle/>
           <a:p>
             <a:pPr algn="ctr" indent="0" marL="0">
               <a:buNone/>
             </a:pPr>
             <a:r>
-              <a:rPr lang="en-US" sz="3600" b="1" dirty="0">
-                <a:solidFill>
-                  <a:srgbClr val="990011"/>
+              <a:rPr lang="en-US" sz="1600" i="1" dirty="0">
+                <a:solidFill>
+                  <a:srgbClr val="555555"/>
                 </a:solidFill>
                 <a:latin typeface="Times New Roman" pitchFamily="34" charset="0"/>
                 <a:ea typeface="Times New Roman" pitchFamily="34" charset="-122"/>
                 <a:cs typeface="Times New Roman" pitchFamily="34" charset="-120"/>
               </a:rPr>
-              <a:t>2. Structure by Temperature</a:t>
-            </a:r>
-            <a:endParaRPr lang="en-US" sz="3600" dirty="0"/>
-          </a:p>
-        </p:txBody>
-      </p:sp>
-      <p:sp>
-        <p:nvSpPr>
-          <p:cNvPr id="5" name="Text 2"/>
-          <p:cNvSpPr/>
-          <p:nvPr/>
-        </p:nvSpPr>
-        <p:spPr>
-          <a:xfrm>
-            <a:off x="5349240" y="1783080"/>
-            <a:ext cx="6522415" cy="4663440"/>
-          </a:xfrm>
-          <a:prstGeom prst="rect">
-            <a:avLst/>
-          </a:prstGeom>
-          <a:noFill/>
-          <a:ln/>
-        </p:spPr>
-        <p:txBody>
-          <a:bodyPr wrap="square" lIns="0" tIns="0" rIns="0" bIns="0" rtlCol="0" anchor="t"/>
-          <a:lstStyle/>
-          <a:p>
-            <a:pPr algn="l" indent="0" marL="0">
-              <a:spcAft>
-                <a:spcPts val="800"/>
-              </a:spcAft>
-              <a:buNone/>
-            </a:pPr>
-            <a:r>
-              <a:rPr lang="en-US" sz="4000" b="1" dirty="0">
-                <a:solidFill>
-                  <a:srgbClr val="111111"/>
-                </a:solidFill>
-                <a:latin typeface="Times New Roman" pitchFamily="34" charset="0"/>
-                <a:ea typeface="Times New Roman" pitchFamily="34" charset="-122"/>
-                <a:cs typeface="Times New Roman" pitchFamily="34" charset="-120"/>
-              </a:rPr>
-              <a:t>Role of the troposphere: </a:t>
-            </a:r>
-            <a:pPr algn="l" indent="0" marL="0">
-              <a:spcAft>
-                <a:spcPts val="800"/>
-              </a:spcAft>
-              <a:buNone/>
-            </a:pPr>
-            <a:r>
-              <a:rPr lang="en-US" sz="4000" dirty="0">
-                <a:solidFill>
-                  <a:srgbClr val="111111"/>
-                </a:solidFill>
-                <a:latin typeface="Times New Roman" pitchFamily="34" charset="0"/>
-                <a:ea typeface="Times New Roman" pitchFamily="34" charset="-122"/>
-                <a:cs typeface="Times New Roman" pitchFamily="34" charset="-120"/>
-              </a:rPr>
-              <a:t>It contains about 75 % of the air and almost all the water vapour, clouds and weather.</a:t>
-            </a:r>
-            <a:endParaRPr lang="en-US" sz="4000" dirty="0"/>
+              <a:t>Illustration: temperature and height</a:t>
+            </a:r>
+            <a:endParaRPr lang="en-US" sz="1600" dirty="0"/>
           </a:p>
         </p:txBody>
       </p:sp>
@@ -16534,109 +16922,9 @@
           </a:p>
         </p:txBody>
       </p:sp>
-      <p:sp>
-        <p:nvSpPr>
-          <p:cNvPr id="3" name="Text 1"/>
-          <p:cNvSpPr/>
-          <p:nvPr/>
-        </p:nvSpPr>
-        <p:spPr>
-          <a:xfrm>
-            <a:off x="365760" y="1005840"/>
-            <a:ext cx="11460175" cy="731520"/>
-          </a:xfrm>
-          <a:prstGeom prst="rect">
-            <a:avLst/>
-          </a:prstGeom>
-          <a:noFill/>
-          <a:ln/>
-        </p:spPr>
-        <p:txBody>
-          <a:bodyPr wrap="square" lIns="0" tIns="0" rIns="0" bIns="0" rtlCol="0" anchor="ctr">
-            <a:normAutofit/>
-          </a:bodyPr>
-          <a:lstStyle/>
-          <a:p>
-            <a:pPr algn="ctr" indent="0" marL="0">
-              <a:buNone/>
-            </a:pPr>
-            <a:r>
-              <a:rPr lang="en-US" sz="3600" b="1" dirty="0">
-                <a:solidFill>
-                  <a:srgbClr val="990011"/>
-                </a:solidFill>
-                <a:latin typeface="Times New Roman" pitchFamily="34" charset="0"/>
-                <a:ea typeface="Times New Roman" pitchFamily="34" charset="-122"/>
-                <a:cs typeface="Times New Roman" pitchFamily="34" charset="-120"/>
-              </a:rPr>
-              <a:t>2. Structure by Temperature</a:t>
-            </a:r>
-            <a:endParaRPr lang="en-US" sz="3600" dirty="0"/>
-          </a:p>
-        </p:txBody>
-      </p:sp>
-      <p:sp>
-        <p:nvSpPr>
-          <p:cNvPr id="4" name="Text 2"/>
-          <p:cNvSpPr/>
-          <p:nvPr/>
-        </p:nvSpPr>
-        <p:spPr>
-          <a:xfrm>
-            <a:off x="365760" y="1783080"/>
-            <a:ext cx="4846320" cy="4617720"/>
-          </a:xfrm>
-          <a:prstGeom prst="rect">
-            <a:avLst/>
-          </a:prstGeom>
-          <a:noFill/>
-          <a:ln/>
-        </p:spPr>
-        <p:txBody>
-          <a:bodyPr wrap="square" lIns="0" tIns="0" rIns="0" bIns="0" rtlCol="0" anchor="t"/>
-          <a:lstStyle/>
-          <a:p>
-            <a:pPr algn="l" indent="0" marL="0">
-              <a:spcAft>
-                <a:spcPts val="800"/>
-              </a:spcAft>
-              <a:buNone/>
-            </a:pPr>
-            <a:r>
-              <a:rPr lang="en-US" sz="3600" b="1" dirty="0">
-                <a:solidFill>
-                  <a:srgbClr val="111111"/>
-                </a:solidFill>
-                <a:latin typeface="Times New Roman" pitchFamily="34" charset="0"/>
-                <a:ea typeface="Times New Roman" pitchFamily="34" charset="-122"/>
-                <a:cs typeface="Times New Roman" pitchFamily="34" charset="-120"/>
-              </a:rPr>
-              <a:t>Stratosphere (to about 50 km): </a:t>
-            </a:r>
-            <a:pPr algn="l" indent="0" marL="0">
-              <a:spcAft>
-                <a:spcPts val="800"/>
-              </a:spcAft>
-              <a:buNone/>
-            </a:pPr>
-            <a:r>
-              <a:rPr lang="en-US" sz="3600" dirty="0">
-                <a:solidFill>
-                  <a:srgbClr val="111111"/>
-                </a:solidFill>
-                <a:latin typeface="Times New Roman" pitchFamily="34" charset="0"/>
-                <a:ea typeface="Times New Roman" pitchFamily="34" charset="-122"/>
-                <a:cs typeface="Times New Roman" pitchFamily="34" charset="-120"/>
-              </a:rPr>
-              <a:t>Temperature rises with height because ozone absorbs ultraviolet rays; the air is calm and dry.</a:t>
-            </a:r>
-            <a:endParaRPr lang="en-US" sz="3600" dirty="0"/>
-          </a:p>
-        </p:txBody>
-      </p:sp>
       <p:pic>
         <p:nvPicPr>
-          <p:cNvPr id="5" name="Image 0" descr="/home/claude/f4/img/v2/temp_profile_big.png">    </p:cNvPr>
+          <p:cNvPr id="3" name="Image 0" descr="/home/claude/f4/img/minesec_sheet.png">    </p:cNvPr>
           <p:cNvPicPr>
             <a:picLocks noChangeAspect="1"/>
           </p:cNvPicPr>
@@ -16650,8 +16938,8 @@
         </p:blipFill>
         <p:spPr>
           <a:xfrm>
-            <a:off x="5349240" y="2461422"/>
-            <a:ext cx="6659575" cy="2913564"/>
+            <a:off x="0" y="658368"/>
+            <a:ext cx="2468880" cy="5833872"/>
           </a:xfrm>
           <a:prstGeom prst="rect">
             <a:avLst/>
@@ -16660,14 +16948,14 @@
       </p:pic>
       <p:sp>
         <p:nvSpPr>
-          <p:cNvPr id="6" name="Text 3"/>
+          <p:cNvPr id="4" name="Text 1"/>
           <p:cNvSpPr/>
           <p:nvPr/>
         </p:nvSpPr>
         <p:spPr>
           <a:xfrm>
-            <a:off x="5349240" y="6089904"/>
-            <a:ext cx="6659575" cy="347472"/>
+            <a:off x="2697480" y="1005840"/>
+            <a:ext cx="9174175" cy="731520"/>
           </a:xfrm>
           <a:prstGeom prst="rect">
             <a:avLst/>
@@ -16676,24 +16964,124 @@
           <a:ln/>
         </p:spPr>
         <p:txBody>
-          <a:bodyPr wrap="square" lIns="0" tIns="0" rIns="0" bIns="0" rtlCol="0" anchor="ctr"/>
+          <a:bodyPr wrap="square" lIns="0" tIns="0" rIns="0" bIns="0" rtlCol="0" anchor="ctr">
+            <a:normAutofit/>
+          </a:bodyPr>
           <a:lstStyle/>
           <a:p>
             <a:pPr algn="ctr" indent="0" marL="0">
               <a:buNone/>
             </a:pPr>
             <a:r>
-              <a:rPr lang="en-US" sz="1600" i="1" dirty="0">
-                <a:solidFill>
-                  <a:srgbClr val="555555"/>
+              <a:rPr lang="en-US" sz="3600" b="1" dirty="0">
+                <a:solidFill>
+                  <a:srgbClr val="990011"/>
                 </a:solidFill>
                 <a:latin typeface="Times New Roman" pitchFamily="34" charset="0"/>
                 <a:ea typeface="Times New Roman" pitchFamily="34" charset="-122"/>
                 <a:cs typeface="Times New Roman" pitchFamily="34" charset="-120"/>
               </a:rPr>
-              <a:t>Illustration: temperature and height</a:t>
-            </a:r>
-            <a:endParaRPr lang="en-US" sz="1600" dirty="0"/>
+              <a:t>2. Thermal Characteristics</a:t>
+            </a:r>
+            <a:endParaRPr lang="en-US" sz="3600" dirty="0"/>
+          </a:p>
+        </p:txBody>
+      </p:sp>
+      <p:sp>
+        <p:nvSpPr>
+          <p:cNvPr id="5" name="Text 2"/>
+          <p:cNvSpPr/>
+          <p:nvPr/>
+        </p:nvSpPr>
+        <p:spPr>
+          <a:xfrm>
+            <a:off x="2697480" y="1737360"/>
+            <a:ext cx="9174175" cy="457200"/>
+          </a:xfrm>
+          <a:prstGeom prst="rect">
+            <a:avLst/>
+          </a:prstGeom>
+          <a:noFill/>
+          <a:ln/>
+        </p:spPr>
+        <p:txBody>
+          <a:bodyPr wrap="square" lIns="0" tIns="0" rIns="0" bIns="0" rtlCol="0" anchor="ctr"/>
+          <a:lstStyle/>
+          <a:p>
+            <a:pPr algn="l" indent="0" marL="0">
+              <a:buNone/>
+            </a:pPr>
+            <a:r>
+              <a:rPr lang="en-US" sz="3200" b="1" dirty="0">
+                <a:solidFill>
+                  <a:srgbClr val="990011"/>
+                </a:solidFill>
+                <a:latin typeface="Times New Roman" pitchFamily="34" charset="0"/>
+                <a:ea typeface="Times New Roman" pitchFamily="34" charset="-122"/>
+                <a:cs typeface="Times New Roman" pitchFamily="34" charset="-120"/>
+              </a:rPr>
+              <a:t>A) The Four Layers</a:t>
+            </a:r>
+            <a:endParaRPr lang="en-US" sz="3200" dirty="0"/>
+          </a:p>
+        </p:txBody>
+      </p:sp>
+      <p:sp>
+        <p:nvSpPr>
+          <p:cNvPr id="6" name="Text 3"/>
+          <p:cNvSpPr/>
+          <p:nvPr/>
+        </p:nvSpPr>
+        <p:spPr>
+          <a:xfrm>
+            <a:off x="2697480" y="2240280"/>
+            <a:ext cx="9174175" cy="4206240"/>
+          </a:xfrm>
+          <a:prstGeom prst="rect">
+            <a:avLst/>
+          </a:prstGeom>
+          <a:noFill/>
+          <a:ln/>
+        </p:spPr>
+        <p:txBody>
+          <a:bodyPr wrap="square" lIns="0" tIns="0" rIns="0" bIns="0" rtlCol="0" anchor="t"/>
+          <a:lstStyle/>
+          <a:p>
+            <a:pPr algn="l" indent="0" marL="0">
+              <a:spcAft>
+                <a:spcPts val="800"/>
+              </a:spcAft>
+              <a:buNone/>
+            </a:pPr>
+            <a:r>
+              <a:rPr lang="en-US" sz="4000" b="1" dirty="0">
+                <a:solidFill>
+                  <a:srgbClr val="111111"/>
+                </a:solidFill>
+                <a:latin typeface="Times New Roman" pitchFamily="34" charset="0"/>
+                <a:ea typeface="Times New Roman" pitchFamily="34" charset="-122"/>
+                <a:cs typeface="Times New Roman" pitchFamily="34" charset="-120"/>
+              </a:rPr>
+              <a:t>Mesosphere (50 to 80 km): </a:t>
+            </a:r>
+            <a:pPr algn="l" indent="0" marL="0">
+              <a:spcAft>
+                <a:spcPts val="800"/>
+              </a:spcAft>
+              <a:buNone/>
+            </a:pPr>
+            <a:r>
+              <a:rPr lang="en-US" sz="4000" dirty="0">
+                <a:solidFill>
+                  <a:srgbClr val="111111"/>
+                </a:solidFill>
+                <a:latin typeface="Times New Roman" pitchFamily="34" charset="0"/>
+                <a:ea typeface="Times New Roman" pitchFamily="34" charset="-122"/>
+                <a:cs typeface="Times New Roman" pitchFamily="34" charset="-120"/>
+              </a:rPr>
+              <a:t>In the mesosphere, temperature falls again with height and reaches about −90 °C, the coldest point of the atmosphere. Meteors burn up in this layer and appear as shooting stars.</a:t>
+            </a:r>
+            <a:endParaRPr lang="en-US" sz="4000" dirty="0"/>
           </a:p>
         </p:txBody>
       </p:sp>
@@ -16809,9 +17197,150 @@
           </a:p>
         </p:txBody>
       </p:sp>
+      <p:sp>
+        <p:nvSpPr>
+          <p:cNvPr id="3" name="Text 1"/>
+          <p:cNvSpPr/>
+          <p:nvPr/>
+        </p:nvSpPr>
+        <p:spPr>
+          <a:xfrm>
+            <a:off x="365760" y="1005840"/>
+            <a:ext cx="11460175" cy="731520"/>
+          </a:xfrm>
+          <a:prstGeom prst="rect">
+            <a:avLst/>
+          </a:prstGeom>
+          <a:noFill/>
+          <a:ln/>
+        </p:spPr>
+        <p:txBody>
+          <a:bodyPr wrap="square" lIns="0" tIns="0" rIns="0" bIns="0" rtlCol="0" anchor="ctr">
+            <a:normAutofit/>
+          </a:bodyPr>
+          <a:lstStyle/>
+          <a:p>
+            <a:pPr algn="ctr" indent="0" marL="0">
+              <a:buNone/>
+            </a:pPr>
+            <a:r>
+              <a:rPr lang="en-US" sz="3600" b="1" dirty="0">
+                <a:solidFill>
+                  <a:srgbClr val="990011"/>
+                </a:solidFill>
+                <a:latin typeface="Times New Roman" pitchFamily="34" charset="0"/>
+                <a:ea typeface="Times New Roman" pitchFamily="34" charset="-122"/>
+                <a:cs typeface="Times New Roman" pitchFamily="34" charset="-120"/>
+              </a:rPr>
+              <a:t>2. Thermal Characteristics</a:t>
+            </a:r>
+            <a:endParaRPr lang="en-US" sz="3600" dirty="0"/>
+          </a:p>
+        </p:txBody>
+      </p:sp>
+      <p:sp>
+        <p:nvSpPr>
+          <p:cNvPr id="4" name="Text 2"/>
+          <p:cNvSpPr/>
+          <p:nvPr/>
+        </p:nvSpPr>
+        <p:spPr>
+          <a:xfrm>
+            <a:off x="365760" y="1737360"/>
+            <a:ext cx="6035040" cy="457200"/>
+          </a:xfrm>
+          <a:prstGeom prst="rect">
+            <a:avLst/>
+          </a:prstGeom>
+          <a:noFill/>
+          <a:ln/>
+        </p:spPr>
+        <p:txBody>
+          <a:bodyPr wrap="square" lIns="0" tIns="0" rIns="0" bIns="0" rtlCol="0" anchor="ctr">
+            <a:normAutofit/>
+          </a:bodyPr>
+          <a:lstStyle/>
+          <a:p>
+            <a:pPr algn="l" indent="0" marL="0">
+              <a:buNone/>
+            </a:pPr>
+            <a:r>
+              <a:rPr lang="en-US" sz="3000" b="1" dirty="0">
+                <a:solidFill>
+                  <a:srgbClr val="990011"/>
+                </a:solidFill>
+                <a:latin typeface="Times New Roman" pitchFamily="34" charset="0"/>
+                <a:ea typeface="Times New Roman" pitchFamily="34" charset="-122"/>
+                <a:cs typeface="Times New Roman" pitchFamily="34" charset="-120"/>
+              </a:rPr>
+              <a:t>A) The Four Layers</a:t>
+            </a:r>
+            <a:endParaRPr lang="en-US" sz="3000" dirty="0"/>
+          </a:p>
+        </p:txBody>
+      </p:sp>
+      <p:sp>
+        <p:nvSpPr>
+          <p:cNvPr id="5" name="Text 3"/>
+          <p:cNvSpPr/>
+          <p:nvPr/>
+        </p:nvSpPr>
+        <p:spPr>
+          <a:xfrm>
+            <a:off x="365760" y="2240280"/>
+            <a:ext cx="6035040" cy="4160520"/>
+          </a:xfrm>
+          <a:prstGeom prst="rect">
+            <a:avLst/>
+          </a:prstGeom>
+          <a:noFill/>
+          <a:ln/>
+        </p:spPr>
+        <p:txBody>
+          <a:bodyPr wrap="square" lIns="0" tIns="0" rIns="0" bIns="0" rtlCol="0" anchor="t"/>
+          <a:lstStyle/>
+          <a:p>
+            <a:pPr algn="l" indent="0" marL="0">
+              <a:spcAft>
+                <a:spcPts val="800"/>
+              </a:spcAft>
+              <a:buNone/>
+            </a:pPr>
+            <a:r>
+              <a:rPr lang="en-US" sz="3200" b="1" dirty="0">
+                <a:solidFill>
+                  <a:srgbClr val="111111"/>
+                </a:solidFill>
+                <a:latin typeface="Times New Roman" pitchFamily="34" charset="0"/>
+                <a:ea typeface="Times New Roman" pitchFamily="34" charset="-122"/>
+                <a:cs typeface="Times New Roman" pitchFamily="34" charset="-120"/>
+              </a:rPr>
+              <a:t>Thermosphere (above 80 km): </a:t>
+            </a:r>
+            <a:pPr algn="l" indent="0" marL="0">
+              <a:spcAft>
+                <a:spcPts val="800"/>
+              </a:spcAft>
+              <a:buNone/>
+            </a:pPr>
+            <a:r>
+              <a:rPr lang="en-US" sz="3200" dirty="0">
+                <a:solidFill>
+                  <a:srgbClr val="111111"/>
+                </a:solidFill>
+                <a:latin typeface="Times New Roman" pitchFamily="34" charset="0"/>
+                <a:ea typeface="Times New Roman" pitchFamily="34" charset="-122"/>
+                <a:cs typeface="Times New Roman" pitchFamily="34" charset="-120"/>
+              </a:rPr>
+              <a:t>In the thermosphere, the thin gases absorb very strong solar radiation, so temperature rises above 1,000 °C. Auroras form here and satellites such as the space station orbit in this layer.</a:t>
+            </a:r>
+            <a:endParaRPr lang="en-US" sz="3200" dirty="0"/>
+          </a:p>
+        </p:txBody>
+      </p:sp>
       <p:pic>
         <p:nvPicPr>
-          <p:cNvPr id="3" name="Image 0" descr="/home/claude/f4/img/minesec_sheet.png">    </p:cNvPr>
+          <p:cNvPr id="6" name="Image 0" descr="/home/claude/f4/img/v2/lsa_aurora.jpg">    </p:cNvPr>
           <p:cNvPicPr>
             <a:picLocks noChangeAspect="1"/>
           </p:cNvPicPr>
@@ -16825,8 +17354,8 @@
         </p:blipFill>
         <p:spPr>
           <a:xfrm>
-            <a:off x="0" y="658368"/>
-            <a:ext cx="5120640" cy="5833872"/>
+            <a:off x="6537960" y="2400897"/>
+            <a:ext cx="5470855" cy="3034615"/>
           </a:xfrm>
           <a:prstGeom prst="rect">
             <a:avLst/>
@@ -16835,14 +17364,14 @@
       </p:pic>
       <p:sp>
         <p:nvSpPr>
-          <p:cNvPr id="4" name="Text 1"/>
+          <p:cNvPr id="7" name="Text 4"/>
           <p:cNvSpPr/>
           <p:nvPr/>
         </p:nvSpPr>
         <p:spPr>
           <a:xfrm>
-            <a:off x="5349240" y="1005840"/>
-            <a:ext cx="6522415" cy="731520"/>
+            <a:off x="6537960" y="6089904"/>
+            <a:ext cx="5470855" cy="347472"/>
           </a:xfrm>
           <a:prstGeom prst="rect">
             <a:avLst/>
@@ -16851,85 +17380,24 @@
           <a:ln/>
         </p:spPr>
         <p:txBody>
-          <a:bodyPr wrap="square" lIns="0" tIns="0" rIns="0" bIns="0" rtlCol="0" anchor="ctr">
-            <a:normAutofit/>
-          </a:bodyPr>
+          <a:bodyPr wrap="square" lIns="0" tIns="0" rIns="0" bIns="0" rtlCol="0" anchor="ctr"/>
           <a:lstStyle/>
           <a:p>
             <a:pPr algn="ctr" indent="0" marL="0">
               <a:buNone/>
             </a:pPr>
             <a:r>
-              <a:rPr lang="en-US" sz="3600" b="1" dirty="0">
-                <a:solidFill>
-                  <a:srgbClr val="990011"/>
+              <a:rPr lang="en-US" sz="1600" i="1" dirty="0">
+                <a:solidFill>
+                  <a:srgbClr val="555555"/>
                 </a:solidFill>
                 <a:latin typeface="Times New Roman" pitchFamily="34" charset="0"/>
                 <a:ea typeface="Times New Roman" pitchFamily="34" charset="-122"/>
                 <a:cs typeface="Times New Roman" pitchFamily="34" charset="-120"/>
               </a:rPr>
-              <a:t>2. Structure by Temperature</a:t>
-            </a:r>
-            <a:endParaRPr lang="en-US" sz="3600" dirty="0"/>
-          </a:p>
-        </p:txBody>
-      </p:sp>
-      <p:sp>
-        <p:nvSpPr>
-          <p:cNvPr id="5" name="Text 2"/>
-          <p:cNvSpPr/>
-          <p:nvPr/>
-        </p:nvSpPr>
-        <p:spPr>
-          <a:xfrm>
-            <a:off x="5349240" y="1783080"/>
-            <a:ext cx="6522415" cy="4663440"/>
-          </a:xfrm>
-          <a:prstGeom prst="rect">
-            <a:avLst/>
-          </a:prstGeom>
-          <a:noFill/>
-          <a:ln/>
-        </p:spPr>
-        <p:txBody>
-          <a:bodyPr wrap="square" lIns="0" tIns="0" rIns="0" bIns="0" rtlCol="0" anchor="t"/>
-          <a:lstStyle/>
-          <a:p>
-            <a:pPr algn="l" indent="0" marL="0">
-              <a:spcAft>
-                <a:spcPts val="800"/>
-              </a:spcAft>
-              <a:buNone/>
-            </a:pPr>
-            <a:r>
-              <a:rPr lang="en-US" sz="4000" b="1" dirty="0">
-                <a:solidFill>
-                  <a:srgbClr val="111111"/>
-                </a:solidFill>
-                <a:latin typeface="Times New Roman" pitchFamily="34" charset="0"/>
-                <a:ea typeface="Times New Roman" pitchFamily="34" charset="-122"/>
-                <a:cs typeface="Times New Roman" pitchFamily="34" charset="-120"/>
-              </a:rPr>
-              <a:t>Mesosphere (50–80 km): </a:t>
-            </a:r>
-            <a:pPr algn="l" indent="0" marL="0">
-              <a:spcAft>
-                <a:spcPts val="800"/>
-              </a:spcAft>
-              <a:buNone/>
-            </a:pPr>
-            <a:r>
-              <a:rPr lang="en-US" sz="4000" dirty="0">
-                <a:solidFill>
-                  <a:srgbClr val="111111"/>
-                </a:solidFill>
-                <a:latin typeface="Times New Roman" pitchFamily="34" charset="0"/>
-                <a:ea typeface="Times New Roman" pitchFamily="34" charset="-122"/>
-                <a:cs typeface="Times New Roman" pitchFamily="34" charset="-120"/>
-              </a:rPr>
-              <a:t>Temperature falls to about −90 °C, the coldest in the atmosphere; meteors burn up here.</a:t>
-            </a:r>
-            <a:endParaRPr lang="en-US" sz="4000" dirty="0"/>
+              <a:t>Illustration: an aurora</a:t>
+            </a:r>
+            <a:endParaRPr lang="en-US" sz="1600" dirty="0"/>
           </a:p>
         </p:txBody>
       </p:sp>
@@ -17045,109 +17513,9 @@
           </a:p>
         </p:txBody>
       </p:sp>
-      <p:sp>
-        <p:nvSpPr>
-          <p:cNvPr id="3" name="Text 1"/>
-          <p:cNvSpPr/>
-          <p:nvPr/>
-        </p:nvSpPr>
-        <p:spPr>
-          <a:xfrm>
-            <a:off x="365760" y="1005840"/>
-            <a:ext cx="11460175" cy="731520"/>
-          </a:xfrm>
-          <a:prstGeom prst="rect">
-            <a:avLst/>
-          </a:prstGeom>
-          <a:noFill/>
-          <a:ln/>
-        </p:spPr>
-        <p:txBody>
-          <a:bodyPr wrap="square" lIns="0" tIns="0" rIns="0" bIns="0" rtlCol="0" anchor="ctr">
-            <a:normAutofit/>
-          </a:bodyPr>
-          <a:lstStyle/>
-          <a:p>
-            <a:pPr algn="ctr" indent="0" marL="0">
-              <a:buNone/>
-            </a:pPr>
-            <a:r>
-              <a:rPr lang="en-US" sz="3600" b="1" dirty="0">
-                <a:solidFill>
-                  <a:srgbClr val="990011"/>
-                </a:solidFill>
-                <a:latin typeface="Times New Roman" pitchFamily="34" charset="0"/>
-                <a:ea typeface="Times New Roman" pitchFamily="34" charset="-122"/>
-                <a:cs typeface="Times New Roman" pitchFamily="34" charset="-120"/>
-              </a:rPr>
-              <a:t>2. Structure by Temperature</a:t>
-            </a:r>
-            <a:endParaRPr lang="en-US" sz="3600" dirty="0"/>
-          </a:p>
-        </p:txBody>
-      </p:sp>
-      <p:sp>
-        <p:nvSpPr>
-          <p:cNvPr id="4" name="Text 2"/>
-          <p:cNvSpPr/>
-          <p:nvPr/>
-        </p:nvSpPr>
-        <p:spPr>
-          <a:xfrm>
-            <a:off x="365760" y="1783080"/>
-            <a:ext cx="4846320" cy="4617720"/>
-          </a:xfrm>
-          <a:prstGeom prst="rect">
-            <a:avLst/>
-          </a:prstGeom>
-          <a:noFill/>
-          <a:ln/>
-        </p:spPr>
-        <p:txBody>
-          <a:bodyPr wrap="square" lIns="0" tIns="0" rIns="0" bIns="0" rtlCol="0" anchor="t"/>
-          <a:lstStyle/>
-          <a:p>
-            <a:pPr algn="l" indent="0" marL="0">
-              <a:spcAft>
-                <a:spcPts val="800"/>
-              </a:spcAft>
-              <a:buNone/>
-            </a:pPr>
-            <a:r>
-              <a:rPr lang="en-US" sz="3600" b="1" dirty="0">
-                <a:solidFill>
-                  <a:srgbClr val="111111"/>
-                </a:solidFill>
-                <a:latin typeface="Times New Roman" pitchFamily="34" charset="0"/>
-                <a:ea typeface="Times New Roman" pitchFamily="34" charset="-122"/>
-                <a:cs typeface="Times New Roman" pitchFamily="34" charset="-120"/>
-              </a:rPr>
-              <a:t>Thermosphere (above 80 km): </a:t>
-            </a:r>
-            <a:pPr algn="l" indent="0" marL="0">
-              <a:spcAft>
-                <a:spcPts val="800"/>
-              </a:spcAft>
-              <a:buNone/>
-            </a:pPr>
-            <a:r>
-              <a:rPr lang="en-US" sz="3600" dirty="0">
-                <a:solidFill>
-                  <a:srgbClr val="111111"/>
-                </a:solidFill>
-                <a:latin typeface="Times New Roman" pitchFamily="34" charset="0"/>
-                <a:ea typeface="Times New Roman" pitchFamily="34" charset="-122"/>
-                <a:cs typeface="Times New Roman" pitchFamily="34" charset="-120"/>
-              </a:rPr>
-              <a:t>Temperature rises above 1,000 °C; auroras form and the space station orbits.</a:t>
-            </a:r>
-            <a:endParaRPr lang="en-US" sz="3600" dirty="0"/>
-          </a:p>
-        </p:txBody>
-      </p:sp>
       <p:pic>
         <p:nvPicPr>
-          <p:cNvPr id="5" name="Image 0" descr="/home/claude/f4/img/v2/lsa_aurora.jpg">    </p:cNvPr>
+          <p:cNvPr id="3" name="Image 0" descr="/home/claude/f4/img/minesec_sheet.png">    </p:cNvPr>
           <p:cNvPicPr>
             <a:picLocks noChangeAspect="1"/>
           </p:cNvPicPr>
@@ -17161,8 +17529,8 @@
         </p:blipFill>
         <p:spPr>
           <a:xfrm>
-            <a:off x="5349240" y="2071212"/>
-            <a:ext cx="6659575" cy="3693983"/>
+            <a:off x="0" y="658368"/>
+            <a:ext cx="2468880" cy="5833872"/>
           </a:xfrm>
           <a:prstGeom prst="rect">
             <a:avLst/>
@@ -17171,14 +17539,14 @@
       </p:pic>
       <p:sp>
         <p:nvSpPr>
-          <p:cNvPr id="6" name="Text 3"/>
+          <p:cNvPr id="4" name="Text 1"/>
           <p:cNvSpPr/>
           <p:nvPr/>
         </p:nvSpPr>
         <p:spPr>
           <a:xfrm>
-            <a:off x="5349240" y="6089904"/>
-            <a:ext cx="6659575" cy="347472"/>
+            <a:off x="2697480" y="1005840"/>
+            <a:ext cx="9174175" cy="731520"/>
           </a:xfrm>
           <a:prstGeom prst="rect">
             <a:avLst/>
@@ -17187,24 +17555,144 @@
           <a:ln/>
         </p:spPr>
         <p:txBody>
-          <a:bodyPr wrap="square" lIns="0" tIns="0" rIns="0" bIns="0" rtlCol="0" anchor="ctr"/>
+          <a:bodyPr wrap="square" lIns="0" tIns="0" rIns="0" bIns="0" rtlCol="0" anchor="ctr">
+            <a:normAutofit/>
+          </a:bodyPr>
           <a:lstStyle/>
           <a:p>
             <a:pPr algn="ctr" indent="0" marL="0">
               <a:buNone/>
             </a:pPr>
             <a:r>
-              <a:rPr lang="en-US" sz="1600" i="1" dirty="0">
-                <a:solidFill>
-                  <a:srgbClr val="555555"/>
+              <a:rPr lang="en-US" sz="3600" b="1" dirty="0">
+                <a:solidFill>
+                  <a:srgbClr val="990011"/>
                 </a:solidFill>
                 <a:latin typeface="Times New Roman" pitchFamily="34" charset="0"/>
                 <a:ea typeface="Times New Roman" pitchFamily="34" charset="-122"/>
                 <a:cs typeface="Times New Roman" pitchFamily="34" charset="-120"/>
               </a:rPr>
-              <a:t>Illustration: an aurora</a:t>
-            </a:r>
-            <a:endParaRPr lang="en-US" sz="1600" dirty="0"/>
+              <a:t>2. Thermal Characteristics</a:t>
+            </a:r>
+            <a:endParaRPr lang="en-US" sz="3600" dirty="0"/>
+          </a:p>
+        </p:txBody>
+      </p:sp>
+      <p:sp>
+        <p:nvSpPr>
+          <p:cNvPr id="5" name="Text 2"/>
+          <p:cNvSpPr/>
+          <p:nvPr/>
+        </p:nvSpPr>
+        <p:spPr>
+          <a:xfrm>
+            <a:off x="2697480" y="1737360"/>
+            <a:ext cx="9174175" cy="457200"/>
+          </a:xfrm>
+          <a:prstGeom prst="rect">
+            <a:avLst/>
+          </a:prstGeom>
+          <a:noFill/>
+          <a:ln/>
+        </p:spPr>
+        <p:txBody>
+          <a:bodyPr wrap="square" lIns="0" tIns="0" rIns="0" bIns="0" rtlCol="0" anchor="ctr"/>
+          <a:lstStyle/>
+          <a:p>
+            <a:pPr algn="l" indent="0" marL="0">
+              <a:buNone/>
+            </a:pPr>
+            <a:r>
+              <a:rPr lang="en-US" sz="3200" b="1" dirty="0">
+                <a:solidFill>
+                  <a:srgbClr val="990011"/>
+                </a:solidFill>
+                <a:latin typeface="Times New Roman" pitchFamily="34" charset="0"/>
+                <a:ea typeface="Times New Roman" pitchFamily="34" charset="-122"/>
+                <a:cs typeface="Times New Roman" pitchFamily="34" charset="-120"/>
+              </a:rPr>
+              <a:t>B) The Isothermal Layers</a:t>
+            </a:r>
+            <a:endParaRPr lang="en-US" sz="3200" dirty="0"/>
+          </a:p>
+        </p:txBody>
+      </p:sp>
+      <p:sp>
+        <p:nvSpPr>
+          <p:cNvPr id="6" name="Text 3"/>
+          <p:cNvSpPr/>
+          <p:nvPr/>
+        </p:nvSpPr>
+        <p:spPr>
+          <a:xfrm>
+            <a:off x="2697480" y="2240280"/>
+            <a:ext cx="9174175" cy="4206240"/>
+          </a:xfrm>
+          <a:prstGeom prst="rect">
+            <a:avLst/>
+          </a:prstGeom>
+          <a:noFill/>
+          <a:ln/>
+        </p:spPr>
+        <p:txBody>
+          <a:bodyPr wrap="square" lIns="0" tIns="0" rIns="0" bIns="0" rtlCol="0" anchor="t"/>
+          <a:lstStyle/>
+          <a:p>
+            <a:pPr algn="l" indent="0" marL="0">
+              <a:spcAft>
+                <a:spcPts val="800"/>
+              </a:spcAft>
+              <a:buNone/>
+            </a:pPr>
+            <a:r>
+              <a:rPr lang="en-US" sz="3200" i="1" dirty="0">
+                <a:solidFill>
+                  <a:srgbClr val="111111"/>
+                </a:solidFill>
+                <a:latin typeface="Times New Roman" pitchFamily="34" charset="0"/>
+                <a:ea typeface="Times New Roman" pitchFamily="34" charset="-122"/>
+                <a:cs typeface="Times New Roman" pitchFamily="34" charset="-120"/>
+              </a:rPr>
+              <a:t>The isothermal layers of the atmosphere are the following:</a:t>
+            </a:r>
+            <a:endParaRPr lang="en-US" sz="3200" dirty="0"/>
+          </a:p>
+          <a:p>
+            <a:pPr algn="l" indent="0" marL="0">
+              <a:spcAft>
+                <a:spcPts val="800"/>
+              </a:spcAft>
+              <a:buNone/>
+            </a:pPr>
+            <a:r>
+              <a:rPr lang="en-US" sz="3200" b="1" dirty="0">
+                <a:solidFill>
+                  <a:srgbClr val="111111"/>
+                </a:solidFill>
+                <a:latin typeface="Times New Roman" pitchFamily="34" charset="0"/>
+                <a:ea typeface="Times New Roman" pitchFamily="34" charset="-122"/>
+                <a:cs typeface="Times New Roman" pitchFamily="34" charset="-120"/>
+              </a:rPr>
+              <a:t>Tropopause and lower stratosphere: </a:t>
+            </a:r>
+            <a:pPr algn="l" indent="0" marL="0">
+              <a:spcAft>
+                <a:spcPts val="800"/>
+              </a:spcAft>
+              <a:buNone/>
+            </a:pPr>
+            <a:r>
+              <a:rPr lang="en-US" sz="3200" dirty="0">
+                <a:solidFill>
+                  <a:srgbClr val="111111"/>
+                </a:solidFill>
+                <a:latin typeface="Times New Roman" pitchFamily="34" charset="0"/>
+                <a:ea typeface="Times New Roman" pitchFamily="34" charset="-122"/>
+                <a:cs typeface="Times New Roman" pitchFamily="34" charset="-120"/>
+              </a:rPr>
+              <a:t>Above the troposphere, temperature stops falling and remains at about −55 °C up to about 20 km. This isothermal layer acts as a lid that stops clouds from rising higher, which gives thunderclouds their flat anvil top.</a:t>
+            </a:r>
+            <a:endParaRPr lang="en-US" sz="3200" dirty="0"/>
           </a:p>
         </p:txBody>
       </p:sp>
@@ -17337,7 +17825,7 @@
         <p:spPr>
           <a:xfrm>
             <a:off x="0" y="658368"/>
-            <a:ext cx="5120640" cy="5833872"/>
+            <a:ext cx="2468880" cy="5833872"/>
           </a:xfrm>
           <a:prstGeom prst="rect">
             <a:avLst/>
@@ -17352,8 +17840,8 @@
         </p:nvSpPr>
         <p:spPr>
           <a:xfrm>
-            <a:off x="5349240" y="1005840"/>
-            <a:ext cx="6522415" cy="731520"/>
+            <a:off x="2697480" y="1005840"/>
+            <a:ext cx="9174175" cy="731520"/>
           </a:xfrm>
           <a:prstGeom prst="rect">
             <a:avLst/>
@@ -17379,7 +17867,7 @@
                 <a:ea typeface="Times New Roman" pitchFamily="34" charset="-122"/>
                 <a:cs typeface="Times New Roman" pitchFamily="34" charset="-120"/>
               </a:rPr>
-              <a:t>2. Structure by Temperature</a:t>
+              <a:t>2. Thermal Characteristics</a:t>
             </a:r>
             <a:endParaRPr lang="en-US" sz="3600" dirty="0"/>
           </a:p>
@@ -17393,8 +17881,47 @@
         </p:nvSpPr>
         <p:spPr>
           <a:xfrm>
-            <a:off x="5349240" y="1783080"/>
-            <a:ext cx="6522415" cy="4663440"/>
+            <a:off x="2697480" y="1737360"/>
+            <a:ext cx="9174175" cy="457200"/>
+          </a:xfrm>
+          <a:prstGeom prst="rect">
+            <a:avLst/>
+          </a:prstGeom>
+          <a:noFill/>
+          <a:ln/>
+        </p:spPr>
+        <p:txBody>
+          <a:bodyPr wrap="square" lIns="0" tIns="0" rIns="0" bIns="0" rtlCol="0" anchor="ctr"/>
+          <a:lstStyle/>
+          <a:p>
+            <a:pPr algn="l" indent="0" marL="0">
+              <a:buNone/>
+            </a:pPr>
+            <a:r>
+              <a:rPr lang="en-US" sz="3200" b="1" dirty="0">
+                <a:solidFill>
+                  <a:srgbClr val="990011"/>
+                </a:solidFill>
+                <a:latin typeface="Times New Roman" pitchFamily="34" charset="0"/>
+                <a:ea typeface="Times New Roman" pitchFamily="34" charset="-122"/>
+                <a:cs typeface="Times New Roman" pitchFamily="34" charset="-120"/>
+              </a:rPr>
+              <a:t>B) The Isothermal Layers</a:t>
+            </a:r>
+            <a:endParaRPr lang="en-US" sz="3200" dirty="0"/>
+          </a:p>
+        </p:txBody>
+      </p:sp>
+      <p:sp>
+        <p:nvSpPr>
+          <p:cNvPr id="6" name="Text 3"/>
+          <p:cNvSpPr/>
+          <p:nvPr/>
+        </p:nvSpPr>
+        <p:spPr>
+          <a:xfrm>
+            <a:off x="2697480" y="2240280"/>
+            <a:ext cx="9174175" cy="4206240"/>
           </a:xfrm>
           <a:prstGeom prst="rect">
             <a:avLst/>
@@ -17413,7 +17940,7 @@
               <a:buNone/>
             </a:pPr>
             <a:r>
-              <a:rPr lang="en-US" sz="4000" b="1" dirty="0">
+              <a:rPr lang="en-US" sz="3800" b="1" dirty="0">
                 <a:solidFill>
                   <a:srgbClr val="111111"/>
                 </a:solidFill>
@@ -17421,7 +17948,7 @@
                 <a:ea typeface="Times New Roman" pitchFamily="34" charset="-122"/>
                 <a:cs typeface="Times New Roman" pitchFamily="34" charset="-120"/>
               </a:rPr>
-              <a:t>Pauses: </a:t>
+              <a:t>Stratopause and mesopause: </a:t>
             </a:r>
             <a:pPr algn="l" indent="0" marL="0">
               <a:spcAft>
@@ -17430,7 +17957,7 @@
               <a:buNone/>
             </a:pPr>
             <a:r>
-              <a:rPr lang="en-US" sz="4000" dirty="0">
+              <a:rPr lang="en-US" sz="3800" dirty="0">
                 <a:solidFill>
                   <a:srgbClr val="111111"/>
                 </a:solidFill>
@@ -17438,9 +17965,9 @@
                 <a:ea typeface="Times New Roman" pitchFamily="34" charset="-122"/>
                 <a:cs typeface="Times New Roman" pitchFamily="34" charset="-120"/>
               </a:rPr>
-              <a:t>The tropopause, stratopause and mesopause separate the layers where the temperature trend changes.</a:t>
-            </a:r>
-            <a:endParaRPr lang="en-US" sz="4000" dirty="0"/>
+              <a:t>The stratopause (about 50 km) and the mesopause (about 80 km) are thin layers where temperature stays constant for a few kilometres. They mark the limits where the temperature trend changes from rising to falling, or from falling to rising.</a:t>
+            </a:r>
+            <a:endParaRPr lang="en-US" sz="3800" dirty="0"/>
           </a:p>
         </p:txBody>
       </p:sp>
@@ -17556,9 +18083,170 @@
           </a:p>
         </p:txBody>
       </p:sp>
+      <p:sp>
+        <p:nvSpPr>
+          <p:cNvPr id="3" name="Text 1"/>
+          <p:cNvSpPr/>
+          <p:nvPr/>
+        </p:nvSpPr>
+        <p:spPr>
+          <a:xfrm>
+            <a:off x="365760" y="1005840"/>
+            <a:ext cx="11460175" cy="731520"/>
+          </a:xfrm>
+          <a:prstGeom prst="rect">
+            <a:avLst/>
+          </a:prstGeom>
+          <a:noFill/>
+          <a:ln/>
+        </p:spPr>
+        <p:txBody>
+          <a:bodyPr wrap="square" lIns="0" tIns="0" rIns="0" bIns="0" rtlCol="0" anchor="ctr">
+            <a:normAutofit/>
+          </a:bodyPr>
+          <a:lstStyle/>
+          <a:p>
+            <a:pPr algn="ctr" indent="0" marL="0">
+              <a:buNone/>
+            </a:pPr>
+            <a:r>
+              <a:rPr lang="en-US" sz="3600" b="1" dirty="0">
+                <a:solidFill>
+                  <a:srgbClr val="990011"/>
+                </a:solidFill>
+                <a:latin typeface="Times New Roman" pitchFamily="34" charset="0"/>
+                <a:ea typeface="Times New Roman" pitchFamily="34" charset="-122"/>
+                <a:cs typeface="Times New Roman" pitchFamily="34" charset="-120"/>
+              </a:rPr>
+              <a:t>3. The Ozone Layer</a:t>
+            </a:r>
+            <a:endParaRPr lang="en-US" sz="3600" dirty="0"/>
+          </a:p>
+        </p:txBody>
+      </p:sp>
+      <p:sp>
+        <p:nvSpPr>
+          <p:cNvPr id="4" name="Text 2"/>
+          <p:cNvSpPr/>
+          <p:nvPr/>
+        </p:nvSpPr>
+        <p:spPr>
+          <a:xfrm>
+            <a:off x="365760" y="1737360"/>
+            <a:ext cx="6035040" cy="457200"/>
+          </a:xfrm>
+          <a:prstGeom prst="rect">
+            <a:avLst/>
+          </a:prstGeom>
+          <a:noFill/>
+          <a:ln/>
+        </p:spPr>
+        <p:txBody>
+          <a:bodyPr wrap="square" lIns="0" tIns="0" rIns="0" bIns="0" rtlCol="0" anchor="ctr">
+            <a:normAutofit/>
+          </a:bodyPr>
+          <a:lstStyle/>
+          <a:p>
+            <a:pPr algn="l" indent="0" marL="0">
+              <a:buNone/>
+            </a:pPr>
+            <a:r>
+              <a:rPr lang="en-US" sz="3000" b="1" dirty="0">
+                <a:solidFill>
+                  <a:srgbClr val="990011"/>
+                </a:solidFill>
+                <a:latin typeface="Times New Roman" pitchFamily="34" charset="0"/>
+                <a:ea typeface="Times New Roman" pitchFamily="34" charset="-122"/>
+                <a:cs typeface="Times New Roman" pitchFamily="34" charset="-120"/>
+              </a:rPr>
+              <a:t>A) Function</a:t>
+            </a:r>
+            <a:endParaRPr lang="en-US" sz="3000" dirty="0"/>
+          </a:p>
+        </p:txBody>
+      </p:sp>
+      <p:sp>
+        <p:nvSpPr>
+          <p:cNvPr id="5" name="Text 3"/>
+          <p:cNvSpPr/>
+          <p:nvPr/>
+        </p:nvSpPr>
+        <p:spPr>
+          <a:xfrm>
+            <a:off x="365760" y="2240280"/>
+            <a:ext cx="6035040" cy="4160520"/>
+          </a:xfrm>
+          <a:prstGeom prst="rect">
+            <a:avLst/>
+          </a:prstGeom>
+          <a:noFill/>
+          <a:ln/>
+        </p:spPr>
+        <p:txBody>
+          <a:bodyPr wrap="square" lIns="0" tIns="0" rIns="0" bIns="0" rtlCol="0" anchor="t"/>
+          <a:lstStyle/>
+          <a:p>
+            <a:pPr algn="l" indent="0" marL="0">
+              <a:spcAft>
+                <a:spcPts val="800"/>
+              </a:spcAft>
+              <a:buNone/>
+            </a:pPr>
+            <a:r>
+              <a:rPr lang="en-US" sz="2800" i="1" dirty="0">
+                <a:solidFill>
+                  <a:srgbClr val="111111"/>
+                </a:solidFill>
+                <a:latin typeface="Times New Roman" pitchFamily="34" charset="0"/>
+                <a:ea typeface="Times New Roman" pitchFamily="34" charset="-122"/>
+                <a:cs typeface="Times New Roman" pitchFamily="34" charset="-120"/>
+              </a:rPr>
+              <a:t>The ozone layer has the following functions:</a:t>
+            </a:r>
+            <a:endParaRPr lang="en-US" sz="2800" dirty="0"/>
+          </a:p>
+          <a:p>
+            <a:pPr algn="l" indent="0" marL="0">
+              <a:spcAft>
+                <a:spcPts val="800"/>
+              </a:spcAft>
+              <a:buNone/>
+            </a:pPr>
+            <a:r>
+              <a:rPr lang="en-US" sz="2800" b="1" dirty="0">
+                <a:solidFill>
+                  <a:srgbClr val="111111"/>
+                </a:solidFill>
+                <a:latin typeface="Times New Roman" pitchFamily="34" charset="0"/>
+                <a:ea typeface="Times New Roman" pitchFamily="34" charset="-122"/>
+                <a:cs typeface="Times New Roman" pitchFamily="34" charset="-120"/>
+              </a:rPr>
+              <a:t>Absorption of ultraviolet rays: </a:t>
+            </a:r>
+            <a:pPr algn="l" indent="0" marL="0">
+              <a:spcAft>
+                <a:spcPts val="800"/>
+              </a:spcAft>
+              <a:buNone/>
+            </a:pPr>
+            <a:r>
+              <a:rPr lang="en-US" sz="2800" dirty="0">
+                <a:solidFill>
+                  <a:srgbClr val="111111"/>
+                </a:solidFill>
+                <a:latin typeface="Times New Roman" pitchFamily="34" charset="0"/>
+                <a:ea typeface="Times New Roman" pitchFamily="34" charset="-122"/>
+                <a:cs typeface="Times New Roman" pitchFamily="34" charset="-120"/>
+              </a:rPr>
+              <a:t>The ozone layer absorbs most of the harmful ultraviolet (UV-B) rays of the Sun. It thus protects people from skin cancer and eye cataracts and protects plants and sea plankton.</a:t>
+            </a:r>
+            <a:endParaRPr lang="en-US" sz="2800" dirty="0"/>
+          </a:p>
+        </p:txBody>
+      </p:sp>
       <p:pic>
         <p:nvPicPr>
-          <p:cNvPr id="3" name="Image 0" descr="/home/claude/f4/img/minesec_sheet.png">    </p:cNvPr>
+          <p:cNvPr id="6" name="Image 0" descr="/home/claude/f4/img/v2/met2_ozone.png">    </p:cNvPr>
           <p:cNvPicPr>
             <a:picLocks noChangeAspect="1"/>
           </p:cNvPicPr>
@@ -17572,8 +18260,8 @@
         </p:blipFill>
         <p:spPr>
           <a:xfrm>
-            <a:off x="0" y="658368"/>
-            <a:ext cx="5120640" cy="5833872"/>
+            <a:off x="6537960" y="2849678"/>
+            <a:ext cx="5470855" cy="2137053"/>
           </a:xfrm>
           <a:prstGeom prst="rect">
             <a:avLst/>
@@ -17582,14 +18270,14 @@
       </p:pic>
       <p:sp>
         <p:nvSpPr>
-          <p:cNvPr id="4" name="Text 1"/>
+          <p:cNvPr id="7" name="Text 4"/>
           <p:cNvSpPr/>
           <p:nvPr/>
         </p:nvSpPr>
         <p:spPr>
           <a:xfrm>
-            <a:off x="5349240" y="1005840"/>
-            <a:ext cx="6522415" cy="731520"/>
+            <a:off x="6537960" y="6089904"/>
+            <a:ext cx="5470855" cy="347472"/>
           </a:xfrm>
           <a:prstGeom prst="rect">
             <a:avLst/>
@@ -17598,105 +18286,24 @@
           <a:ln/>
         </p:spPr>
         <p:txBody>
-          <a:bodyPr wrap="square" lIns="0" tIns="0" rIns="0" bIns="0" rtlCol="0" anchor="ctr">
-            <a:normAutofit/>
-          </a:bodyPr>
+          <a:bodyPr wrap="square" lIns="0" tIns="0" rIns="0" bIns="0" rtlCol="0" anchor="ctr"/>
           <a:lstStyle/>
           <a:p>
             <a:pPr algn="ctr" indent="0" marL="0">
               <a:buNone/>
             </a:pPr>
             <a:r>
-              <a:rPr lang="en-US" sz="3600" b="1" dirty="0">
-                <a:solidFill>
-                  <a:srgbClr val="990011"/>
+              <a:rPr lang="en-US" sz="1600" i="1" dirty="0">
+                <a:solidFill>
+                  <a:srgbClr val="555555"/>
                 </a:solidFill>
                 <a:latin typeface="Times New Roman" pitchFamily="34" charset="0"/>
                 <a:ea typeface="Times New Roman" pitchFamily="34" charset="-122"/>
                 <a:cs typeface="Times New Roman" pitchFamily="34" charset="-120"/>
               </a:rPr>
-              <a:t>3. The Ozone Layer</a:t>
-            </a:r>
-            <a:endParaRPr lang="en-US" sz="3600" dirty="0"/>
-          </a:p>
-        </p:txBody>
-      </p:sp>
-      <p:sp>
-        <p:nvSpPr>
-          <p:cNvPr id="5" name="Text 2"/>
-          <p:cNvSpPr/>
-          <p:nvPr/>
-        </p:nvSpPr>
-        <p:spPr>
-          <a:xfrm>
-            <a:off x="5349240" y="1783080"/>
-            <a:ext cx="6522415" cy="4663440"/>
-          </a:xfrm>
-          <a:prstGeom prst="rect">
-            <a:avLst/>
-          </a:prstGeom>
-          <a:noFill/>
-          <a:ln/>
-        </p:spPr>
-        <p:txBody>
-          <a:bodyPr wrap="square" lIns="0" tIns="0" rIns="0" bIns="0" rtlCol="0" anchor="t"/>
-          <a:lstStyle/>
-          <a:p>
-            <a:pPr algn="l" indent="0" marL="0">
-              <a:spcAft>
-                <a:spcPts val="800"/>
-              </a:spcAft>
-              <a:buNone/>
-            </a:pPr>
-            <a:r>
-              <a:rPr lang="en-US" sz="4000" i="1" dirty="0">
-                <a:solidFill>
-                  <a:srgbClr val="111111"/>
-                </a:solidFill>
-                <a:latin typeface="Times New Roman" pitchFamily="34" charset="0"/>
-                <a:ea typeface="Times New Roman" pitchFamily="34" charset="-122"/>
-                <a:cs typeface="Times New Roman" pitchFamily="34" charset="-120"/>
-              </a:rPr>
-              <a:t>The ozone layer is presented as follows:</a:t>
-            </a:r>
-            <a:endParaRPr lang="en-US" sz="4000" dirty="0"/>
-          </a:p>
-          <a:p>
-            <a:pPr algn="l" indent="0" marL="0">
-              <a:spcAft>
-                <a:spcPts val="800"/>
-              </a:spcAft>
-              <a:buNone/>
-            </a:pPr>
-            <a:r>
-              <a:rPr lang="en-US" sz="4000" b="1" dirty="0">
-                <a:solidFill>
-                  <a:srgbClr val="111111"/>
-                </a:solidFill>
-                <a:latin typeface="Times New Roman" pitchFamily="34" charset="0"/>
-                <a:ea typeface="Times New Roman" pitchFamily="34" charset="-122"/>
-                <a:cs typeface="Times New Roman" pitchFamily="34" charset="-120"/>
-              </a:rPr>
-              <a:t>Function: </a:t>
-            </a:r>
-            <a:pPr algn="l" indent="0" marL="0">
-              <a:spcAft>
-                <a:spcPts val="800"/>
-              </a:spcAft>
-              <a:buNone/>
-            </a:pPr>
-            <a:r>
-              <a:rPr lang="en-US" sz="4000" dirty="0">
-                <a:solidFill>
-                  <a:srgbClr val="111111"/>
-                </a:solidFill>
-                <a:latin typeface="Times New Roman" pitchFamily="34" charset="0"/>
-                <a:ea typeface="Times New Roman" pitchFamily="34" charset="-122"/>
-                <a:cs typeface="Times New Roman" pitchFamily="34" charset="-120"/>
-              </a:rPr>
-              <a:t>It absorbs most of the harmful ultraviolet (UV-B) rays that cause skin cancer and eye cataracts.</a:t>
-            </a:r>
-            <a:endParaRPr lang="en-US" sz="4000" dirty="0"/>
+              <a:t>Illustration: the ozone layer</a:t>
+            </a:r>
+            <a:endParaRPr lang="en-US" sz="1600" dirty="0"/>
           </a:p>
         </p:txBody>
       </p:sp>
@@ -17812,109 +18419,9 @@
           </a:p>
         </p:txBody>
       </p:sp>
-      <p:sp>
-        <p:nvSpPr>
-          <p:cNvPr id="3" name="Text 1"/>
-          <p:cNvSpPr/>
-          <p:nvPr/>
-        </p:nvSpPr>
-        <p:spPr>
-          <a:xfrm>
-            <a:off x="365760" y="1005840"/>
-            <a:ext cx="11460175" cy="731520"/>
-          </a:xfrm>
-          <a:prstGeom prst="rect">
-            <a:avLst/>
-          </a:prstGeom>
-          <a:noFill/>
-          <a:ln/>
-        </p:spPr>
-        <p:txBody>
-          <a:bodyPr wrap="square" lIns="0" tIns="0" rIns="0" bIns="0" rtlCol="0" anchor="ctr">
-            <a:normAutofit/>
-          </a:bodyPr>
-          <a:lstStyle/>
-          <a:p>
-            <a:pPr algn="ctr" indent="0" marL="0">
-              <a:buNone/>
-            </a:pPr>
-            <a:r>
-              <a:rPr lang="en-US" sz="3600" b="1" dirty="0">
-                <a:solidFill>
-                  <a:srgbClr val="990011"/>
-                </a:solidFill>
-                <a:latin typeface="Times New Roman" pitchFamily="34" charset="0"/>
-                <a:ea typeface="Times New Roman" pitchFamily="34" charset="-122"/>
-                <a:cs typeface="Times New Roman" pitchFamily="34" charset="-120"/>
-              </a:rPr>
-              <a:t>3. The Ozone Layer</a:t>
-            </a:r>
-            <a:endParaRPr lang="en-US" sz="3600" dirty="0"/>
-          </a:p>
-        </p:txBody>
-      </p:sp>
-      <p:sp>
-        <p:nvSpPr>
-          <p:cNvPr id="4" name="Text 2"/>
-          <p:cNvSpPr/>
-          <p:nvPr/>
-        </p:nvSpPr>
-        <p:spPr>
-          <a:xfrm>
-            <a:off x="365760" y="1783080"/>
-            <a:ext cx="4846320" cy="4617720"/>
-          </a:xfrm>
-          <a:prstGeom prst="rect">
-            <a:avLst/>
-          </a:prstGeom>
-          <a:noFill/>
-          <a:ln/>
-        </p:spPr>
-        <p:txBody>
-          <a:bodyPr wrap="square" lIns="0" tIns="0" rIns="0" bIns="0" rtlCol="0" anchor="t"/>
-          <a:lstStyle/>
-          <a:p>
-            <a:pPr algn="l" indent="0" marL="0">
-              <a:spcAft>
-                <a:spcPts val="800"/>
-              </a:spcAft>
-              <a:buNone/>
-            </a:pPr>
-            <a:r>
-              <a:rPr lang="en-US" sz="3600" b="1" dirty="0">
-                <a:solidFill>
-                  <a:srgbClr val="111111"/>
-                </a:solidFill>
-                <a:latin typeface="Times New Roman" pitchFamily="34" charset="0"/>
-                <a:ea typeface="Times New Roman" pitchFamily="34" charset="-122"/>
-                <a:cs typeface="Times New Roman" pitchFamily="34" charset="-120"/>
-              </a:rPr>
-              <a:t>Depletion: </a:t>
-            </a:r>
-            <a:pPr algn="l" indent="0" marL="0">
-              <a:spcAft>
-                <a:spcPts val="800"/>
-              </a:spcAft>
-              <a:buNone/>
-            </a:pPr>
-            <a:r>
-              <a:rPr lang="en-US" sz="3600" dirty="0">
-                <a:solidFill>
-                  <a:srgbClr val="111111"/>
-                </a:solidFill>
-                <a:latin typeface="Times New Roman" pitchFamily="34" charset="0"/>
-                <a:ea typeface="Times New Roman" pitchFamily="34" charset="-122"/>
-                <a:cs typeface="Times New Roman" pitchFamily="34" charset="-120"/>
-              </a:rPr>
-              <a:t>CFCs from old fridges, air conditioners and aerosol sprays destroyed ozone and created a "hole", especially over Antarctica.</a:t>
-            </a:r>
-            <a:endParaRPr lang="en-US" sz="3600" dirty="0"/>
-          </a:p>
-        </p:txBody>
-      </p:sp>
       <p:pic>
         <p:nvPicPr>
-          <p:cNvPr id="5" name="Image 0" descr="/home/claude/f4/img/v2/f4_ozonehole.jpg">    </p:cNvPr>
+          <p:cNvPr id="3" name="Image 0" descr="/home/claude/f4/img/minesec_sheet.png">    </p:cNvPr>
           <p:cNvPicPr>
             <a:picLocks noChangeAspect="1"/>
           </p:cNvPicPr>
@@ -17928,8 +18435,8 @@
         </p:blipFill>
         <p:spPr>
           <a:xfrm>
-            <a:off x="5349240" y="2071212"/>
-            <a:ext cx="6659575" cy="3693983"/>
+            <a:off x="0" y="658368"/>
+            <a:ext cx="5120640" cy="5833872"/>
           </a:xfrm>
           <a:prstGeom prst="rect">
             <a:avLst/>
@@ -17938,14 +18445,14 @@
       </p:pic>
       <p:sp>
         <p:nvSpPr>
-          <p:cNvPr id="6" name="Text 3"/>
+          <p:cNvPr id="4" name="Text 1"/>
           <p:cNvSpPr/>
           <p:nvPr/>
         </p:nvSpPr>
         <p:spPr>
           <a:xfrm>
-            <a:off x="5349240" y="6089904"/>
-            <a:ext cx="6659575" cy="347472"/>
+            <a:off x="5349240" y="1005840"/>
+            <a:ext cx="6522415" cy="731520"/>
           </a:xfrm>
           <a:prstGeom prst="rect">
             <a:avLst/>
@@ -17954,24 +18461,124 @@
           <a:ln/>
         </p:spPr>
         <p:txBody>
-          <a:bodyPr wrap="square" lIns="0" tIns="0" rIns="0" bIns="0" rtlCol="0" anchor="ctr"/>
+          <a:bodyPr wrap="square" lIns="0" tIns="0" rIns="0" bIns="0" rtlCol="0" anchor="ctr">
+            <a:normAutofit/>
+          </a:bodyPr>
           <a:lstStyle/>
           <a:p>
             <a:pPr algn="ctr" indent="0" marL="0">
               <a:buNone/>
             </a:pPr>
             <a:r>
-              <a:rPr lang="en-US" sz="1600" i="1" dirty="0">
-                <a:solidFill>
-                  <a:srgbClr val="555555"/>
+              <a:rPr lang="en-US" sz="3600" b="1" dirty="0">
+                <a:solidFill>
+                  <a:srgbClr val="990011"/>
                 </a:solidFill>
                 <a:latin typeface="Times New Roman" pitchFamily="34" charset="0"/>
                 <a:ea typeface="Times New Roman" pitchFamily="34" charset="-122"/>
                 <a:cs typeface="Times New Roman" pitchFamily="34" charset="-120"/>
               </a:rPr>
-              <a:t>Illustration: the ozone hole</a:t>
-            </a:r>
-            <a:endParaRPr lang="en-US" sz="1600" dirty="0"/>
+              <a:t>3. The Ozone Layer</a:t>
+            </a:r>
+            <a:endParaRPr lang="en-US" sz="3600" dirty="0"/>
+          </a:p>
+        </p:txBody>
+      </p:sp>
+      <p:sp>
+        <p:nvSpPr>
+          <p:cNvPr id="5" name="Text 2"/>
+          <p:cNvSpPr/>
+          <p:nvPr/>
+        </p:nvSpPr>
+        <p:spPr>
+          <a:xfrm>
+            <a:off x="5349240" y="1737360"/>
+            <a:ext cx="6522415" cy="457200"/>
+          </a:xfrm>
+          <a:prstGeom prst="rect">
+            <a:avLst/>
+          </a:prstGeom>
+          <a:noFill/>
+          <a:ln/>
+        </p:spPr>
+        <p:txBody>
+          <a:bodyPr wrap="square" lIns="0" tIns="0" rIns="0" bIns="0" rtlCol="0" anchor="ctr"/>
+          <a:lstStyle/>
+          <a:p>
+            <a:pPr algn="l" indent="0" marL="0">
+              <a:buNone/>
+            </a:pPr>
+            <a:r>
+              <a:rPr lang="en-US" sz="3200" b="1" dirty="0">
+                <a:solidFill>
+                  <a:srgbClr val="990011"/>
+                </a:solidFill>
+                <a:latin typeface="Times New Roman" pitchFamily="34" charset="0"/>
+                <a:ea typeface="Times New Roman" pitchFamily="34" charset="-122"/>
+                <a:cs typeface="Times New Roman" pitchFamily="34" charset="-120"/>
+              </a:rPr>
+              <a:t>A) Function</a:t>
+            </a:r>
+            <a:endParaRPr lang="en-US" sz="3200" dirty="0"/>
+          </a:p>
+        </p:txBody>
+      </p:sp>
+      <p:sp>
+        <p:nvSpPr>
+          <p:cNvPr id="6" name="Text 3"/>
+          <p:cNvSpPr/>
+          <p:nvPr/>
+        </p:nvSpPr>
+        <p:spPr>
+          <a:xfrm>
+            <a:off x="5349240" y="2240280"/>
+            <a:ext cx="6522415" cy="4206240"/>
+          </a:xfrm>
+          <a:prstGeom prst="rect">
+            <a:avLst/>
+          </a:prstGeom>
+          <a:noFill/>
+          <a:ln/>
+        </p:spPr>
+        <p:txBody>
+          <a:bodyPr wrap="square" lIns="0" tIns="0" rIns="0" bIns="0" rtlCol="0" anchor="t"/>
+          <a:lstStyle/>
+          <a:p>
+            <a:pPr algn="l" indent="0" marL="0">
+              <a:spcAft>
+                <a:spcPts val="800"/>
+              </a:spcAft>
+              <a:buNone/>
+            </a:pPr>
+            <a:r>
+              <a:rPr lang="en-US" sz="4000" b="1" dirty="0">
+                <a:solidFill>
+                  <a:srgbClr val="111111"/>
+                </a:solidFill>
+                <a:latin typeface="Times New Roman" pitchFamily="34" charset="0"/>
+                <a:ea typeface="Times New Roman" pitchFamily="34" charset="-122"/>
+                <a:cs typeface="Times New Roman" pitchFamily="34" charset="-120"/>
+              </a:rPr>
+              <a:t>Heating of the stratosphere: </a:t>
+            </a:r>
+            <a:pPr algn="l" indent="0" marL="0">
+              <a:spcAft>
+                <a:spcPts val="800"/>
+              </a:spcAft>
+              <a:buNone/>
+            </a:pPr>
+            <a:r>
+              <a:rPr lang="en-US" sz="4000" dirty="0">
+                <a:solidFill>
+                  <a:srgbClr val="111111"/>
+                </a:solidFill>
+                <a:latin typeface="Times New Roman" pitchFamily="34" charset="0"/>
+                <a:ea typeface="Times New Roman" pitchFamily="34" charset="-122"/>
+                <a:cs typeface="Times New Roman" pitchFamily="34" charset="-120"/>
+              </a:rPr>
+              <a:t>The energy absorbed by ozone heats the stratosphere. This is why temperature rises with height in this layer.</a:t>
+            </a:r>
+            <a:endParaRPr lang="en-US" sz="4000" dirty="0"/>
           </a:p>
         </p:txBody>
       </p:sp>
@@ -18104,7 +18711,7 @@
         <p:spPr>
           <a:xfrm>
             <a:off x="0" y="658368"/>
-            <a:ext cx="3840480" cy="5833872"/>
+            <a:ext cx="1463040" cy="5833872"/>
           </a:xfrm>
           <a:prstGeom prst="rect">
             <a:avLst/>
@@ -18119,8 +18726,8 @@
         </p:nvSpPr>
         <p:spPr>
           <a:xfrm>
-            <a:off x="4069080" y="1005840"/>
-            <a:ext cx="7802575" cy="731520"/>
+            <a:off x="1691640" y="1005840"/>
+            <a:ext cx="10180015" cy="731520"/>
           </a:xfrm>
           <a:prstGeom prst="rect">
             <a:avLst/>
@@ -18160,8 +18767,47 @@
         </p:nvSpPr>
         <p:spPr>
           <a:xfrm>
-            <a:off x="4069080" y="1783080"/>
-            <a:ext cx="7802575" cy="4663440"/>
+            <a:off x="1691640" y="1737360"/>
+            <a:ext cx="10180015" cy="457200"/>
+          </a:xfrm>
+          <a:prstGeom prst="rect">
+            <a:avLst/>
+          </a:prstGeom>
+          <a:noFill/>
+          <a:ln/>
+        </p:spPr>
+        <p:txBody>
+          <a:bodyPr wrap="square" lIns="0" tIns="0" rIns="0" bIns="0" rtlCol="0" anchor="ctr"/>
+          <a:lstStyle/>
+          <a:p>
+            <a:pPr algn="l" indent="0" marL="0">
+              <a:buNone/>
+            </a:pPr>
+            <a:r>
+              <a:rPr lang="en-US" sz="3200" b="1" dirty="0">
+                <a:solidFill>
+                  <a:srgbClr val="990011"/>
+                </a:solidFill>
+                <a:latin typeface="Times New Roman" pitchFamily="34" charset="0"/>
+                <a:ea typeface="Times New Roman" pitchFamily="34" charset="-122"/>
+                <a:cs typeface="Times New Roman" pitchFamily="34" charset="-120"/>
+              </a:rPr>
+              <a:t>B) Depletion</a:t>
+            </a:r>
+            <a:endParaRPr lang="en-US" sz="3200" dirty="0"/>
+          </a:p>
+        </p:txBody>
+      </p:sp>
+      <p:sp>
+        <p:nvSpPr>
+          <p:cNvPr id="6" name="Text 3"/>
+          <p:cNvSpPr/>
+          <p:nvPr/>
+        </p:nvSpPr>
+        <p:spPr>
+          <a:xfrm>
+            <a:off x="1691640" y="2240280"/>
+            <a:ext cx="10180015" cy="4206240"/>
           </a:xfrm>
           <a:prstGeom prst="rect">
             <a:avLst/>
@@ -18180,7 +18826,7 @@
               <a:buNone/>
             </a:pPr>
             <a:r>
-              <a:rPr lang="en-US" sz="4000" b="1" dirty="0">
+              <a:rPr lang="en-US" sz="3600" i="1" dirty="0">
                 <a:solidFill>
                   <a:srgbClr val="111111"/>
                 </a:solidFill>
@@ -18188,20 +18834,19 @@
                 <a:ea typeface="Times New Roman" pitchFamily="34" charset="-122"/>
                 <a:cs typeface="Times New Roman" pitchFamily="34" charset="-120"/>
               </a:rPr>
-              <a:t>Protection:</a:t>
-            </a:r>
-            <a:endParaRPr lang="en-US" sz="4000" dirty="0"/>
-          </a:p>
-          <a:p>
-            <a:pPr algn="l" marL="342900" indent="-342900">
+              <a:t>The ozone layer is depleted in the following ways:</a:t>
+            </a:r>
+            <a:endParaRPr lang="en-US" sz="3600" dirty="0"/>
+          </a:p>
+          <a:p>
+            <a:pPr algn="l" indent="0" marL="0">
               <a:spcAft>
                 <a:spcPts val="800"/>
               </a:spcAft>
-              <a:buSzPct val="100000"/>
-              <a:buChar char="•"/>
-            </a:pPr>
-            <a:r>
-              <a:rPr lang="en-US" sz="4000" dirty="0">
+              <a:buNone/>
+            </a:pPr>
+            <a:r>
+              <a:rPr lang="en-US" sz="3600" b="1" dirty="0">
                 <a:solidFill>
                   <a:srgbClr val="111111"/>
                 </a:solidFill>
@@ -18209,20 +18854,16 @@
                 <a:ea typeface="Times New Roman" pitchFamily="34" charset="-122"/>
                 <a:cs typeface="Times New Roman" pitchFamily="34" charset="-120"/>
               </a:rPr>
-              <a:t>The Montreal Protocol (1987) phased out ozone-destroying chemicals, and the layer is slowly recovering.</a:t>
-            </a:r>
-            <a:endParaRPr lang="en-US" sz="4000" dirty="0"/>
-          </a:p>
-          <a:p>
-            <a:pPr algn="l" marL="342900" indent="-342900">
+              <a:t>Chlorofluorocarbons (CFCs): </a:t>
+            </a:r>
+            <a:pPr algn="l" indent="0" marL="0">
               <a:spcAft>
                 <a:spcPts val="800"/>
               </a:spcAft>
-              <a:buSzPct val="100000"/>
-              <a:buChar char="•"/>
-            </a:pPr>
-            <a:r>
-              <a:rPr lang="en-US" sz="4000" dirty="0">
+              <a:buNone/>
+            </a:pPr>
+            <a:r>
+              <a:rPr lang="en-US" sz="3600" dirty="0">
                 <a:solidFill>
                   <a:srgbClr val="111111"/>
                 </a:solidFill>
@@ -18230,9 +18871,9 @@
                 <a:ea typeface="Times New Roman" pitchFamily="34" charset="-122"/>
                 <a:cs typeface="Times New Roman" pitchFamily="34" charset="-120"/>
               </a:rPr>
-              <a:t>Old fridges and air conditioners must be collected and treated.</a:t>
-            </a:r>
-            <a:endParaRPr lang="en-US" sz="4000" dirty="0"/>
+              <a:t>CFCs from old fridges, air conditioners and aerosol sprays rise slowly into the stratosphere. There, ultraviolet rays release chlorine, and each chlorine atom can destroy thousands of ozone molecules.</a:t>
+            </a:r>
+            <a:endParaRPr lang="en-US" sz="3600" dirty="0"/>
           </a:p>
         </p:txBody>
       </p:sp>
@@ -18365,7 +19006,7 @@
         <p:spPr>
           <a:xfrm>
             <a:off x="0" y="658368"/>
-            <a:ext cx="5120640" cy="5833872"/>
+            <a:ext cx="3840480" cy="5833872"/>
           </a:xfrm>
           <a:prstGeom prst="rect">
             <a:avLst/>
@@ -18380,8 +19021,8 @@
         </p:nvSpPr>
         <p:spPr>
           <a:xfrm>
-            <a:off x="5349240" y="1005840"/>
-            <a:ext cx="6522415" cy="731520"/>
+            <a:off x="4069080" y="1005840"/>
+            <a:ext cx="7802575" cy="731520"/>
           </a:xfrm>
           <a:prstGeom prst="rect">
             <a:avLst/>
@@ -18407,7 +19048,7 @@
                 <a:ea typeface="Times New Roman" pitchFamily="34" charset="-122"/>
                 <a:cs typeface="Times New Roman" pitchFamily="34" charset="-120"/>
               </a:rPr>
-              <a:t>3. The Ozone Layer (continued)</a:t>
+              <a:t>3. The Ozone Layer</a:t>
             </a:r>
             <a:endParaRPr lang="en-US" sz="3600" dirty="0"/>
           </a:p>
@@ -18421,8 +19062,8 @@
         </p:nvSpPr>
         <p:spPr>
           <a:xfrm>
-            <a:off x="5349240" y="1783080"/>
-            <a:ext cx="6522415" cy="4663440"/>
+            <a:off x="4069080" y="1737360"/>
+            <a:ext cx="7802575" cy="457200"/>
           </a:xfrm>
           <a:prstGeom prst="rect">
             <a:avLst/>
@@ -18431,18 +19072,56 @@
           <a:ln/>
         </p:spPr>
         <p:txBody>
+          <a:bodyPr wrap="square" lIns="0" tIns="0" rIns="0" bIns="0" rtlCol="0" anchor="ctr"/>
+          <a:lstStyle/>
+          <a:p>
+            <a:pPr algn="l" indent="0" marL="0">
+              <a:buNone/>
+            </a:pPr>
+            <a:r>
+              <a:rPr lang="en-US" sz="3200" b="1" dirty="0">
+                <a:solidFill>
+                  <a:srgbClr val="990011"/>
+                </a:solidFill>
+                <a:latin typeface="Times New Roman" pitchFamily="34" charset="0"/>
+                <a:ea typeface="Times New Roman" pitchFamily="34" charset="-122"/>
+                <a:cs typeface="Times New Roman" pitchFamily="34" charset="-120"/>
+              </a:rPr>
+              <a:t>B) Depletion</a:t>
+            </a:r>
+            <a:endParaRPr lang="en-US" sz="3200" dirty="0"/>
+          </a:p>
+        </p:txBody>
+      </p:sp>
+      <p:sp>
+        <p:nvSpPr>
+          <p:cNvPr id="6" name="Text 3"/>
+          <p:cNvSpPr/>
+          <p:nvPr/>
+        </p:nvSpPr>
+        <p:spPr>
+          <a:xfrm>
+            <a:off x="4069080" y="2240280"/>
+            <a:ext cx="7802575" cy="4206240"/>
+          </a:xfrm>
+          <a:prstGeom prst="rect">
+            <a:avLst/>
+          </a:prstGeom>
+          <a:noFill/>
+          <a:ln/>
+        </p:spPr>
+        <p:txBody>
           <a:bodyPr wrap="square" lIns="0" tIns="0" rIns="0" bIns="0" rtlCol="0" anchor="t"/>
           <a:lstStyle/>
           <a:p>
-            <a:pPr algn="l" marL="342900" indent="-342900">
+            <a:pPr algn="l" indent="0" marL="0">
               <a:spcAft>
                 <a:spcPts val="800"/>
               </a:spcAft>
-              <a:buSzPct val="100000"/>
-              <a:buChar char="•"/>
-            </a:pPr>
-            <a:r>
-              <a:rPr lang="en-US" sz="4000" dirty="0">
+              <a:buNone/>
+            </a:pPr>
+            <a:r>
+              <a:rPr lang="en-US" sz="4000" b="1" dirty="0">
                 <a:solidFill>
                   <a:srgbClr val="111111"/>
                 </a:solidFill>
@@ -18450,7 +19129,24 @@
                 <a:ea typeface="Times New Roman" pitchFamily="34" charset="-122"/>
                 <a:cs typeface="Times New Roman" pitchFamily="34" charset="-120"/>
               </a:rPr>
-              <a:t>People must be informed and use safe products.</a:t>
+              <a:t>Other ozone-destroying gases: </a:t>
+            </a:r>
+            <a:pPr algn="l" indent="0" marL="0">
+              <a:spcAft>
+                <a:spcPts val="800"/>
+              </a:spcAft>
+              <a:buNone/>
+            </a:pPr>
+            <a:r>
+              <a:rPr lang="en-US" sz="4000" dirty="0">
+                <a:solidFill>
+                  <a:srgbClr val="111111"/>
+                </a:solidFill>
+                <a:latin typeface="Times New Roman" pitchFamily="34" charset="0"/>
+                <a:ea typeface="Times New Roman" pitchFamily="34" charset="-122"/>
+                <a:cs typeface="Times New Roman" pitchFamily="34" charset="-120"/>
+              </a:rPr>
+              <a:t>Halons from fire extinguishers, methyl bromide used against pests and nitrous oxide from fertilisers also destroy ozone. Their effect adds to that of CFCs.</a:t>
             </a:r>
             <a:endParaRPr lang="en-US" sz="4000" dirty="0"/>
           </a:p>
@@ -18836,8 +19532,49 @@
         </p:nvSpPr>
         <p:spPr>
           <a:xfrm>
-            <a:off x="365760" y="1783080"/>
-            <a:ext cx="4846320" cy="4617720"/>
+            <a:off x="365760" y="1737360"/>
+            <a:ext cx="6035040" cy="457200"/>
+          </a:xfrm>
+          <a:prstGeom prst="rect">
+            <a:avLst/>
+          </a:prstGeom>
+          <a:noFill/>
+          <a:ln/>
+        </p:spPr>
+        <p:txBody>
+          <a:bodyPr wrap="square" lIns="0" tIns="0" rIns="0" bIns="0" rtlCol="0" anchor="ctr">
+            <a:normAutofit/>
+          </a:bodyPr>
+          <a:lstStyle/>
+          <a:p>
+            <a:pPr algn="l" indent="0" marL="0">
+              <a:buNone/>
+            </a:pPr>
+            <a:r>
+              <a:rPr lang="en-US" sz="3000" b="1" dirty="0">
+                <a:solidFill>
+                  <a:srgbClr val="990011"/>
+                </a:solidFill>
+                <a:latin typeface="Times New Roman" pitchFamily="34" charset="0"/>
+                <a:ea typeface="Times New Roman" pitchFamily="34" charset="-122"/>
+                <a:cs typeface="Times New Roman" pitchFamily="34" charset="-120"/>
+              </a:rPr>
+              <a:t>B) Depletion</a:t>
+            </a:r>
+            <a:endParaRPr lang="en-US" sz="3000" dirty="0"/>
+          </a:p>
+        </p:txBody>
+      </p:sp>
+      <p:sp>
+        <p:nvSpPr>
+          <p:cNvPr id="5" name="Text 3"/>
+          <p:cNvSpPr/>
+          <p:nvPr/>
+        </p:nvSpPr>
+        <p:spPr>
+          <a:xfrm>
+            <a:off x="365760" y="2240280"/>
+            <a:ext cx="6035040" cy="4160520"/>
           </a:xfrm>
           <a:prstGeom prst="rect">
             <a:avLst/>
@@ -18856,7 +19593,7 @@
               <a:buNone/>
             </a:pPr>
             <a:r>
-              <a:rPr lang="en-US" sz="3600" b="1" dirty="0">
+              <a:rPr lang="en-US" sz="3200" b="1" dirty="0">
                 <a:solidFill>
                   <a:srgbClr val="111111"/>
                 </a:solidFill>
@@ -18864,7 +19601,7 @@
                 <a:ea typeface="Times New Roman" pitchFamily="34" charset="-122"/>
                 <a:cs typeface="Times New Roman" pitchFamily="34" charset="-120"/>
               </a:rPr>
-              <a:t>Sun protection: </a:t>
+              <a:t>The ozone hole: </a:t>
             </a:r>
             <a:pPr algn="l" indent="0" marL="0">
               <a:spcAft>
@@ -18873,7 +19610,7 @@
               <a:buNone/>
             </a:pPr>
             <a:r>
-              <a:rPr lang="en-US" sz="3600" dirty="0">
+              <a:rPr lang="en-US" sz="3200" dirty="0">
                 <a:solidFill>
                   <a:srgbClr val="111111"/>
                 </a:solidFill>
@@ -18881,15 +19618,15 @@
                 <a:ea typeface="Times New Roman" pitchFamily="34" charset="-122"/>
                 <a:cs typeface="Times New Roman" pitchFamily="34" charset="-120"/>
               </a:rPr>
-              <a:t>In strong sun, as in Garoua, wear hats and sunglasses and avoid long exposure at midday.</a:t>
-            </a:r>
-            <a:endParaRPr lang="en-US" sz="3600" dirty="0"/>
+              <a:t>Every spring (September to November), the ozone layer over Antarctica becomes very thin because extreme cold speeds up the chemical reactions. This thinning is called the ozone hole.</a:t>
+            </a:r>
+            <a:endParaRPr lang="en-US" sz="3200" dirty="0"/>
           </a:p>
         </p:txBody>
       </p:sp>
       <p:pic>
         <p:nvPicPr>
-          <p:cNvPr id="5" name="Image 0" descr="/home/claude/f4/img/v2/met2_ozone.png">    </p:cNvPr>
+          <p:cNvPr id="6" name="Image 0" descr="/home/claude/f4/img/v2/f4_ozonehole.jpg">    </p:cNvPr>
           <p:cNvPicPr>
             <a:picLocks noChangeAspect="1"/>
           </p:cNvPicPr>
@@ -18903,8 +19640,8 @@
         </p:blipFill>
         <p:spPr>
           <a:xfrm>
-            <a:off x="5349240" y="2617506"/>
-            <a:ext cx="6659575" cy="2601397"/>
+            <a:off x="6537960" y="2400897"/>
+            <a:ext cx="5470855" cy="3034615"/>
           </a:xfrm>
           <a:prstGeom prst="rect">
             <a:avLst/>
@@ -18913,14 +19650,14 @@
       </p:pic>
       <p:sp>
         <p:nvSpPr>
-          <p:cNvPr id="6" name="Text 3"/>
+          <p:cNvPr id="7" name="Text 4"/>
           <p:cNvSpPr/>
           <p:nvPr/>
         </p:nvSpPr>
         <p:spPr>
           <a:xfrm>
-            <a:off x="5349240" y="6089904"/>
-            <a:ext cx="6659575" cy="347472"/>
+            <a:off x="6537960" y="6089904"/>
+            <a:ext cx="5470855" cy="347472"/>
           </a:xfrm>
           <a:prstGeom prst="rect">
             <a:avLst/>
@@ -18944,7 +19681,7 @@
                 <a:ea typeface="Times New Roman" pitchFamily="34" charset="-122"/>
                 <a:cs typeface="Times New Roman" pitchFamily="34" charset="-120"/>
               </a:rPr>
-              <a:t>Illustration: protecting the ozone layer</a:t>
+              <a:t>Illustration: the ozone hole</a:t>
             </a:r>
             <a:endParaRPr lang="en-US" sz="1600" dirty="0"/>
           </a:p>
@@ -19056,7 +19793,7 @@
                 <a:ea typeface="Calibri" pitchFamily="34" charset="-122"/>
                 <a:cs typeface="Calibri" pitchFamily="34" charset="-120"/>
               </a:rPr>
-              <a:t>FORMATIVE EVALUATION</a:t>
+              <a:t>BOARD SUMMARY</a:t>
             </a:r>
             <a:endParaRPr lang="en-US" sz="1400" dirty="0"/>
           </a:p>
@@ -19079,7 +19816,7 @@
         <p:spPr>
           <a:xfrm>
             <a:off x="0" y="658368"/>
-            <a:ext cx="5120640" cy="5833872"/>
+            <a:ext cx="2468880" cy="5833872"/>
           </a:xfrm>
           <a:prstGeom prst="rect">
             <a:avLst/>
@@ -19094,8 +19831,8 @@
         </p:nvSpPr>
         <p:spPr>
           <a:xfrm>
-            <a:off x="5349240" y="1005840"/>
-            <a:ext cx="6522415" cy="731520"/>
+            <a:off x="2697480" y="1005840"/>
+            <a:ext cx="9174175" cy="731520"/>
           </a:xfrm>
           <a:prstGeom prst="rect">
             <a:avLst/>
@@ -19121,7 +19858,7 @@
                 <a:ea typeface="Times New Roman" pitchFamily="34" charset="-122"/>
                 <a:cs typeface="Times New Roman" pitchFamily="34" charset="-120"/>
               </a:rPr>
-              <a:t>Evaluation 1</a:t>
+              <a:t>3. The Ozone Layer</a:t>
             </a:r>
             <a:endParaRPr lang="en-US" sz="3600" dirty="0"/>
           </a:p>
@@ -19135,8 +19872,47 @@
         </p:nvSpPr>
         <p:spPr>
           <a:xfrm>
-            <a:off x="5349240" y="1783080"/>
-            <a:ext cx="6522415" cy="4663440"/>
+            <a:off x="2697480" y="1737360"/>
+            <a:ext cx="9174175" cy="457200"/>
+          </a:xfrm>
+          <a:prstGeom prst="rect">
+            <a:avLst/>
+          </a:prstGeom>
+          <a:noFill/>
+          <a:ln/>
+        </p:spPr>
+        <p:txBody>
+          <a:bodyPr wrap="square" lIns="0" tIns="0" rIns="0" bIns="0" rtlCol="0" anchor="ctr"/>
+          <a:lstStyle/>
+          <a:p>
+            <a:pPr algn="l" indent="0" marL="0">
+              <a:buNone/>
+            </a:pPr>
+            <a:r>
+              <a:rPr lang="en-US" sz="3200" b="1" dirty="0">
+                <a:solidFill>
+                  <a:srgbClr val="990011"/>
+                </a:solidFill>
+                <a:latin typeface="Times New Roman" pitchFamily="34" charset="0"/>
+                <a:ea typeface="Times New Roman" pitchFamily="34" charset="-122"/>
+                <a:cs typeface="Times New Roman" pitchFamily="34" charset="-120"/>
+              </a:rPr>
+              <a:t>C) Measures</a:t>
+            </a:r>
+            <a:endParaRPr lang="en-US" sz="3200" dirty="0"/>
+          </a:p>
+        </p:txBody>
+      </p:sp>
+      <p:sp>
+        <p:nvSpPr>
+          <p:cNvPr id="6" name="Text 3"/>
+          <p:cNvSpPr/>
+          <p:nvPr/>
+        </p:nvSpPr>
+        <p:spPr>
+          <a:xfrm>
+            <a:off x="2697480" y="2240280"/>
+            <a:ext cx="9174175" cy="4206240"/>
           </a:xfrm>
           <a:prstGeom prst="rect">
             <a:avLst/>
@@ -19155,7 +19931,7 @@
               <a:buNone/>
             </a:pPr>
             <a:r>
-              <a:rPr lang="en-US" sz="4000" dirty="0">
+              <a:rPr lang="en-US" sz="3200" i="1" dirty="0">
                 <a:solidFill>
                   <a:srgbClr val="111111"/>
                 </a:solidFill>
@@ -19163,9 +19939,46 @@
                 <a:ea typeface="Times New Roman" pitchFamily="34" charset="-122"/>
                 <a:cs typeface="Times New Roman" pitchFamily="34" charset="-120"/>
               </a:rPr>
-              <a:t>Why does temperature fall in the troposphere but rise in the stratosphere?</a:t>
-            </a:r>
-            <a:endParaRPr lang="en-US" sz="4000" dirty="0"/>
+              <a:t>The ozone layer is protected by the following measures:</a:t>
+            </a:r>
+            <a:endParaRPr lang="en-US" sz="3200" dirty="0"/>
+          </a:p>
+          <a:p>
+            <a:pPr algn="l" indent="0" marL="0">
+              <a:spcAft>
+                <a:spcPts val="800"/>
+              </a:spcAft>
+              <a:buNone/>
+            </a:pPr>
+            <a:r>
+              <a:rPr lang="en-US" sz="3200" b="1" dirty="0">
+                <a:solidFill>
+                  <a:srgbClr val="111111"/>
+                </a:solidFill>
+                <a:latin typeface="Times New Roman" pitchFamily="34" charset="0"/>
+                <a:ea typeface="Times New Roman" pitchFamily="34" charset="-122"/>
+                <a:cs typeface="Times New Roman" pitchFamily="34" charset="-120"/>
+              </a:rPr>
+              <a:t>The Montreal Protocol (1987): </a:t>
+            </a:r>
+            <a:pPr algn="l" indent="0" marL="0">
+              <a:spcAft>
+                <a:spcPts val="800"/>
+              </a:spcAft>
+              <a:buNone/>
+            </a:pPr>
+            <a:r>
+              <a:rPr lang="en-US" sz="3200" dirty="0">
+                <a:solidFill>
+                  <a:srgbClr val="111111"/>
+                </a:solidFill>
+                <a:latin typeface="Times New Roman" pitchFamily="34" charset="0"/>
+                <a:ea typeface="Times New Roman" pitchFamily="34" charset="-122"/>
+                <a:cs typeface="Times New Roman" pitchFamily="34" charset="-120"/>
+              </a:rPr>
+              <a:t>Under this agreement, almost all countries, including Cameroon, stopped producing and using CFCs and other ozone-destroying chemicals. As a result, the ozone layer is slowly recovering and should return to its 1980 level by about 2066 over Antarctica.</a:t>
+            </a:r>
+            <a:endParaRPr lang="en-US" sz="3200" dirty="0"/>
           </a:p>
         </p:txBody>
       </p:sp>
@@ -19275,7 +20088,7 @@
                 <a:ea typeface="Calibri" pitchFamily="34" charset="-122"/>
                 <a:cs typeface="Calibri" pitchFamily="34" charset="-120"/>
               </a:rPr>
-              <a:t>FORMATIVE EVALUATION</a:t>
+              <a:t>BOARD SUMMARY</a:t>
             </a:r>
             <a:endParaRPr lang="en-US" sz="1400" dirty="0"/>
           </a:p>
@@ -19298,7 +20111,7 @@
         <p:spPr>
           <a:xfrm>
             <a:off x="0" y="658368"/>
-            <a:ext cx="5120640" cy="5833872"/>
+            <a:ext cx="2468880" cy="5833872"/>
           </a:xfrm>
           <a:prstGeom prst="rect">
             <a:avLst/>
@@ -19313,8 +20126,8 @@
         </p:nvSpPr>
         <p:spPr>
           <a:xfrm>
-            <a:off x="5349240" y="1005840"/>
-            <a:ext cx="6522415" cy="731520"/>
+            <a:off x="2697480" y="1005840"/>
+            <a:ext cx="9174175" cy="731520"/>
           </a:xfrm>
           <a:prstGeom prst="rect">
             <a:avLst/>
@@ -19340,7 +20153,7 @@
                 <a:ea typeface="Times New Roman" pitchFamily="34" charset="-122"/>
                 <a:cs typeface="Times New Roman" pitchFamily="34" charset="-120"/>
               </a:rPr>
-              <a:t>Expected Answer</a:t>
+              <a:t>3. The Ozone Layer</a:t>
             </a:r>
             <a:endParaRPr lang="en-US" sz="3600" dirty="0"/>
           </a:p>
@@ -19354,8 +20167,47 @@
         </p:nvSpPr>
         <p:spPr>
           <a:xfrm>
-            <a:off x="5349240" y="1783080"/>
-            <a:ext cx="6522415" cy="4663440"/>
+            <a:off x="2697480" y="1737360"/>
+            <a:ext cx="9174175" cy="457200"/>
+          </a:xfrm>
+          <a:prstGeom prst="rect">
+            <a:avLst/>
+          </a:prstGeom>
+          <a:noFill/>
+          <a:ln/>
+        </p:spPr>
+        <p:txBody>
+          <a:bodyPr wrap="square" lIns="0" tIns="0" rIns="0" bIns="0" rtlCol="0" anchor="ctr"/>
+          <a:lstStyle/>
+          <a:p>
+            <a:pPr algn="l" indent="0" marL="0">
+              <a:buNone/>
+            </a:pPr>
+            <a:r>
+              <a:rPr lang="en-US" sz="3200" b="1" dirty="0">
+                <a:solidFill>
+                  <a:srgbClr val="990011"/>
+                </a:solidFill>
+                <a:latin typeface="Times New Roman" pitchFamily="34" charset="0"/>
+                <a:ea typeface="Times New Roman" pitchFamily="34" charset="-122"/>
+                <a:cs typeface="Times New Roman" pitchFamily="34" charset="-120"/>
+              </a:rPr>
+              <a:t>C) Measures</a:t>
+            </a:r>
+            <a:endParaRPr lang="en-US" sz="3200" dirty="0"/>
+          </a:p>
+        </p:txBody>
+      </p:sp>
+      <p:sp>
+        <p:nvSpPr>
+          <p:cNvPr id="6" name="Text 3"/>
+          <p:cNvSpPr/>
+          <p:nvPr/>
+        </p:nvSpPr>
+        <p:spPr>
+          <a:xfrm>
+            <a:off x="2697480" y="2240280"/>
+            <a:ext cx="9174175" cy="4206240"/>
           </a:xfrm>
           <a:prstGeom prst="rect">
             <a:avLst/>
@@ -19374,7 +20226,7 @@
               <a:buNone/>
             </a:pPr>
             <a:r>
-              <a:rPr lang="en-US" sz="4000" dirty="0">
+              <a:rPr lang="en-US" sz="4000" b="1" dirty="0">
                 <a:solidFill>
                   <a:srgbClr val="111111"/>
                 </a:solidFill>
@@ -19382,7 +20234,24 @@
                 <a:ea typeface="Times New Roman" pitchFamily="34" charset="-122"/>
                 <a:cs typeface="Times New Roman" pitchFamily="34" charset="-120"/>
               </a:rPr>
-              <a:t>The troposphere is heated from the ground below; the stratosphere is heated by ozone absorbing ultraviolet rays.</a:t>
+              <a:t>Collection of old equipment: </a:t>
+            </a:r>
+            <a:pPr algn="l" indent="0" marL="0">
+              <a:spcAft>
+                <a:spcPts val="800"/>
+              </a:spcAft>
+              <a:buNone/>
+            </a:pPr>
+            <a:r>
+              <a:rPr lang="en-US" sz="4000" dirty="0">
+                <a:solidFill>
+                  <a:srgbClr val="111111"/>
+                </a:solidFill>
+                <a:latin typeface="Times New Roman" pitchFamily="34" charset="0"/>
+                <a:ea typeface="Times New Roman" pitchFamily="34" charset="-122"/>
+                <a:cs typeface="Times New Roman" pitchFamily="34" charset="-120"/>
+              </a:rPr>
+              <a:t>Old fridges and air conditioners must be collected so that their gases are recovered and destroyed. This prevents the CFCs they still contain from escaping into the air.</a:t>
             </a:r>
             <a:endParaRPr lang="en-US" sz="4000" dirty="0"/>
           </a:p>
@@ -19494,7 +20363,7 @@
                 <a:ea typeface="Calibri" pitchFamily="34" charset="-122"/>
                 <a:cs typeface="Calibri" pitchFamily="34" charset="-120"/>
               </a:rPr>
-              <a:t>FORMATIVE EVALUATION</a:t>
+              <a:t>BOARD SUMMARY</a:t>
             </a:r>
             <a:endParaRPr lang="en-US" sz="1400" dirty="0"/>
           </a:p>
@@ -19517,7 +20386,7 @@
         <p:spPr>
           <a:xfrm>
             <a:off x="0" y="658368"/>
-            <a:ext cx="5120640" cy="5833872"/>
+            <a:ext cx="1463040" cy="5833872"/>
           </a:xfrm>
           <a:prstGeom prst="rect">
             <a:avLst/>
@@ -19532,8 +20401,8 @@
         </p:nvSpPr>
         <p:spPr>
           <a:xfrm>
-            <a:off x="5349240" y="1005840"/>
-            <a:ext cx="6522415" cy="731520"/>
+            <a:off x="1691640" y="1005840"/>
+            <a:ext cx="10180015" cy="731520"/>
           </a:xfrm>
           <a:prstGeom prst="rect">
             <a:avLst/>
@@ -19559,7 +20428,7 @@
                 <a:ea typeface="Times New Roman" pitchFamily="34" charset="-122"/>
                 <a:cs typeface="Times New Roman" pitchFamily="34" charset="-120"/>
               </a:rPr>
-              <a:t>Evaluation 2</a:t>
+              <a:t>3. The Ozone Layer</a:t>
             </a:r>
             <a:endParaRPr lang="en-US" sz="3600" dirty="0"/>
           </a:p>
@@ -19573,8 +20442,47 @@
         </p:nvSpPr>
         <p:spPr>
           <a:xfrm>
-            <a:off x="5349240" y="1783080"/>
-            <a:ext cx="6522415" cy="4663440"/>
+            <a:off x="1691640" y="1737360"/>
+            <a:ext cx="10180015" cy="457200"/>
+          </a:xfrm>
+          <a:prstGeom prst="rect">
+            <a:avLst/>
+          </a:prstGeom>
+          <a:noFill/>
+          <a:ln/>
+        </p:spPr>
+        <p:txBody>
+          <a:bodyPr wrap="square" lIns="0" tIns="0" rIns="0" bIns="0" rtlCol="0" anchor="ctr"/>
+          <a:lstStyle/>
+          <a:p>
+            <a:pPr algn="l" indent="0" marL="0">
+              <a:buNone/>
+            </a:pPr>
+            <a:r>
+              <a:rPr lang="en-US" sz="3200" b="1" dirty="0">
+                <a:solidFill>
+                  <a:srgbClr val="990011"/>
+                </a:solidFill>
+                <a:latin typeface="Times New Roman" pitchFamily="34" charset="0"/>
+                <a:ea typeface="Times New Roman" pitchFamily="34" charset="-122"/>
+                <a:cs typeface="Times New Roman" pitchFamily="34" charset="-120"/>
+              </a:rPr>
+              <a:t>C) Measures</a:t>
+            </a:r>
+            <a:endParaRPr lang="en-US" sz="3200" dirty="0"/>
+          </a:p>
+        </p:txBody>
+      </p:sp>
+      <p:sp>
+        <p:nvSpPr>
+          <p:cNvPr id="6" name="Text 3"/>
+          <p:cNvSpPr/>
+          <p:nvPr/>
+        </p:nvSpPr>
+        <p:spPr>
+          <a:xfrm>
+            <a:off x="1691640" y="2240280"/>
+            <a:ext cx="10180015" cy="4206240"/>
           </a:xfrm>
           <a:prstGeom prst="rect">
             <a:avLst/>
@@ -19593,7 +20501,7 @@
               <a:buNone/>
             </a:pPr>
             <a:r>
-              <a:rPr lang="en-US" sz="4000" dirty="0">
+              <a:rPr lang="en-US" sz="4000" b="1" dirty="0">
                 <a:solidFill>
                   <a:srgbClr val="111111"/>
                 </a:solidFill>
@@ -19601,7 +20509,24 @@
                 <a:ea typeface="Times New Roman" pitchFamily="34" charset="-122"/>
                 <a:cs typeface="Times New Roman" pitchFamily="34" charset="-120"/>
               </a:rPr>
-              <a:t>Give two measures to protect the ozone layer.</a:t>
+              <a:t>Education and sun protection: </a:t>
+            </a:r>
+            <a:pPr algn="l" indent="0" marL="0">
+              <a:spcAft>
+                <a:spcPts val="800"/>
+              </a:spcAft>
+              <a:buNone/>
+            </a:pPr>
+            <a:r>
+              <a:rPr lang="en-US" sz="4000" dirty="0">
+                <a:solidFill>
+                  <a:srgbClr val="111111"/>
+                </a:solidFill>
+                <a:latin typeface="Times New Roman" pitchFamily="34" charset="0"/>
+                <a:ea typeface="Times New Roman" pitchFamily="34" charset="-122"/>
+                <a:cs typeface="Times New Roman" pitchFamily="34" charset="-120"/>
+              </a:rPr>
+              <a:t>People are informed so that they buy ozone-friendly products labelled "CFC-free". In strong sun, as in Garoua, wearing hats and sunglasses protects them from the ultraviolet rays that still reach the ground.</a:t>
             </a:r>
             <a:endParaRPr lang="en-US" sz="4000" dirty="0"/>
           </a:p>
@@ -19778,7 +20703,7 @@
                 <a:ea typeface="Times New Roman" pitchFamily="34" charset="-122"/>
                 <a:cs typeface="Times New Roman" pitchFamily="34" charset="-120"/>
               </a:rPr>
-              <a:t>Expected Answer</a:t>
+              <a:t>Evaluation 1</a:t>
             </a:r>
             <a:endParaRPr lang="en-US" sz="3600" dirty="0"/>
           </a:p>
@@ -19820,7 +20745,7 @@
                 <a:ea typeface="Times New Roman" pitchFamily="34" charset="-122"/>
                 <a:cs typeface="Times New Roman" pitchFamily="34" charset="-120"/>
               </a:rPr>
-              <a:t>Apply the Montreal Protocol, stop using CFCs, recycle old fridges, educate people (any two).</a:t>
+              <a:t>Why does temperature fall in the troposphere but rise in the stratosphere?</a:t>
             </a:r>
             <a:endParaRPr lang="en-US" sz="4000" dirty="0"/>
           </a:p>
@@ -19932,7 +20857,7 @@
                 <a:ea typeface="Calibri" pitchFamily="34" charset="-122"/>
                 <a:cs typeface="Calibri" pitchFamily="34" charset="-120"/>
               </a:rPr>
-              <a:t>REMEDIATION</a:t>
+              <a:t>FORMATIVE EVALUATION</a:t>
             </a:r>
             <a:endParaRPr lang="en-US" sz="1400" dirty="0"/>
           </a:p>
@@ -19955,7 +20880,7 @@
         <p:spPr>
           <a:xfrm>
             <a:off x="0" y="658368"/>
-            <a:ext cx="3840480" cy="5833872"/>
+            <a:ext cx="5120640" cy="5833872"/>
           </a:xfrm>
           <a:prstGeom prst="rect">
             <a:avLst/>
@@ -19970,8 +20895,8 @@
         </p:nvSpPr>
         <p:spPr>
           <a:xfrm>
-            <a:off x="4069080" y="1005840"/>
-            <a:ext cx="7802575" cy="731520"/>
+            <a:off x="5349240" y="1005840"/>
+            <a:ext cx="6522415" cy="731520"/>
           </a:xfrm>
           <a:prstGeom prst="rect">
             <a:avLst/>
@@ -19997,7 +20922,7 @@
                 <a:ea typeface="Times New Roman" pitchFamily="34" charset="-122"/>
                 <a:cs typeface="Times New Roman" pitchFamily="34" charset="-120"/>
               </a:rPr>
-              <a:t>Remediation</a:t>
+              <a:t>Expected Answer</a:t>
             </a:r>
             <a:endParaRPr lang="en-US" sz="3600" dirty="0"/>
           </a:p>
@@ -20011,8 +20936,8 @@
         </p:nvSpPr>
         <p:spPr>
           <a:xfrm>
-            <a:off x="4069080" y="1783080"/>
-            <a:ext cx="7802575" cy="4663440"/>
+            <a:off x="5349240" y="1783080"/>
+            <a:ext cx="6522415" cy="4663440"/>
           </a:xfrm>
           <a:prstGeom prst="rect">
             <a:avLst/>
@@ -20031,7 +20956,7 @@
               <a:buNone/>
             </a:pPr>
             <a:r>
-              <a:rPr lang="en-US" sz="4000" b="1" dirty="0">
+              <a:rPr lang="en-US" sz="4000" dirty="0">
                 <a:solidFill>
                   <a:srgbClr val="111111"/>
                 </a:solidFill>
@@ -20039,73 +20964,7 @@
                 <a:ea typeface="Times New Roman" pitchFamily="34" charset="-122"/>
                 <a:cs typeface="Times New Roman" pitchFamily="34" charset="-120"/>
               </a:rPr>
-              <a:t>Fill in the blanks:</a:t>
-            </a:r>
-            <a:endParaRPr lang="en-US" sz="4000" dirty="0"/>
-          </a:p>
-          <a:p>
-            <a:pPr algn="l" marL="342900" indent="-342900">
-              <a:spcAft>
-                <a:spcPts val="800"/>
-              </a:spcAft>
-              <a:buSzPct val="100000"/>
-              <a:buFont typeface="+mj-lt"/>
-              <a:buAutoNum type="arabicPeriod" startAt="1"/>
-            </a:pPr>
-            <a:r>
-              <a:rPr lang="en-US" sz="4000" dirty="0">
-                <a:solidFill>
-                  <a:srgbClr val="111111"/>
-                </a:solidFill>
-                <a:latin typeface="Times New Roman" pitchFamily="34" charset="0"/>
-                <a:ea typeface="Times New Roman" pitchFamily="34" charset="-122"/>
-                <a:cs typeface="Times New Roman" pitchFamily="34" charset="-120"/>
-              </a:rPr>
-              <a:t>Weather happens in the ______.</a:t>
-            </a:r>
-            <a:endParaRPr lang="en-US" sz="4000" dirty="0"/>
-          </a:p>
-          <a:p>
-            <a:pPr algn="l" marL="342900" indent="-342900">
-              <a:spcAft>
-                <a:spcPts val="800"/>
-              </a:spcAft>
-              <a:buSzPct val="100000"/>
-              <a:buFont typeface="+mj-lt"/>
-              <a:buAutoNum type="arabicPeriod" startAt="1"/>
-            </a:pPr>
-            <a:r>
-              <a:rPr lang="en-US" sz="4000" dirty="0">
-                <a:solidFill>
-                  <a:srgbClr val="111111"/>
-                </a:solidFill>
-                <a:latin typeface="Times New Roman" pitchFamily="34" charset="0"/>
-                <a:ea typeface="Times New Roman" pitchFamily="34" charset="-122"/>
-                <a:cs typeface="Times New Roman" pitchFamily="34" charset="-120"/>
-              </a:rPr>
-              <a:t>The ozone layer lies in the ______.</a:t>
-            </a:r>
-            <a:endParaRPr lang="en-US" sz="4000" dirty="0"/>
-          </a:p>
-          <a:p>
-            <a:pPr algn="l" marL="342900" indent="-342900">
-              <a:spcAft>
-                <a:spcPts val="800"/>
-              </a:spcAft>
-              <a:buSzPct val="100000"/>
-              <a:buFont typeface="+mj-lt"/>
-              <a:buAutoNum type="arabicPeriod" startAt="1"/>
-            </a:pPr>
-            <a:r>
-              <a:rPr lang="en-US" sz="4000" dirty="0">
-                <a:solidFill>
-                  <a:srgbClr val="111111"/>
-                </a:solidFill>
-                <a:latin typeface="Times New Roman" pitchFamily="34" charset="0"/>
-                <a:ea typeface="Times New Roman" pitchFamily="34" charset="-122"/>
-                <a:cs typeface="Times New Roman" pitchFamily="34" charset="-120"/>
-              </a:rPr>
-              <a:t>The coldest layer is the ______.</a:t>
+              <a:t>The troposphere is heated from the ground below; the stratosphere is heated by ozone absorbing ultraviolet rays.</a:t>
             </a:r>
             <a:endParaRPr lang="en-US" sz="4000" dirty="0"/>
           </a:p>
@@ -20217,7 +21076,7 @@
                 <a:ea typeface="Calibri" pitchFamily="34" charset="-122"/>
                 <a:cs typeface="Calibri" pitchFamily="34" charset="-120"/>
               </a:rPr>
-              <a:t>HOMEWORK</a:t>
+              <a:t>FORMATIVE EVALUATION</a:t>
             </a:r>
             <a:endParaRPr lang="en-US" sz="1400" dirty="0"/>
           </a:p>
@@ -20282,7 +21141,7 @@
                 <a:ea typeface="Times New Roman" pitchFamily="34" charset="-122"/>
                 <a:cs typeface="Times New Roman" pitchFamily="34" charset="-120"/>
               </a:rPr>
-              <a:t>Homework</a:t>
+              <a:t>Evaluation 2</a:t>
             </a:r>
             <a:endParaRPr lang="en-US" sz="3600" dirty="0"/>
           </a:p>
@@ -20324,7 +21183,7 @@
                 <a:ea typeface="Times New Roman" pitchFamily="34" charset="-122"/>
                 <a:cs typeface="Times New Roman" pitchFamily="34" charset="-120"/>
               </a:rPr>
-              <a:t>Define insolation.</a:t>
+              <a:t>Give two measures to protect the ozone layer.</a:t>
             </a:r>
             <a:endParaRPr lang="en-US" sz="4000" dirty="0"/>
           </a:p>
@@ -20436,7 +21295,7 @@
                 <a:ea typeface="Calibri" pitchFamily="34" charset="-122"/>
                 <a:cs typeface="Calibri" pitchFamily="34" charset="-120"/>
               </a:rPr>
-              <a:t>NEXT LESSON</a:t>
+              <a:t>FORMATIVE EVALUATION</a:t>
             </a:r>
             <a:endParaRPr lang="en-US" sz="1400" dirty="0"/>
           </a:p>
@@ -20501,7 +21360,7 @@
                 <a:ea typeface="Times New Roman" pitchFamily="34" charset="-122"/>
                 <a:cs typeface="Times New Roman" pitchFamily="34" charset="-120"/>
               </a:rPr>
-              <a:t>Next Lesson</a:t>
+              <a:t>Expected Answer</a:t>
             </a:r>
             <a:endParaRPr lang="en-US" sz="3600" dirty="0"/>
           </a:p>
@@ -20525,17 +21384,17 @@
           <a:ln/>
         </p:spPr>
         <p:txBody>
-          <a:bodyPr wrap="square" lIns="0" tIns="0" rIns="0" bIns="0" rtlCol="0" anchor="ctr"/>
-          <a:lstStyle/>
-          <a:p>
-            <a:pPr algn="ctr" indent="0" marL="0">
+          <a:bodyPr wrap="square" lIns="0" tIns="0" rIns="0" bIns="0" rtlCol="0" anchor="t"/>
+          <a:lstStyle/>
+          <a:p>
+            <a:pPr algn="l" indent="0" marL="0">
               <a:spcAft>
                 <a:spcPts val="800"/>
               </a:spcAft>
               <a:buNone/>
             </a:pPr>
             <a:r>
-              <a:rPr lang="en-US" sz="4000" b="1" dirty="0">
+              <a:rPr lang="en-US" sz="4000" dirty="0">
                 <a:solidFill>
                   <a:srgbClr val="111111"/>
                 </a:solidFill>
@@ -20543,27 +21402,7 @@
                 <a:ea typeface="Times New Roman" pitchFamily="34" charset="-122"/>
                 <a:cs typeface="Times New Roman" pitchFamily="34" charset="-120"/>
               </a:rPr>
-              <a:t>Our next lesson will be on:</a:t>
-            </a:r>
-            <a:endParaRPr lang="en-US" sz="4000" dirty="0"/>
-          </a:p>
-          <a:p>
-            <a:pPr algn="ctr" indent="0" marL="0">
-              <a:spcAft>
-                <a:spcPts val="800"/>
-              </a:spcAft>
-              <a:buNone/>
-            </a:pPr>
-            <a:r>
-              <a:rPr lang="en-US" sz="4000" b="1" dirty="0">
-                <a:solidFill>
-                  <a:srgbClr val="990011"/>
-                </a:solidFill>
-                <a:latin typeface="Times New Roman" pitchFamily="34" charset="0"/>
-                <a:ea typeface="Times New Roman" pitchFamily="34" charset="-122"/>
-                <a:cs typeface="Times New Roman" pitchFamily="34" charset="-120"/>
-              </a:rPr>
-              <a:t>Lesson 3: Solar Radiation</a:t>
+              <a:t>Apply the Montreal Protocol, stop using CFCs, recycle old fridges, educate people (any two).</a:t>
             </a:r>
             <a:endParaRPr lang="en-US" sz="4000" dirty="0"/>
           </a:p>
@@ -20675,22 +21514,46 @@
                 <a:ea typeface="Calibri" pitchFamily="34" charset="-122"/>
                 <a:cs typeface="Calibri" pitchFamily="34" charset="-120"/>
               </a:rPr>
-              <a:t>BILINGUAL GAME</a:t>
+              <a:t>REMEDIATION</a:t>
             </a:r>
             <a:endParaRPr lang="en-US" sz="1400" dirty="0"/>
           </a:p>
         </p:txBody>
       </p:sp>
-      <p:sp>
-        <p:nvSpPr>
-          <p:cNvPr id="3" name="Text 1"/>
+      <p:pic>
+        <p:nvPicPr>
+          <p:cNvPr id="3" name="Image 0" descr="/home/claude/f4/img/minesec_sheet.png">    </p:cNvPr>
+          <p:cNvPicPr>
+            <a:picLocks noChangeAspect="1"/>
+          </p:cNvPicPr>
+          <p:nvPr/>
+        </p:nvPicPr>
+        <p:blipFill>
+          <a:blip r:embed="rId1"/>
+          <a:stretch>
+            <a:fillRect/>
+          </a:stretch>
+        </p:blipFill>
+        <p:spPr>
+          <a:xfrm>
+            <a:off x="0" y="658368"/>
+            <a:ext cx="3840480" cy="5833872"/>
+          </a:xfrm>
+          <a:prstGeom prst="rect">
+            <a:avLst/>
+          </a:prstGeom>
+        </p:spPr>
+      </p:pic>
+      <p:sp>
+        <p:nvSpPr>
+          <p:cNvPr id="4" name="Text 1"/>
           <p:cNvSpPr/>
           <p:nvPr/>
         </p:nvSpPr>
         <p:spPr>
           <a:xfrm>
-            <a:off x="457200" y="1005840"/>
-            <a:ext cx="11277295" cy="731520"/>
+            <a:off x="4069080" y="1005840"/>
+            <a:ext cx="7802575" cy="731520"/>
           </a:xfrm>
           <a:prstGeom prst="rect">
             <a:avLst/>
@@ -20699,7 +21562,9 @@
           <a:ln/>
         </p:spPr>
         <p:txBody>
-          <a:bodyPr wrap="square" lIns="0" tIns="0" rIns="0" bIns="0" rtlCol="0" anchor="ctr"/>
+          <a:bodyPr wrap="square" lIns="0" tIns="0" rIns="0" bIns="0" rtlCol="0" anchor="ctr">
+            <a:normAutofit/>
+          </a:bodyPr>
           <a:lstStyle/>
           <a:p>
             <a:pPr algn="ctr" indent="0" marL="0">
@@ -20714,6 +21579,1054 @@
                 <a:ea typeface="Times New Roman" pitchFamily="34" charset="-122"/>
                 <a:cs typeface="Times New Roman" pitchFamily="34" charset="-120"/>
               </a:rPr>
+              <a:t>Remediation</a:t>
+            </a:r>
+            <a:endParaRPr lang="en-US" sz="3600" dirty="0"/>
+          </a:p>
+        </p:txBody>
+      </p:sp>
+      <p:sp>
+        <p:nvSpPr>
+          <p:cNvPr id="5" name="Text 2"/>
+          <p:cNvSpPr/>
+          <p:nvPr/>
+        </p:nvSpPr>
+        <p:spPr>
+          <a:xfrm>
+            <a:off x="4069080" y="1783080"/>
+            <a:ext cx="7802575" cy="4663440"/>
+          </a:xfrm>
+          <a:prstGeom prst="rect">
+            <a:avLst/>
+          </a:prstGeom>
+          <a:noFill/>
+          <a:ln/>
+        </p:spPr>
+        <p:txBody>
+          <a:bodyPr wrap="square" lIns="0" tIns="0" rIns="0" bIns="0" rtlCol="0" anchor="t"/>
+          <a:lstStyle/>
+          <a:p>
+            <a:pPr algn="l" indent="0" marL="0">
+              <a:spcAft>
+                <a:spcPts val="800"/>
+              </a:spcAft>
+              <a:buNone/>
+            </a:pPr>
+            <a:r>
+              <a:rPr lang="en-US" sz="4000" b="1" dirty="0">
+                <a:solidFill>
+                  <a:srgbClr val="111111"/>
+                </a:solidFill>
+                <a:latin typeface="Times New Roman" pitchFamily="34" charset="0"/>
+                <a:ea typeface="Times New Roman" pitchFamily="34" charset="-122"/>
+                <a:cs typeface="Times New Roman" pitchFamily="34" charset="-120"/>
+              </a:rPr>
+              <a:t>Fill in the blanks:</a:t>
+            </a:r>
+            <a:endParaRPr lang="en-US" sz="4000" dirty="0"/>
+          </a:p>
+          <a:p>
+            <a:pPr algn="l" marL="342900" indent="-342900">
+              <a:spcAft>
+                <a:spcPts val="800"/>
+              </a:spcAft>
+              <a:buSzPct val="100000"/>
+              <a:buFont typeface="+mj-lt"/>
+              <a:buAutoNum type="arabicPeriod" startAt="1"/>
+            </a:pPr>
+            <a:r>
+              <a:rPr lang="en-US" sz="4000" dirty="0">
+                <a:solidFill>
+                  <a:srgbClr val="111111"/>
+                </a:solidFill>
+                <a:latin typeface="Times New Roman" pitchFamily="34" charset="0"/>
+                <a:ea typeface="Times New Roman" pitchFamily="34" charset="-122"/>
+                <a:cs typeface="Times New Roman" pitchFamily="34" charset="-120"/>
+              </a:rPr>
+              <a:t>Weather happens in the ______.</a:t>
+            </a:r>
+            <a:endParaRPr lang="en-US" sz="4000" dirty="0"/>
+          </a:p>
+          <a:p>
+            <a:pPr algn="l" marL="342900" indent="-342900">
+              <a:spcAft>
+                <a:spcPts val="800"/>
+              </a:spcAft>
+              <a:buSzPct val="100000"/>
+              <a:buFont typeface="+mj-lt"/>
+              <a:buAutoNum type="arabicPeriod" startAt="1"/>
+            </a:pPr>
+            <a:r>
+              <a:rPr lang="en-US" sz="4000" dirty="0">
+                <a:solidFill>
+                  <a:srgbClr val="111111"/>
+                </a:solidFill>
+                <a:latin typeface="Times New Roman" pitchFamily="34" charset="0"/>
+                <a:ea typeface="Times New Roman" pitchFamily="34" charset="-122"/>
+                <a:cs typeface="Times New Roman" pitchFamily="34" charset="-120"/>
+              </a:rPr>
+              <a:t>The ozone layer lies in the ______.</a:t>
+            </a:r>
+            <a:endParaRPr lang="en-US" sz="4000" dirty="0"/>
+          </a:p>
+          <a:p>
+            <a:pPr algn="l" marL="342900" indent="-342900">
+              <a:spcAft>
+                <a:spcPts val="800"/>
+              </a:spcAft>
+              <a:buSzPct val="100000"/>
+              <a:buFont typeface="+mj-lt"/>
+              <a:buAutoNum type="arabicPeriod" startAt="1"/>
+            </a:pPr>
+            <a:r>
+              <a:rPr lang="en-US" sz="4000" dirty="0">
+                <a:solidFill>
+                  <a:srgbClr val="111111"/>
+                </a:solidFill>
+                <a:latin typeface="Times New Roman" pitchFamily="34" charset="0"/>
+                <a:ea typeface="Times New Roman" pitchFamily="34" charset="-122"/>
+                <a:cs typeface="Times New Roman" pitchFamily="34" charset="-120"/>
+              </a:rPr>
+              <a:t>The coldest layer is the ______.</a:t>
+            </a:r>
+            <a:endParaRPr lang="en-US" sz="4000" dirty="0"/>
+          </a:p>
+        </p:txBody>
+      </p:sp>
+      <p:sp>
+        <p:nvSpPr>
+          <p:cNvPr id="25" name="Slide Number Placeholder 0"/>
+          <p:cNvSpPr>
+            <a:spLocks noGrp="1"/>
+          </p:cNvSpPr>
+          <p:nvPr>
+            <p:ph type="sldNum" sz="quarter" idx="4294967295"/>
+          </p:nvPr>
+        </p:nvSpPr>
+        <p:spPr>
+          <a:xfrm>
+            <a:off x="27432" y="91440"/>
+            <a:ext cx="585216" cy="475488"/>
+          </a:xfrm>
+          <a:prstGeom prst="rect">
+            <a:avLst/>
+          </a:prstGeom>
+          <a:extLst>
+            <a:ext uri="{C572A759-6A51-4108-AA02-DFA0A04FC94B}">
+              <ma14:wrappingTextBoxFlag xmlns:ma14="http://schemas.microsoft.com/office/mac/drawingml/2011/main" val="0"/>
+            </a:ext>
+          </a:extLst>
+        </p:spPr>
+        <p:txBody>
+          <a:bodyPr/>
+          <a:lstStyle>
+            <a:lvl1pPr>
+              <a:defRPr sz="2000">
+                <a:solidFill>
+                  <a:srgbClr val="FFFFFF"/>
+                </a:solidFill>
+                <a:latin typeface="Calibri"/>
+                <a:ea typeface="Calibri"/>
+                <a:cs typeface="Calibri"/>
+              </a:defRPr>
+            </a:lvl1pPr>
+          </a:lstStyle>
+          <a:p>
+            <a:pPr algn="ctr"/>
+            <a:fld id="{F7021451-1387-4CA6-816F-3879F97B5CBC}" type="slidenum">
+              <a:rPr b="1" lang="en-US"/>
+              <a:t>58</a:t>
+            </a:fld>
+            <a:endParaRPr lang="en-US"/>
+          </a:p>
+        </p:txBody>
+      </p:sp>
+    </p:spTree>
+  </p:cSld>
+  <p:clrMapOvr>
+    <a:masterClrMapping/>
+  </p:clrMapOvr>
+</p:sld>
+</file>
+
+<file path=ppt/slides/slide59.xml><?xml version="1.0" encoding="utf-8"?>
+<p:sld xmlns:a="http://schemas.openxmlformats.org/drawingml/2006/main" xmlns:r="http://schemas.openxmlformats.org/officeDocument/2006/relationships" xmlns:p="http://schemas.openxmlformats.org/presentationml/2006/main">
+  <p:cSld name="Slide 59">
+    <p:spTree>
+      <p:nvGrpSpPr>
+        <p:cNvPr id="1" name=""/>
+        <p:cNvGrpSpPr/>
+        <p:nvPr/>
+      </p:nvGrpSpPr>
+      <p:grpSpPr>
+        <a:xfrm>
+          <a:off x="0" y="0"/>
+          <a:ext cx="0" cy="0"/>
+          <a:chOff x="0" y="0"/>
+          <a:chExt cx="0" cy="0"/>
+        </a:xfrm>
+      </p:grpSpPr>
+      <p:sp>
+        <p:nvSpPr>
+          <p:cNvPr id="2" name="Text 0"/>
+          <p:cNvSpPr/>
+          <p:nvPr/>
+        </p:nvSpPr>
+        <p:spPr>
+          <a:xfrm>
+            <a:off x="457200" y="713232"/>
+            <a:ext cx="11368735" cy="274320"/>
+          </a:xfrm>
+          <a:prstGeom prst="rect">
+            <a:avLst/>
+          </a:prstGeom>
+          <a:noFill/>
+          <a:ln/>
+        </p:spPr>
+        <p:txBody>
+          <a:bodyPr wrap="square" lIns="0" tIns="0" rIns="0" bIns="0" rtlCol="0" anchor="ctr"/>
+          <a:lstStyle/>
+          <a:p>
+            <a:pPr algn="r" indent="0" marL="0">
+              <a:buNone/>
+            </a:pPr>
+            <a:r>
+              <a:rPr lang="en-US" sz="1400" b="1" dirty="0">
+                <a:solidFill>
+                  <a:srgbClr val="1C3F6E"/>
+                </a:solidFill>
+                <a:latin typeface="Calibri" pitchFamily="34" charset="0"/>
+                <a:ea typeface="Calibri" pitchFamily="34" charset="-122"/>
+                <a:cs typeface="Calibri" pitchFamily="34" charset="-120"/>
+              </a:rPr>
+              <a:t>HOMEWORK</a:t>
+            </a:r>
+            <a:endParaRPr lang="en-US" sz="1400" dirty="0"/>
+          </a:p>
+        </p:txBody>
+      </p:sp>
+      <p:pic>
+        <p:nvPicPr>
+          <p:cNvPr id="3" name="Image 0" descr="/home/claude/f4/img/minesec_sheet.png">    </p:cNvPr>
+          <p:cNvPicPr>
+            <a:picLocks noChangeAspect="1"/>
+          </p:cNvPicPr>
+          <p:nvPr/>
+        </p:nvPicPr>
+        <p:blipFill>
+          <a:blip r:embed="rId1"/>
+          <a:stretch>
+            <a:fillRect/>
+          </a:stretch>
+        </p:blipFill>
+        <p:spPr>
+          <a:xfrm>
+            <a:off x="0" y="658368"/>
+            <a:ext cx="5120640" cy="5833872"/>
+          </a:xfrm>
+          <a:prstGeom prst="rect">
+            <a:avLst/>
+          </a:prstGeom>
+        </p:spPr>
+      </p:pic>
+      <p:sp>
+        <p:nvSpPr>
+          <p:cNvPr id="4" name="Text 1"/>
+          <p:cNvSpPr/>
+          <p:nvPr/>
+        </p:nvSpPr>
+        <p:spPr>
+          <a:xfrm>
+            <a:off x="5349240" y="1005840"/>
+            <a:ext cx="6522415" cy="731520"/>
+          </a:xfrm>
+          <a:prstGeom prst="rect">
+            <a:avLst/>
+          </a:prstGeom>
+          <a:noFill/>
+          <a:ln/>
+        </p:spPr>
+        <p:txBody>
+          <a:bodyPr wrap="square" lIns="0" tIns="0" rIns="0" bIns="0" rtlCol="0" anchor="ctr">
+            <a:normAutofit/>
+          </a:bodyPr>
+          <a:lstStyle/>
+          <a:p>
+            <a:pPr algn="ctr" indent="0" marL="0">
+              <a:buNone/>
+            </a:pPr>
+            <a:r>
+              <a:rPr lang="en-US" sz="3600" b="1" dirty="0">
+                <a:solidFill>
+                  <a:srgbClr val="990011"/>
+                </a:solidFill>
+                <a:latin typeface="Times New Roman" pitchFamily="34" charset="0"/>
+                <a:ea typeface="Times New Roman" pitchFamily="34" charset="-122"/>
+                <a:cs typeface="Times New Roman" pitchFamily="34" charset="-120"/>
+              </a:rPr>
+              <a:t>Homework</a:t>
+            </a:r>
+            <a:endParaRPr lang="en-US" sz="3600" dirty="0"/>
+          </a:p>
+        </p:txBody>
+      </p:sp>
+      <p:sp>
+        <p:nvSpPr>
+          <p:cNvPr id="5" name="Text 2"/>
+          <p:cNvSpPr/>
+          <p:nvPr/>
+        </p:nvSpPr>
+        <p:spPr>
+          <a:xfrm>
+            <a:off x="5349240" y="1783080"/>
+            <a:ext cx="6522415" cy="4663440"/>
+          </a:xfrm>
+          <a:prstGeom prst="rect">
+            <a:avLst/>
+          </a:prstGeom>
+          <a:noFill/>
+          <a:ln/>
+        </p:spPr>
+        <p:txBody>
+          <a:bodyPr wrap="square" lIns="0" tIns="0" rIns="0" bIns="0" rtlCol="0" anchor="t"/>
+          <a:lstStyle/>
+          <a:p>
+            <a:pPr algn="l" indent="0" marL="0">
+              <a:spcAft>
+                <a:spcPts val="800"/>
+              </a:spcAft>
+              <a:buNone/>
+            </a:pPr>
+            <a:r>
+              <a:rPr lang="en-US" sz="4000" dirty="0">
+                <a:solidFill>
+                  <a:srgbClr val="111111"/>
+                </a:solidFill>
+                <a:latin typeface="Times New Roman" pitchFamily="34" charset="0"/>
+                <a:ea typeface="Times New Roman" pitchFamily="34" charset="-122"/>
+                <a:cs typeface="Times New Roman" pitchFamily="34" charset="-120"/>
+              </a:rPr>
+              <a:t>Define insolation.</a:t>
+            </a:r>
+            <a:endParaRPr lang="en-US" sz="4000" dirty="0"/>
+          </a:p>
+        </p:txBody>
+      </p:sp>
+      <p:sp>
+        <p:nvSpPr>
+          <p:cNvPr id="25" name="Slide Number Placeholder 0"/>
+          <p:cNvSpPr>
+            <a:spLocks noGrp="1"/>
+          </p:cNvSpPr>
+          <p:nvPr>
+            <p:ph type="sldNum" sz="quarter" idx="4294967295"/>
+          </p:nvPr>
+        </p:nvSpPr>
+        <p:spPr>
+          <a:xfrm>
+            <a:off x="27432" y="91440"/>
+            <a:ext cx="585216" cy="475488"/>
+          </a:xfrm>
+          <a:prstGeom prst="rect">
+            <a:avLst/>
+          </a:prstGeom>
+          <a:extLst>
+            <a:ext uri="{C572A759-6A51-4108-AA02-DFA0A04FC94B}">
+              <ma14:wrappingTextBoxFlag xmlns:ma14="http://schemas.microsoft.com/office/mac/drawingml/2011/main" val="0"/>
+            </a:ext>
+          </a:extLst>
+        </p:spPr>
+        <p:txBody>
+          <a:bodyPr/>
+          <a:lstStyle>
+            <a:lvl1pPr>
+              <a:defRPr sz="2000">
+                <a:solidFill>
+                  <a:srgbClr val="FFFFFF"/>
+                </a:solidFill>
+                <a:latin typeface="Calibri"/>
+                <a:ea typeface="Calibri"/>
+                <a:cs typeface="Calibri"/>
+              </a:defRPr>
+            </a:lvl1pPr>
+          </a:lstStyle>
+          <a:p>
+            <a:pPr algn="ctr"/>
+            <a:fld id="{F7021451-1387-4CA6-816F-3879F97B5CBC}" type="slidenum">
+              <a:rPr b="1" lang="en-US"/>
+              <a:t>59</a:t>
+            </a:fld>
+            <a:endParaRPr lang="en-US"/>
+          </a:p>
+        </p:txBody>
+      </p:sp>
+    </p:spTree>
+  </p:cSld>
+  <p:clrMapOvr>
+    <a:masterClrMapping/>
+  </p:clrMapOvr>
+</p:sld>
+</file>
+
+<file path=ppt/slides/slide6.xml><?xml version="1.0" encoding="utf-8"?>
+<p:sld xmlns:a="http://schemas.openxmlformats.org/drawingml/2006/main" xmlns:r="http://schemas.openxmlformats.org/officeDocument/2006/relationships" xmlns:p="http://schemas.openxmlformats.org/presentationml/2006/main">
+  <p:cSld name="Slide 6">
+    <p:spTree>
+      <p:nvGrpSpPr>
+        <p:cNvPr id="1" name=""/>
+        <p:cNvGrpSpPr/>
+        <p:nvPr/>
+      </p:nvGrpSpPr>
+      <p:grpSpPr>
+        <a:xfrm>
+          <a:off x="0" y="0"/>
+          <a:ext cx="0" cy="0"/>
+          <a:chOff x="0" y="0"/>
+          <a:chExt cx="0" cy="0"/>
+        </a:xfrm>
+      </p:grpSpPr>
+      <p:sp>
+        <p:nvSpPr>
+          <p:cNvPr id="2" name="Text 0"/>
+          <p:cNvSpPr/>
+          <p:nvPr/>
+        </p:nvSpPr>
+        <p:spPr>
+          <a:xfrm>
+            <a:off x="457200" y="713232"/>
+            <a:ext cx="11368735" cy="274320"/>
+          </a:xfrm>
+          <a:prstGeom prst="rect">
+            <a:avLst/>
+          </a:prstGeom>
+          <a:noFill/>
+          <a:ln/>
+        </p:spPr>
+        <p:txBody>
+          <a:bodyPr wrap="square" lIns="0" tIns="0" rIns="0" bIns="0" rtlCol="0" anchor="ctr"/>
+          <a:lstStyle/>
+          <a:p>
+            <a:pPr algn="r" indent="0" marL="0">
+              <a:buNone/>
+            </a:pPr>
+            <a:r>
+              <a:rPr lang="en-US" sz="1400" b="1" dirty="0">
+                <a:solidFill>
+                  <a:srgbClr val="1C3F6E"/>
+                </a:solidFill>
+                <a:latin typeface="Calibri" pitchFamily="34" charset="0"/>
+                <a:ea typeface="Calibri" pitchFamily="34" charset="-122"/>
+                <a:cs typeface="Calibri" pitchFamily="34" charset="-120"/>
+              </a:rPr>
+              <a:t>LESSON PLAN</a:t>
+            </a:r>
+            <a:endParaRPr lang="en-US" sz="1400" dirty="0"/>
+          </a:p>
+        </p:txBody>
+      </p:sp>
+      <p:pic>
+        <p:nvPicPr>
+          <p:cNvPr id="3" name="Image 0" descr="/home/claude/f4/img/minesec_sheet.png">    </p:cNvPr>
+          <p:cNvPicPr>
+            <a:picLocks noChangeAspect="1"/>
+          </p:cNvPicPr>
+          <p:nvPr/>
+        </p:nvPicPr>
+        <p:blipFill>
+          <a:blip r:embed="rId1"/>
+          <a:stretch>
+            <a:fillRect/>
+          </a:stretch>
+        </p:blipFill>
+        <p:spPr>
+          <a:xfrm>
+            <a:off x="0" y="658368"/>
+            <a:ext cx="2468880" cy="5833872"/>
+          </a:xfrm>
+          <a:prstGeom prst="rect">
+            <a:avLst/>
+          </a:prstGeom>
+        </p:spPr>
+      </p:pic>
+      <p:sp>
+        <p:nvSpPr>
+          <p:cNvPr id="4" name="Text 1"/>
+          <p:cNvSpPr/>
+          <p:nvPr/>
+        </p:nvSpPr>
+        <p:spPr>
+          <a:xfrm>
+            <a:off x="2697480" y="1005840"/>
+            <a:ext cx="9174175" cy="731520"/>
+          </a:xfrm>
+          <a:prstGeom prst="rect">
+            <a:avLst/>
+          </a:prstGeom>
+          <a:noFill/>
+          <a:ln/>
+        </p:spPr>
+        <p:txBody>
+          <a:bodyPr wrap="square" lIns="0" tIns="0" rIns="0" bIns="0" rtlCol="0" anchor="ctr">
+            <a:normAutofit/>
+          </a:bodyPr>
+          <a:lstStyle/>
+          <a:p>
+            <a:pPr algn="ctr" indent="0" marL="0">
+              <a:buNone/>
+            </a:pPr>
+            <a:r>
+              <a:rPr lang="en-US" sz="3600" b="1" dirty="0">
+                <a:solidFill>
+                  <a:srgbClr val="990011"/>
+                </a:solidFill>
+                <a:latin typeface="Times New Roman" pitchFamily="34" charset="0"/>
+                <a:ea typeface="Times New Roman" pitchFamily="34" charset="-122"/>
+                <a:cs typeface="Times New Roman" pitchFamily="34" charset="-120"/>
+              </a:rPr>
+              <a:t>Lesson Plan</a:t>
+            </a:r>
+            <a:endParaRPr lang="en-US" sz="3600" dirty="0"/>
+          </a:p>
+        </p:txBody>
+      </p:sp>
+      <p:sp>
+        <p:nvSpPr>
+          <p:cNvPr id="5" name="Text 2"/>
+          <p:cNvSpPr/>
+          <p:nvPr/>
+        </p:nvSpPr>
+        <p:spPr>
+          <a:xfrm>
+            <a:off x="2697480" y="1783080"/>
+            <a:ext cx="9174175" cy="4663440"/>
+          </a:xfrm>
+          <a:prstGeom prst="rect">
+            <a:avLst/>
+          </a:prstGeom>
+          <a:noFill/>
+          <a:ln/>
+        </p:spPr>
+        <p:txBody>
+          <a:bodyPr wrap="square" lIns="0" tIns="0" rIns="0" bIns="0" rtlCol="0" anchor="t"/>
+          <a:lstStyle/>
+          <a:p>
+            <a:pPr algn="l" marL="342900" indent="-342900">
+              <a:spcAft>
+                <a:spcPts val="800"/>
+              </a:spcAft>
+              <a:buSzPct val="100000"/>
+              <a:buFont typeface="+mj-lt"/>
+              <a:buAutoNum type="arabicPeriod" startAt="1"/>
+            </a:pPr>
+            <a:r>
+              <a:rPr lang="en-US" sz="4000" dirty="0">
+                <a:solidFill>
+                  <a:srgbClr val="111111"/>
+                </a:solidFill>
+                <a:latin typeface="Times New Roman" pitchFamily="34" charset="0"/>
+                <a:ea typeface="Times New Roman" pitchFamily="34" charset="-122"/>
+                <a:cs typeface="Times New Roman" pitchFamily="34" charset="-120"/>
+              </a:rPr>
+              <a:t>Correction of the homework</a:t>
+            </a:r>
+            <a:endParaRPr lang="en-US" sz="4000" dirty="0"/>
+          </a:p>
+          <a:p>
+            <a:pPr algn="l" marL="342900" indent="-342900">
+              <a:spcAft>
+                <a:spcPts val="800"/>
+              </a:spcAft>
+              <a:buSzPct val="100000"/>
+              <a:buFont typeface="+mj-lt"/>
+              <a:buAutoNum type="arabicPeriod" startAt="1"/>
+            </a:pPr>
+            <a:r>
+              <a:rPr lang="en-US" sz="4000" dirty="0">
+                <a:solidFill>
+                  <a:srgbClr val="111111"/>
+                </a:solidFill>
+                <a:latin typeface="Times New Roman" pitchFamily="34" charset="0"/>
+                <a:ea typeface="Times New Roman" pitchFamily="34" charset="-122"/>
+                <a:cs typeface="Times New Roman" pitchFamily="34" charset="-120"/>
+              </a:rPr>
+              <a:t>Objectives and recall</a:t>
+            </a:r>
+            <a:endParaRPr lang="en-US" sz="4000" dirty="0"/>
+          </a:p>
+          <a:p>
+            <a:pPr algn="l" marL="342900" indent="-342900">
+              <a:spcAft>
+                <a:spcPts val="800"/>
+              </a:spcAft>
+              <a:buSzPct val="100000"/>
+              <a:buFont typeface="+mj-lt"/>
+              <a:buAutoNum type="arabicPeriod" startAt="1"/>
+            </a:pPr>
+            <a:r>
+              <a:rPr lang="en-US" sz="4000" dirty="0">
+                <a:solidFill>
+                  <a:srgbClr val="111111"/>
+                </a:solidFill>
+                <a:latin typeface="Times New Roman" pitchFamily="34" charset="0"/>
+                <a:ea typeface="Times New Roman" pitchFamily="34" charset="-122"/>
+                <a:cs typeface="Times New Roman" pitchFamily="34" charset="-120"/>
+              </a:rPr>
+              <a:t>Real-life situation and action to take</a:t>
+            </a:r>
+            <a:endParaRPr lang="en-US" sz="4000" dirty="0"/>
+          </a:p>
+          <a:p>
+            <a:pPr algn="l" marL="342900" indent="-342900">
+              <a:spcAft>
+                <a:spcPts val="800"/>
+              </a:spcAft>
+              <a:buSzPct val="100000"/>
+              <a:buFont typeface="+mj-lt"/>
+              <a:buAutoNum type="arabicPeriod" startAt="1"/>
+            </a:pPr>
+            <a:r>
+              <a:rPr lang="en-US" sz="4000" dirty="0">
+                <a:solidFill>
+                  <a:srgbClr val="111111"/>
+                </a:solidFill>
+                <a:latin typeface="Times New Roman" pitchFamily="34" charset="0"/>
+                <a:ea typeface="Times New Roman" pitchFamily="34" charset="-122"/>
+                <a:cs typeface="Times New Roman" pitchFamily="34" charset="-120"/>
+              </a:rPr>
+              <a:t>Learning activities</a:t>
+            </a:r>
+            <a:endParaRPr lang="en-US" sz="4000" dirty="0"/>
+          </a:p>
+          <a:p>
+            <a:pPr algn="l" marL="342900" indent="-342900">
+              <a:spcAft>
+                <a:spcPts val="800"/>
+              </a:spcAft>
+              <a:buSzPct val="100000"/>
+              <a:buFont typeface="+mj-lt"/>
+              <a:buAutoNum type="arabicPeriod" startAt="1"/>
+            </a:pPr>
+            <a:r>
+              <a:rPr lang="en-US" sz="4000" dirty="0">
+                <a:solidFill>
+                  <a:srgbClr val="111111"/>
+                </a:solidFill>
+                <a:latin typeface="Times New Roman" pitchFamily="34" charset="0"/>
+                <a:ea typeface="Times New Roman" pitchFamily="34" charset="-122"/>
+                <a:cs typeface="Times New Roman" pitchFamily="34" charset="-120"/>
+              </a:rPr>
+              <a:t>Board summary</a:t>
+            </a:r>
+            <a:endParaRPr lang="en-US" sz="4000" dirty="0"/>
+          </a:p>
+          <a:p>
+            <a:pPr algn="l" marL="342900" indent="-342900">
+              <a:spcAft>
+                <a:spcPts val="800"/>
+              </a:spcAft>
+              <a:buSzPct val="100000"/>
+              <a:buFont typeface="+mj-lt"/>
+              <a:buAutoNum type="arabicPeriod" startAt="1"/>
+            </a:pPr>
+            <a:r>
+              <a:rPr lang="en-US" sz="4000" dirty="0">
+                <a:solidFill>
+                  <a:srgbClr val="111111"/>
+                </a:solidFill>
+                <a:latin typeface="Times New Roman" pitchFamily="34" charset="0"/>
+                <a:ea typeface="Times New Roman" pitchFamily="34" charset="-122"/>
+                <a:cs typeface="Times New Roman" pitchFamily="34" charset="-120"/>
+              </a:rPr>
+              <a:t>Evaluation, remediation and homework</a:t>
+            </a:r>
+            <a:endParaRPr lang="en-US" sz="4000" dirty="0"/>
+          </a:p>
+        </p:txBody>
+      </p:sp>
+      <p:sp>
+        <p:nvSpPr>
+          <p:cNvPr id="25" name="Slide Number Placeholder 0"/>
+          <p:cNvSpPr>
+            <a:spLocks noGrp="1"/>
+          </p:cNvSpPr>
+          <p:nvPr>
+            <p:ph type="sldNum" sz="quarter" idx="4294967295"/>
+          </p:nvPr>
+        </p:nvSpPr>
+        <p:spPr>
+          <a:xfrm>
+            <a:off x="27432" y="91440"/>
+            <a:ext cx="585216" cy="475488"/>
+          </a:xfrm>
+          <a:prstGeom prst="rect">
+            <a:avLst/>
+          </a:prstGeom>
+          <a:extLst>
+            <a:ext uri="{C572A759-6A51-4108-AA02-DFA0A04FC94B}">
+              <ma14:wrappingTextBoxFlag xmlns:ma14="http://schemas.microsoft.com/office/mac/drawingml/2011/main" val="0"/>
+            </a:ext>
+          </a:extLst>
+        </p:spPr>
+        <p:txBody>
+          <a:bodyPr/>
+          <a:lstStyle>
+            <a:lvl1pPr>
+              <a:defRPr sz="2000">
+                <a:solidFill>
+                  <a:srgbClr val="FFFFFF"/>
+                </a:solidFill>
+                <a:latin typeface="Calibri"/>
+                <a:ea typeface="Calibri"/>
+                <a:cs typeface="Calibri"/>
+              </a:defRPr>
+            </a:lvl1pPr>
+          </a:lstStyle>
+          <a:p>
+            <a:pPr algn="ctr"/>
+            <a:fld id="{F7021451-1387-4CA6-816F-3879F97B5CBC}" type="slidenum">
+              <a:rPr b="1" lang="en-US"/>
+              <a:t>6</a:t>
+            </a:fld>
+            <a:endParaRPr lang="en-US"/>
+          </a:p>
+        </p:txBody>
+      </p:sp>
+    </p:spTree>
+  </p:cSld>
+  <p:clrMapOvr>
+    <a:masterClrMapping/>
+  </p:clrMapOvr>
+</p:sld>
+</file>
+
+<file path=ppt/slides/slide60.xml><?xml version="1.0" encoding="utf-8"?>
+<p:sld xmlns:a="http://schemas.openxmlformats.org/drawingml/2006/main" xmlns:r="http://schemas.openxmlformats.org/officeDocument/2006/relationships" xmlns:p="http://schemas.openxmlformats.org/presentationml/2006/main">
+  <p:cSld name="Slide 60">
+    <p:spTree>
+      <p:nvGrpSpPr>
+        <p:cNvPr id="1" name=""/>
+        <p:cNvGrpSpPr/>
+        <p:nvPr/>
+      </p:nvGrpSpPr>
+      <p:grpSpPr>
+        <a:xfrm>
+          <a:off x="0" y="0"/>
+          <a:ext cx="0" cy="0"/>
+          <a:chOff x="0" y="0"/>
+          <a:chExt cx="0" cy="0"/>
+        </a:xfrm>
+      </p:grpSpPr>
+      <p:sp>
+        <p:nvSpPr>
+          <p:cNvPr id="2" name="Text 0"/>
+          <p:cNvSpPr/>
+          <p:nvPr/>
+        </p:nvSpPr>
+        <p:spPr>
+          <a:xfrm>
+            <a:off x="457200" y="713232"/>
+            <a:ext cx="11368735" cy="274320"/>
+          </a:xfrm>
+          <a:prstGeom prst="rect">
+            <a:avLst/>
+          </a:prstGeom>
+          <a:noFill/>
+          <a:ln/>
+        </p:spPr>
+        <p:txBody>
+          <a:bodyPr wrap="square" lIns="0" tIns="0" rIns="0" bIns="0" rtlCol="0" anchor="ctr"/>
+          <a:lstStyle/>
+          <a:p>
+            <a:pPr algn="r" indent="0" marL="0">
+              <a:buNone/>
+            </a:pPr>
+            <a:r>
+              <a:rPr lang="en-US" sz="1400" b="1" dirty="0">
+                <a:solidFill>
+                  <a:srgbClr val="1C3F6E"/>
+                </a:solidFill>
+                <a:latin typeface="Calibri" pitchFamily="34" charset="0"/>
+                <a:ea typeface="Calibri" pitchFamily="34" charset="-122"/>
+                <a:cs typeface="Calibri" pitchFamily="34" charset="-120"/>
+              </a:rPr>
+              <a:t>NEXT LESSON</a:t>
+            </a:r>
+            <a:endParaRPr lang="en-US" sz="1400" dirty="0"/>
+          </a:p>
+        </p:txBody>
+      </p:sp>
+      <p:pic>
+        <p:nvPicPr>
+          <p:cNvPr id="3" name="Image 0" descr="/home/claude/f4/img/minesec_sheet.png">    </p:cNvPr>
+          <p:cNvPicPr>
+            <a:picLocks noChangeAspect="1"/>
+          </p:cNvPicPr>
+          <p:nvPr/>
+        </p:nvPicPr>
+        <p:blipFill>
+          <a:blip r:embed="rId1"/>
+          <a:stretch>
+            <a:fillRect/>
+          </a:stretch>
+        </p:blipFill>
+        <p:spPr>
+          <a:xfrm>
+            <a:off x="0" y="658368"/>
+            <a:ext cx="5120640" cy="5833872"/>
+          </a:xfrm>
+          <a:prstGeom prst="rect">
+            <a:avLst/>
+          </a:prstGeom>
+        </p:spPr>
+      </p:pic>
+      <p:sp>
+        <p:nvSpPr>
+          <p:cNvPr id="4" name="Text 1"/>
+          <p:cNvSpPr/>
+          <p:nvPr/>
+        </p:nvSpPr>
+        <p:spPr>
+          <a:xfrm>
+            <a:off x="5349240" y="1005840"/>
+            <a:ext cx="6522415" cy="731520"/>
+          </a:xfrm>
+          <a:prstGeom prst="rect">
+            <a:avLst/>
+          </a:prstGeom>
+          <a:noFill/>
+          <a:ln/>
+        </p:spPr>
+        <p:txBody>
+          <a:bodyPr wrap="square" lIns="0" tIns="0" rIns="0" bIns="0" rtlCol="0" anchor="ctr">
+            <a:normAutofit/>
+          </a:bodyPr>
+          <a:lstStyle/>
+          <a:p>
+            <a:pPr algn="ctr" indent="0" marL="0">
+              <a:buNone/>
+            </a:pPr>
+            <a:r>
+              <a:rPr lang="en-US" sz="3600" b="1" dirty="0">
+                <a:solidFill>
+                  <a:srgbClr val="990011"/>
+                </a:solidFill>
+                <a:latin typeface="Times New Roman" pitchFamily="34" charset="0"/>
+                <a:ea typeface="Times New Roman" pitchFamily="34" charset="-122"/>
+                <a:cs typeface="Times New Roman" pitchFamily="34" charset="-120"/>
+              </a:rPr>
+              <a:t>Next Lesson</a:t>
+            </a:r>
+            <a:endParaRPr lang="en-US" sz="3600" dirty="0"/>
+          </a:p>
+        </p:txBody>
+      </p:sp>
+      <p:sp>
+        <p:nvSpPr>
+          <p:cNvPr id="5" name="Text 2"/>
+          <p:cNvSpPr/>
+          <p:nvPr/>
+        </p:nvSpPr>
+        <p:spPr>
+          <a:xfrm>
+            <a:off x="5349240" y="1783080"/>
+            <a:ext cx="6522415" cy="4663440"/>
+          </a:xfrm>
+          <a:prstGeom prst="rect">
+            <a:avLst/>
+          </a:prstGeom>
+          <a:noFill/>
+          <a:ln/>
+        </p:spPr>
+        <p:txBody>
+          <a:bodyPr wrap="square" lIns="0" tIns="0" rIns="0" bIns="0" rtlCol="0" anchor="ctr"/>
+          <a:lstStyle/>
+          <a:p>
+            <a:pPr algn="ctr" indent="0" marL="0">
+              <a:spcAft>
+                <a:spcPts val="800"/>
+              </a:spcAft>
+              <a:buNone/>
+            </a:pPr>
+            <a:r>
+              <a:rPr lang="en-US" sz="4000" b="1" dirty="0">
+                <a:solidFill>
+                  <a:srgbClr val="111111"/>
+                </a:solidFill>
+                <a:latin typeface="Times New Roman" pitchFamily="34" charset="0"/>
+                <a:ea typeface="Times New Roman" pitchFamily="34" charset="-122"/>
+                <a:cs typeface="Times New Roman" pitchFamily="34" charset="-120"/>
+              </a:rPr>
+              <a:t>Our next lesson will be on:</a:t>
+            </a:r>
+            <a:endParaRPr lang="en-US" sz="4000" dirty="0"/>
+          </a:p>
+          <a:p>
+            <a:pPr algn="ctr" indent="0" marL="0">
+              <a:spcAft>
+                <a:spcPts val="800"/>
+              </a:spcAft>
+              <a:buNone/>
+            </a:pPr>
+            <a:r>
+              <a:rPr lang="en-US" sz="4000" b="1" dirty="0">
+                <a:solidFill>
+                  <a:srgbClr val="990011"/>
+                </a:solidFill>
+                <a:latin typeface="Times New Roman" pitchFamily="34" charset="0"/>
+                <a:ea typeface="Times New Roman" pitchFamily="34" charset="-122"/>
+                <a:cs typeface="Times New Roman" pitchFamily="34" charset="-120"/>
+              </a:rPr>
+              <a:t>Lesson 3: Solar Radiation</a:t>
+            </a:r>
+            <a:endParaRPr lang="en-US" sz="4000" dirty="0"/>
+          </a:p>
+        </p:txBody>
+      </p:sp>
+      <p:sp>
+        <p:nvSpPr>
+          <p:cNvPr id="25" name="Slide Number Placeholder 0"/>
+          <p:cNvSpPr>
+            <a:spLocks noGrp="1"/>
+          </p:cNvSpPr>
+          <p:nvPr>
+            <p:ph type="sldNum" sz="quarter" idx="4294967295"/>
+          </p:nvPr>
+        </p:nvSpPr>
+        <p:spPr>
+          <a:xfrm>
+            <a:off x="27432" y="91440"/>
+            <a:ext cx="585216" cy="475488"/>
+          </a:xfrm>
+          <a:prstGeom prst="rect">
+            <a:avLst/>
+          </a:prstGeom>
+          <a:extLst>
+            <a:ext uri="{C572A759-6A51-4108-AA02-DFA0A04FC94B}">
+              <ma14:wrappingTextBoxFlag xmlns:ma14="http://schemas.microsoft.com/office/mac/drawingml/2011/main" val="0"/>
+            </a:ext>
+          </a:extLst>
+        </p:spPr>
+        <p:txBody>
+          <a:bodyPr/>
+          <a:lstStyle>
+            <a:lvl1pPr>
+              <a:defRPr sz="2000">
+                <a:solidFill>
+                  <a:srgbClr val="FFFFFF"/>
+                </a:solidFill>
+                <a:latin typeface="Calibri"/>
+                <a:ea typeface="Calibri"/>
+                <a:cs typeface="Calibri"/>
+              </a:defRPr>
+            </a:lvl1pPr>
+          </a:lstStyle>
+          <a:p>
+            <a:pPr algn="ctr"/>
+            <a:fld id="{F7021451-1387-4CA6-816F-3879F97B5CBC}" type="slidenum">
+              <a:rPr b="1" lang="en-US"/>
+              <a:t>60</a:t>
+            </a:fld>
+            <a:endParaRPr lang="en-US"/>
+          </a:p>
+        </p:txBody>
+      </p:sp>
+    </p:spTree>
+  </p:cSld>
+  <p:clrMapOvr>
+    <a:masterClrMapping/>
+  </p:clrMapOvr>
+</p:sld>
+</file>
+
+<file path=ppt/slides/slide61.xml><?xml version="1.0" encoding="utf-8"?>
+<p:sld xmlns:a="http://schemas.openxmlformats.org/drawingml/2006/main" xmlns:r="http://schemas.openxmlformats.org/officeDocument/2006/relationships" xmlns:p="http://schemas.openxmlformats.org/presentationml/2006/main">
+  <p:cSld name="Slide 61">
+    <p:spTree>
+      <p:nvGrpSpPr>
+        <p:cNvPr id="1" name=""/>
+        <p:cNvGrpSpPr/>
+        <p:nvPr/>
+      </p:nvGrpSpPr>
+      <p:grpSpPr>
+        <a:xfrm>
+          <a:off x="0" y="0"/>
+          <a:ext cx="0" cy="0"/>
+          <a:chOff x="0" y="0"/>
+          <a:chExt cx="0" cy="0"/>
+        </a:xfrm>
+      </p:grpSpPr>
+      <p:sp>
+        <p:nvSpPr>
+          <p:cNvPr id="2" name="Text 0"/>
+          <p:cNvSpPr/>
+          <p:nvPr/>
+        </p:nvSpPr>
+        <p:spPr>
+          <a:xfrm>
+            <a:off x="457200" y="713232"/>
+            <a:ext cx="11368735" cy="274320"/>
+          </a:xfrm>
+          <a:prstGeom prst="rect">
+            <a:avLst/>
+          </a:prstGeom>
+          <a:noFill/>
+          <a:ln/>
+        </p:spPr>
+        <p:txBody>
+          <a:bodyPr wrap="square" lIns="0" tIns="0" rIns="0" bIns="0" rtlCol="0" anchor="ctr"/>
+          <a:lstStyle/>
+          <a:p>
+            <a:pPr algn="r" indent="0" marL="0">
+              <a:buNone/>
+            </a:pPr>
+            <a:r>
+              <a:rPr lang="en-US" sz="1400" b="1" dirty="0">
+                <a:solidFill>
+                  <a:srgbClr val="1C3F6E"/>
+                </a:solidFill>
+                <a:latin typeface="Calibri" pitchFamily="34" charset="0"/>
+                <a:ea typeface="Calibri" pitchFamily="34" charset="-122"/>
+                <a:cs typeface="Calibri" pitchFamily="34" charset="-120"/>
+              </a:rPr>
+              <a:t>BILINGUAL GAME</a:t>
+            </a:r>
+            <a:endParaRPr lang="en-US" sz="1400" dirty="0"/>
+          </a:p>
+        </p:txBody>
+      </p:sp>
+      <p:sp>
+        <p:nvSpPr>
+          <p:cNvPr id="3" name="Text 1"/>
+          <p:cNvSpPr/>
+          <p:nvPr/>
+        </p:nvSpPr>
+        <p:spPr>
+          <a:xfrm>
+            <a:off x="457200" y="1005840"/>
+            <a:ext cx="11277295" cy="731520"/>
+          </a:xfrm>
+          <a:prstGeom prst="rect">
+            <a:avLst/>
+          </a:prstGeom>
+          <a:noFill/>
+          <a:ln/>
+        </p:spPr>
+        <p:txBody>
+          <a:bodyPr wrap="square" lIns="0" tIns="0" rIns="0" bIns="0" rtlCol="0" anchor="ctr"/>
+          <a:lstStyle/>
+          <a:p>
+            <a:pPr algn="ctr" indent="0" marL="0">
+              <a:buNone/>
+            </a:pPr>
+            <a:r>
+              <a:rPr lang="en-US" sz="3600" b="1" dirty="0">
+                <a:solidFill>
+                  <a:srgbClr val="990011"/>
+                </a:solidFill>
+                <a:latin typeface="Times New Roman" pitchFamily="34" charset="0"/>
+                <a:ea typeface="Times New Roman" pitchFamily="34" charset="-122"/>
+                <a:cs typeface="Times New Roman" pitchFamily="34" charset="-120"/>
+              </a:rPr>
               <a:t>Bilingual Game (Jeu Bilingue)</a:t>
             </a:r>
             <a:endParaRPr lang="en-US" sz="3600" dirty="0"/>
@@ -20722,7 +22635,7 @@
       </p:sp>
       <p:graphicFrame>
         <p:nvGraphicFramePr>
-          <p:cNvPr id="59" name="Table 0"/>
+          <p:cNvPr id="62" name="Table 0"/>
           <p:cNvGraphicFramePr>
             <a:graphicFrameLocks noGrp="1"/>
           </p:cNvGraphicFramePr>
@@ -21758,7 +23671,7 @@
             <a:pPr algn="ctr"/>
             <a:fld id="{F7021451-1387-4CA6-816F-3879F97B5CBC}" type="slidenum">
               <a:rPr b="1" lang="en-US"/>
-              <a:t>58</a:t>
+              <a:t>61</a:t>
             </a:fld>
             <a:endParaRPr lang="en-US"/>
           </a:p>
@@ -21772,9 +23685,9 @@
 </p:sld>
 </file>
 
-<file path=ppt/slides/slide59.xml><?xml version="1.0" encoding="utf-8"?>
+<file path=ppt/slides/slide62.xml><?xml version="1.0" encoding="utf-8"?>
 <p:sld xmlns:a="http://schemas.openxmlformats.org/drawingml/2006/main" xmlns:r="http://schemas.openxmlformats.org/officeDocument/2006/relationships" xmlns:p="http://schemas.openxmlformats.org/presentationml/2006/main">
-  <p:cSld name="Slide 59">
+  <p:cSld name="Slide 62">
     <p:spTree>
       <p:nvGrpSpPr>
         <p:cNvPr id="1" name=""/>
@@ -21869,7 +23782,7 @@
       </p:sp>
       <p:graphicFrame>
         <p:nvGraphicFramePr>
-          <p:cNvPr id="60" name="Table 0"/>
+          <p:cNvPr id="63" name="Table 0"/>
           <p:cNvGraphicFramePr>
             <a:graphicFrameLocks noGrp="1"/>
           </p:cNvGraphicFramePr>
@@ -22491,7 +24404,7 @@
             <a:pPr algn="ctr"/>
             <a:fld id="{F7021451-1387-4CA6-816F-3879F97B5CBC}" type="slidenum">
               <a:rPr b="1" lang="en-US"/>
-              <a:t>59</a:t>
+              <a:t>62</a:t>
             </a:fld>
             <a:endParaRPr lang="en-US"/>
           </a:p>
@@ -22505,9 +24418,9 @@
 </p:sld>
 </file>
 
-<file path=ppt/slides/slide6.xml><?xml version="1.0" encoding="utf-8"?>
+<file path=ppt/slides/slide63.xml><?xml version="1.0" encoding="utf-8"?>
 <p:sld xmlns:a="http://schemas.openxmlformats.org/drawingml/2006/main" xmlns:r="http://schemas.openxmlformats.org/officeDocument/2006/relationships" xmlns:p="http://schemas.openxmlformats.org/presentationml/2006/main">
-  <p:cSld name="Slide 6">
+  <p:cSld name="Slide 63">
     <p:spTree>
       <p:nvGrpSpPr>
         <p:cNvPr id="1" name=""/>
@@ -22555,46 +24468,22 @@
                 <a:ea typeface="Calibri" pitchFamily="34" charset="-122"/>
                 <a:cs typeface="Calibri" pitchFamily="34" charset="-120"/>
               </a:rPr>
-              <a:t>LESSON PLAN</a:t>
+              <a:t>LOGBOOK</a:t>
             </a:r>
             <a:endParaRPr lang="en-US" sz="1400" dirty="0"/>
           </a:p>
         </p:txBody>
       </p:sp>
-      <p:pic>
-        <p:nvPicPr>
-          <p:cNvPr id="3" name="Image 0" descr="/home/claude/f4/img/minesec_sheet.png">    </p:cNvPr>
-          <p:cNvPicPr>
-            <a:picLocks noChangeAspect="1"/>
-          </p:cNvPicPr>
-          <p:nvPr/>
-        </p:nvPicPr>
-        <p:blipFill>
-          <a:blip r:embed="rId1"/>
-          <a:stretch>
-            <a:fillRect/>
-          </a:stretch>
-        </p:blipFill>
-        <p:spPr>
-          <a:xfrm>
-            <a:off x="0" y="658368"/>
-            <a:ext cx="2468880" cy="5833872"/>
-          </a:xfrm>
-          <a:prstGeom prst="rect">
-            <a:avLst/>
-          </a:prstGeom>
-        </p:spPr>
-      </p:pic>
-      <p:sp>
-        <p:nvSpPr>
-          <p:cNvPr id="4" name="Text 1"/>
+      <p:sp>
+        <p:nvSpPr>
+          <p:cNvPr id="3" name="Text 1"/>
           <p:cNvSpPr/>
           <p:nvPr/>
         </p:nvSpPr>
         <p:spPr>
           <a:xfrm>
-            <a:off x="2697480" y="1005840"/>
-            <a:ext cx="9174175" cy="731520"/>
+            <a:off x="457200" y="1005840"/>
+            <a:ext cx="11277295" cy="731520"/>
           </a:xfrm>
           <a:prstGeom prst="rect">
             <a:avLst/>
@@ -22603,9 +24492,7 @@
           <a:ln/>
         </p:spPr>
         <p:txBody>
-          <a:bodyPr wrap="square" lIns="0" tIns="0" rIns="0" bIns="0" rtlCol="0" anchor="ctr">
-            <a:normAutofit/>
-          </a:bodyPr>
+          <a:bodyPr wrap="square" lIns="0" tIns="0" rIns="0" bIns="0" rtlCol="0" anchor="ctr"/>
           <a:lstStyle/>
           <a:p>
             <a:pPr algn="ctr" indent="0" marL="0">
@@ -22620,311 +24507,6 @@
                 <a:ea typeface="Times New Roman" pitchFamily="34" charset="-122"/>
                 <a:cs typeface="Times New Roman" pitchFamily="34" charset="-120"/>
               </a:rPr>
-              <a:t>Lesson Plan</a:t>
-            </a:r>
-            <a:endParaRPr lang="en-US" sz="3600" dirty="0"/>
-          </a:p>
-        </p:txBody>
-      </p:sp>
-      <p:sp>
-        <p:nvSpPr>
-          <p:cNvPr id="5" name="Text 2"/>
-          <p:cNvSpPr/>
-          <p:nvPr/>
-        </p:nvSpPr>
-        <p:spPr>
-          <a:xfrm>
-            <a:off x="2697480" y="1783080"/>
-            <a:ext cx="9174175" cy="4663440"/>
-          </a:xfrm>
-          <a:prstGeom prst="rect">
-            <a:avLst/>
-          </a:prstGeom>
-          <a:noFill/>
-          <a:ln/>
-        </p:spPr>
-        <p:txBody>
-          <a:bodyPr wrap="square" lIns="0" tIns="0" rIns="0" bIns="0" rtlCol="0" anchor="t"/>
-          <a:lstStyle/>
-          <a:p>
-            <a:pPr algn="l" marL="342900" indent="-342900">
-              <a:spcAft>
-                <a:spcPts val="800"/>
-              </a:spcAft>
-              <a:buSzPct val="100000"/>
-              <a:buFont typeface="+mj-lt"/>
-              <a:buAutoNum type="arabicPeriod" startAt="1"/>
-            </a:pPr>
-            <a:r>
-              <a:rPr lang="en-US" sz="4000" dirty="0">
-                <a:solidFill>
-                  <a:srgbClr val="111111"/>
-                </a:solidFill>
-                <a:latin typeface="Times New Roman" pitchFamily="34" charset="0"/>
-                <a:ea typeface="Times New Roman" pitchFamily="34" charset="-122"/>
-                <a:cs typeface="Times New Roman" pitchFamily="34" charset="-120"/>
-              </a:rPr>
-              <a:t>Correction of the homework</a:t>
-            </a:r>
-            <a:endParaRPr lang="en-US" sz="4000" dirty="0"/>
-          </a:p>
-          <a:p>
-            <a:pPr algn="l" marL="342900" indent="-342900">
-              <a:spcAft>
-                <a:spcPts val="800"/>
-              </a:spcAft>
-              <a:buSzPct val="100000"/>
-              <a:buFont typeface="+mj-lt"/>
-              <a:buAutoNum type="arabicPeriod" startAt="1"/>
-            </a:pPr>
-            <a:r>
-              <a:rPr lang="en-US" sz="4000" dirty="0">
-                <a:solidFill>
-                  <a:srgbClr val="111111"/>
-                </a:solidFill>
-                <a:latin typeface="Times New Roman" pitchFamily="34" charset="0"/>
-                <a:ea typeface="Times New Roman" pitchFamily="34" charset="-122"/>
-                <a:cs typeface="Times New Roman" pitchFamily="34" charset="-120"/>
-              </a:rPr>
-              <a:t>Objectives and recall</a:t>
-            </a:r>
-            <a:endParaRPr lang="en-US" sz="4000" dirty="0"/>
-          </a:p>
-          <a:p>
-            <a:pPr algn="l" marL="342900" indent="-342900">
-              <a:spcAft>
-                <a:spcPts val="800"/>
-              </a:spcAft>
-              <a:buSzPct val="100000"/>
-              <a:buFont typeface="+mj-lt"/>
-              <a:buAutoNum type="arabicPeriod" startAt="1"/>
-            </a:pPr>
-            <a:r>
-              <a:rPr lang="en-US" sz="4000" dirty="0">
-                <a:solidFill>
-                  <a:srgbClr val="111111"/>
-                </a:solidFill>
-                <a:latin typeface="Times New Roman" pitchFamily="34" charset="0"/>
-                <a:ea typeface="Times New Roman" pitchFamily="34" charset="-122"/>
-                <a:cs typeface="Times New Roman" pitchFamily="34" charset="-120"/>
-              </a:rPr>
-              <a:t>Real-life situation and action to take</a:t>
-            </a:r>
-            <a:endParaRPr lang="en-US" sz="4000" dirty="0"/>
-          </a:p>
-          <a:p>
-            <a:pPr algn="l" marL="342900" indent="-342900">
-              <a:spcAft>
-                <a:spcPts val="800"/>
-              </a:spcAft>
-              <a:buSzPct val="100000"/>
-              <a:buFont typeface="+mj-lt"/>
-              <a:buAutoNum type="arabicPeriod" startAt="1"/>
-            </a:pPr>
-            <a:r>
-              <a:rPr lang="en-US" sz="4000" dirty="0">
-                <a:solidFill>
-                  <a:srgbClr val="111111"/>
-                </a:solidFill>
-                <a:latin typeface="Times New Roman" pitchFamily="34" charset="0"/>
-                <a:ea typeface="Times New Roman" pitchFamily="34" charset="-122"/>
-                <a:cs typeface="Times New Roman" pitchFamily="34" charset="-120"/>
-              </a:rPr>
-              <a:t>Learning activities</a:t>
-            </a:r>
-            <a:endParaRPr lang="en-US" sz="4000" dirty="0"/>
-          </a:p>
-          <a:p>
-            <a:pPr algn="l" marL="342900" indent="-342900">
-              <a:spcAft>
-                <a:spcPts val="800"/>
-              </a:spcAft>
-              <a:buSzPct val="100000"/>
-              <a:buFont typeface="+mj-lt"/>
-              <a:buAutoNum type="arabicPeriod" startAt="1"/>
-            </a:pPr>
-            <a:r>
-              <a:rPr lang="en-US" sz="4000" dirty="0">
-                <a:solidFill>
-                  <a:srgbClr val="111111"/>
-                </a:solidFill>
-                <a:latin typeface="Times New Roman" pitchFamily="34" charset="0"/>
-                <a:ea typeface="Times New Roman" pitchFamily="34" charset="-122"/>
-                <a:cs typeface="Times New Roman" pitchFamily="34" charset="-120"/>
-              </a:rPr>
-              <a:t>Board summary</a:t>
-            </a:r>
-            <a:endParaRPr lang="en-US" sz="4000" dirty="0"/>
-          </a:p>
-          <a:p>
-            <a:pPr algn="l" marL="342900" indent="-342900">
-              <a:spcAft>
-                <a:spcPts val="800"/>
-              </a:spcAft>
-              <a:buSzPct val="100000"/>
-              <a:buFont typeface="+mj-lt"/>
-              <a:buAutoNum type="arabicPeriod" startAt="1"/>
-            </a:pPr>
-            <a:r>
-              <a:rPr lang="en-US" sz="4000" dirty="0">
-                <a:solidFill>
-                  <a:srgbClr val="111111"/>
-                </a:solidFill>
-                <a:latin typeface="Times New Roman" pitchFamily="34" charset="0"/>
-                <a:ea typeface="Times New Roman" pitchFamily="34" charset="-122"/>
-                <a:cs typeface="Times New Roman" pitchFamily="34" charset="-120"/>
-              </a:rPr>
-              <a:t>Evaluation, remediation and homework</a:t>
-            </a:r>
-            <a:endParaRPr lang="en-US" sz="4000" dirty="0"/>
-          </a:p>
-        </p:txBody>
-      </p:sp>
-      <p:sp>
-        <p:nvSpPr>
-          <p:cNvPr id="25" name="Slide Number Placeholder 0"/>
-          <p:cNvSpPr>
-            <a:spLocks noGrp="1"/>
-          </p:cNvSpPr>
-          <p:nvPr>
-            <p:ph type="sldNum" sz="quarter" idx="4294967295"/>
-          </p:nvPr>
-        </p:nvSpPr>
-        <p:spPr>
-          <a:xfrm>
-            <a:off x="27432" y="91440"/>
-            <a:ext cx="585216" cy="475488"/>
-          </a:xfrm>
-          <a:prstGeom prst="rect">
-            <a:avLst/>
-          </a:prstGeom>
-          <a:extLst>
-            <a:ext uri="{C572A759-6A51-4108-AA02-DFA0A04FC94B}">
-              <ma14:wrappingTextBoxFlag xmlns:ma14="http://schemas.microsoft.com/office/mac/drawingml/2011/main" val="0"/>
-            </a:ext>
-          </a:extLst>
-        </p:spPr>
-        <p:txBody>
-          <a:bodyPr/>
-          <a:lstStyle>
-            <a:lvl1pPr>
-              <a:defRPr sz="2000">
-                <a:solidFill>
-                  <a:srgbClr val="FFFFFF"/>
-                </a:solidFill>
-                <a:latin typeface="Calibri"/>
-                <a:ea typeface="Calibri"/>
-                <a:cs typeface="Calibri"/>
-              </a:defRPr>
-            </a:lvl1pPr>
-          </a:lstStyle>
-          <a:p>
-            <a:pPr algn="ctr"/>
-            <a:fld id="{F7021451-1387-4CA6-816F-3879F97B5CBC}" type="slidenum">
-              <a:rPr b="1" lang="en-US"/>
-              <a:t>6</a:t>
-            </a:fld>
-            <a:endParaRPr lang="en-US"/>
-          </a:p>
-        </p:txBody>
-      </p:sp>
-    </p:spTree>
-  </p:cSld>
-  <p:clrMapOvr>
-    <a:masterClrMapping/>
-  </p:clrMapOvr>
-</p:sld>
-</file>
-
-<file path=ppt/slides/slide60.xml><?xml version="1.0" encoding="utf-8"?>
-<p:sld xmlns:a="http://schemas.openxmlformats.org/drawingml/2006/main" xmlns:r="http://schemas.openxmlformats.org/officeDocument/2006/relationships" xmlns:p="http://schemas.openxmlformats.org/presentationml/2006/main">
-  <p:cSld name="Slide 60">
-    <p:spTree>
-      <p:nvGrpSpPr>
-        <p:cNvPr id="1" name=""/>
-        <p:cNvGrpSpPr/>
-        <p:nvPr/>
-      </p:nvGrpSpPr>
-      <p:grpSpPr>
-        <a:xfrm>
-          <a:off x="0" y="0"/>
-          <a:ext cx="0" cy="0"/>
-          <a:chOff x="0" y="0"/>
-          <a:chExt cx="0" cy="0"/>
-        </a:xfrm>
-      </p:grpSpPr>
-      <p:sp>
-        <p:nvSpPr>
-          <p:cNvPr id="2" name="Text 0"/>
-          <p:cNvSpPr/>
-          <p:nvPr/>
-        </p:nvSpPr>
-        <p:spPr>
-          <a:xfrm>
-            <a:off x="457200" y="713232"/>
-            <a:ext cx="11368735" cy="274320"/>
-          </a:xfrm>
-          <a:prstGeom prst="rect">
-            <a:avLst/>
-          </a:prstGeom>
-          <a:noFill/>
-          <a:ln/>
-        </p:spPr>
-        <p:txBody>
-          <a:bodyPr wrap="square" lIns="0" tIns="0" rIns="0" bIns="0" rtlCol="0" anchor="ctr"/>
-          <a:lstStyle/>
-          <a:p>
-            <a:pPr algn="r" indent="0" marL="0">
-              <a:buNone/>
-            </a:pPr>
-            <a:r>
-              <a:rPr lang="en-US" sz="1400" b="1" dirty="0">
-                <a:solidFill>
-                  <a:srgbClr val="1C3F6E"/>
-                </a:solidFill>
-                <a:latin typeface="Calibri" pitchFamily="34" charset="0"/>
-                <a:ea typeface="Calibri" pitchFamily="34" charset="-122"/>
-                <a:cs typeface="Calibri" pitchFamily="34" charset="-120"/>
-              </a:rPr>
-              <a:t>LOGBOOK</a:t>
-            </a:r>
-            <a:endParaRPr lang="en-US" sz="1400" dirty="0"/>
-          </a:p>
-        </p:txBody>
-      </p:sp>
-      <p:sp>
-        <p:nvSpPr>
-          <p:cNvPr id="3" name="Text 1"/>
-          <p:cNvSpPr/>
-          <p:nvPr/>
-        </p:nvSpPr>
-        <p:spPr>
-          <a:xfrm>
-            <a:off x="457200" y="1005840"/>
-            <a:ext cx="11277295" cy="731520"/>
-          </a:xfrm>
-          <a:prstGeom prst="rect">
-            <a:avLst/>
-          </a:prstGeom>
-          <a:noFill/>
-          <a:ln/>
-        </p:spPr>
-        <p:txBody>
-          <a:bodyPr wrap="square" lIns="0" tIns="0" rIns="0" bIns="0" rtlCol="0" anchor="ctr"/>
-          <a:lstStyle/>
-          <a:p>
-            <a:pPr algn="ctr" indent="0" marL="0">
-              <a:buNone/>
-            </a:pPr>
-            <a:r>
-              <a:rPr lang="en-US" sz="3600" b="1" dirty="0">
-                <a:solidFill>
-                  <a:srgbClr val="990011"/>
-                </a:solidFill>
-                <a:latin typeface="Times New Roman" pitchFamily="34" charset="0"/>
-                <a:ea typeface="Times New Roman" pitchFamily="34" charset="-122"/>
-                <a:cs typeface="Times New Roman" pitchFamily="34" charset="-120"/>
-              </a:rPr>
               <a:t>Official Logbook (2/2)</a:t>
             </a:r>
             <a:endParaRPr lang="en-US" sz="3600" dirty="0"/>
@@ -22933,7 +24515,7 @@
       </p:sp>
       <p:graphicFrame>
         <p:nvGraphicFramePr>
-          <p:cNvPr id="61" name="Table 0"/>
+          <p:cNvPr id="64" name="Table 0"/>
           <p:cNvGraphicFramePr>
             <a:graphicFrameLocks noGrp="1"/>
           </p:cNvGraphicFramePr>
@@ -23043,7 +24625,7 @@
                           <a:ea typeface="Calibri" pitchFamily="34" charset="-122"/>
                           <a:cs typeface="Calibri" pitchFamily="34" charset="-120"/>
                         </a:rPr>
-                        <a:t>DEFINITIONS; Structure by Chemical Composition; Structure by Temperature; The Ozone Layer.</a:t>
+                        <a:t>DEFINITIONS; Chemical Characteristics: Homosphere and Heterosphere; The Four Layers; The Isothermal Layers; Function; Depletion; Measures.</a:t>
                       </a:r>
                       <a:endParaRPr lang="en-US" sz="1600" dirty="0">
                         <a:latin typeface="Calibri" charset="0"/>
@@ -23693,7 +25275,7 @@
             <a:pPr algn="ctr"/>
             <a:fld id="{F7021451-1387-4CA6-816F-3879F97B5CBC}" type="slidenum">
               <a:rPr b="1" lang="en-US"/>
-              <a:t>60</a:t>
+              <a:t>63</a:t>
             </a:fld>
             <a:endParaRPr lang="en-US"/>
           </a:p>
@@ -23707,9 +25289,9 @@
 </p:sld>
 </file>
 
-<file path=ppt/slides/slide61.xml><?xml version="1.0" encoding="utf-8"?>
+<file path=ppt/slides/slide64.xml><?xml version="1.0" encoding="utf-8"?>
 <p:sld xmlns:a="http://schemas.openxmlformats.org/drawingml/2006/main" xmlns:r="http://schemas.openxmlformats.org/officeDocument/2006/relationships" xmlns:p="http://schemas.openxmlformats.org/presentationml/2006/main">
-  <p:cSld name="Slide 61">
+  <p:cSld name="Slide 64">
     <p:spTree>
       <p:nvGrpSpPr>
         <p:cNvPr id="1" name=""/>
@@ -24018,7 +25600,7 @@
             <a:pPr algn="ctr"/>
             <a:fld id="{F7021451-1387-4CA6-816F-3879F97B5CBC}" type="slidenum">
               <a:rPr b="1" lang="en-US"/>
-              <a:t>61</a:t>
+              <a:t>64</a:t>
             </a:fld>
             <a:endParaRPr lang="en-US"/>
           </a:p>
@@ -24032,9 +25614,9 @@
 </p:sld>
 </file>
 
-<file path=ppt/slides/slide62.xml><?xml version="1.0" encoding="utf-8"?>
+<file path=ppt/slides/slide65.xml><?xml version="1.0" encoding="utf-8"?>
 <p:sld xmlns:a="http://schemas.openxmlformats.org/drawingml/2006/main" xmlns:r="http://schemas.openxmlformats.org/officeDocument/2006/relationships" xmlns:p="http://schemas.openxmlformats.org/presentationml/2006/main">
-  <p:cSld name="Slide 62">
+  <p:cSld name="Slide 65">
     <p:spTree>
       <p:nvGrpSpPr>
         <p:cNvPr id="1" name=""/>
@@ -24322,7 +25904,7 @@
             <a:pPr algn="ctr"/>
             <a:fld id="{F7021451-1387-4CA6-816F-3879F97B5CBC}" type="slidenum">
               <a:rPr b="1" lang="en-US"/>
-              <a:t>62</a:t>
+              <a:t>65</a:t>
             </a:fld>
             <a:endParaRPr lang="en-US"/>
           </a:p>
